--- a/system-design-101/vi/lessons/sd-02-032/slides/sd-02-032.pptx
+++ b/system-design-101/vi/lessons/sd-02-032/slides/sd-02-032.pptx
@@ -1884,7 +1884,7 @@
               <a:buNone/>
             </a:pPr>
             <a:r>
-              <a:rPr lang="en-US" sz="3000" dirty="0" spc="-10" kern="0">
+              <a:rPr lang="en-US" sz="3000" dirty="0" spc="-90" kern="0">
                 <a:solidFill>
                   <a:srgbClr val="E4E1D8"/>
                 </a:solidFill>
@@ -1892,10 +1892,10 @@
                 <a:ea typeface="Be Vietnam Pro" pitchFamily="34" charset="-122"/>
                 <a:cs typeface="Be Vietnam Pro" pitchFamily="34" charset="-120"/>
               </a:rPr>
-              <a:t>Một</a:t>
-            </a:r>
-            <a:r>
-              <a:rPr lang="en-US" sz="3000" dirty="0" spc="-1" kern="0">
+              <a:t>Tám</a:t>
+            </a:r>
+            <a:r>
+              <a:rPr lang="en-US" sz="3000" dirty="0" spc="0" kern="0">
                 <a:solidFill>
                   <a:srgbClr val="E4E1D8"/>
                 </a:solidFill>
@@ -1903,7 +1903,40 @@
                 <a:ea typeface="Be Vietnam Pro" pitchFamily="34" charset="-122"/>
                 <a:cs typeface="Be Vietnam Pro" pitchFamily="34" charset="-120"/>
               </a:rPr>
-              <a:t> lần</a:t>
+              <a:t> mảng</a:t>
+            </a:r>
+            <a:r>
+              <a:rPr lang="en-US" sz="3000" dirty="0" spc="-11" kern="0">
+                <a:solidFill>
+                  <a:srgbClr val="E4E1D8"/>
+                </a:solidFill>
+                <a:latin typeface="Be Vietnam Pro" pitchFamily="34" charset="0"/>
+                <a:ea typeface="Be Vietnam Pro" pitchFamily="34" charset="-122"/>
+                <a:cs typeface="Be Vietnam Pro" pitchFamily="34" charset="-120"/>
+              </a:rPr>
+              <a:t> gồm</a:t>
+            </a:r>
+            <a:r>
+              <a:rPr lang="en-US" sz="3000" dirty="0" spc="19" kern="0">
+                <a:solidFill>
+                  <a:srgbClr val="E4E1D8"/>
+                </a:solidFill>
+                <a:latin typeface="Be Vietnam Pro" pitchFamily="34" charset="0"/>
+                <a:ea typeface="Be Vietnam Pro" pitchFamily="34" charset="-122"/>
+                <a:cs typeface="Be Vietnam Pro" pitchFamily="34" charset="-120"/>
+              </a:rPr>
+              <a:t> những</a:t>
+            </a:r>
+            <a:r>
+              <a:rPr lang="en-US" sz="3000" dirty="0" spc="1" kern="0">
+                <a:solidFill>
+                  <a:srgbClr val="E4E1D8"/>
+                </a:solidFill>
+                <a:latin typeface="Be Vietnam Pro" pitchFamily="34" charset="0"/>
+                <a:ea typeface="Be Vietnam Pro" pitchFamily="34" charset="-122"/>
+                <a:cs typeface="Be Vietnam Pro" pitchFamily="34" charset="-120"/>
+              </a:rPr>
+              <a:t> công cụ</a:t>
             </a:r>
             <a:r>
               <a:rPr lang="en-US" sz="3000" dirty="0" spc="-2" kern="0">
@@ -1914,51 +1947,7 @@
                 <a:ea typeface="Be Vietnam Pro" pitchFamily="34" charset="-122"/>
                 <a:cs typeface="Be Vietnam Pro" pitchFamily="34" charset="-120"/>
               </a:rPr>
-              <a:t> bấm</a:t>
-            </a:r>
-            <a:r>
-              <a:rPr lang="en-US" sz="3000" dirty="0" spc="-21" kern="0">
-                <a:solidFill>
-                  <a:srgbClr val="E4E1D8"/>
-                </a:solidFill>
-                <a:latin typeface="Be Vietnam Pro" pitchFamily="34" charset="0"/>
-                <a:ea typeface="Be Vietnam Pro" pitchFamily="34" charset="-122"/>
-                <a:cs typeface="Be Vietnam Pro" pitchFamily="34" charset="-120"/>
-              </a:rPr>
-              <a:t> xem</a:t>
-            </a:r>
-            <a:r>
-              <a:rPr lang="en-US" sz="3000" dirty="0" spc="42" kern="0">
-                <a:solidFill>
-                  <a:srgbClr val="E4E1D8"/>
-                </a:solidFill>
-                <a:latin typeface="Be Vietnam Pro" pitchFamily="34" charset="0"/>
-                <a:ea typeface="Be Vietnam Pro" pitchFamily="34" charset="-122"/>
-                <a:cs typeface="Be Vietnam Pro" pitchFamily="34" charset="-120"/>
-              </a:rPr>
-              <a:t> đi</a:t>
-            </a:r>
-            <a:r>
-              <a:rPr lang="en-US" sz="3000" dirty="0" spc="2" kern="0">
-                <a:solidFill>
-                  <a:srgbClr val="E4E1D8"/>
-                </a:solidFill>
-                <a:latin typeface="Be Vietnam Pro" pitchFamily="34" charset="0"/>
-                <a:ea typeface="Be Vietnam Pro" pitchFamily="34" charset="-122"/>
-                <a:cs typeface="Be Vietnam Pro" pitchFamily="34" charset="-120"/>
-              </a:rPr>
-              <a:t> qua</a:t>
-            </a:r>
-            <a:r>
-              <a:rPr lang="en-US" sz="3000" dirty="0" spc="10" kern="0">
-                <a:solidFill>
-                  <a:srgbClr val="E4E1D8"/>
-                </a:solidFill>
-                <a:latin typeface="Be Vietnam Pro" pitchFamily="34" charset="0"/>
-                <a:ea typeface="Be Vietnam Pro" pitchFamily="34" charset="-122"/>
-                <a:cs typeface="Be Vietnam Pro" pitchFamily="34" charset="-120"/>
-              </a:rPr>
-              <a:t> đâu?</a:t>
+              <a:t> nào?</a:t>
             </a:r>
             <a:endParaRPr lang="en-US" sz="3000" dirty="0"/>
           </a:p>
@@ -5416,6 +5405,17 @@
               <a:buNone/>
             </a:pPr>
             <a:r>
+              <a:rPr lang="en-US" sz="1950" b="1" spc="300" kern="0" dirty="0">
+                <a:solidFill>
+                  <a:srgbClr val="7C93FF"/>
+                </a:solidFill>
+                <a:latin typeface="Be Vietnam Pro" pitchFamily="34" charset="0"/>
+                <a:ea typeface="Be Vietnam Pro" pitchFamily="34" charset="-122"/>
+                <a:cs typeface="Be Vietnam Pro" pitchFamily="34" charset="-120"/>
+              </a:rPr>
+              <a:t>GẦN</a:t>
+            </a:r>
+            <a:r>
               <a:rPr lang="en-US" sz="1950" b="1" spc="302" kern="0" dirty="0">
                 <a:solidFill>
                   <a:srgbClr val="7C93FF"/>
@@ -5424,10 +5424,10 @@
                 <a:ea typeface="Be Vietnam Pro" pitchFamily="34" charset="-122"/>
                 <a:cs typeface="Be Vietnam Pro" pitchFamily="34" charset="-120"/>
               </a:rPr>
-              <a:t>ĐƯỜNG</a:t>
-            </a:r>
-            <a:r>
-              <a:rPr lang="en-US" sz="1950" b="1" spc="299" kern="0" dirty="0">
+              <a:t> NGƯỜI</a:t>
+            </a:r>
+            <a:r>
+              <a:rPr lang="en-US" sz="1950" b="1" spc="298" kern="0" dirty="0">
                 <a:solidFill>
                   <a:srgbClr val="7C93FF"/>
                 </a:solidFill>
@@ -5435,7 +5435,7 @@
                 <a:ea typeface="Be Vietnam Pro" pitchFamily="34" charset="-122"/>
                 <a:cs typeface="Be Vietnam Pro" pitchFamily="34" charset="-120"/>
               </a:rPr>
-              <a:t> XEM PHIM</a:t>
+              <a:t> XEM</a:t>
             </a:r>
             <a:endParaRPr lang="en-US" sz="1950" dirty="0"/>
           </a:p>
@@ -5469,7 +5469,7 @@
               <a:buNone/>
             </a:pPr>
             <a:r>
-              <a:rPr lang="en-US" sz="6900" dirty="0" spc="-59" kern="0">
+              <a:rPr lang="en-US" sz="6900" dirty="0" spc="-3" kern="0">
                 <a:solidFill>
                   <a:srgbClr val="F3EEE3"/>
                 </a:solidFill>
@@ -5477,10 +5477,10 @@
                 <a:ea typeface="Bricolage Grotesque ExtraBold" pitchFamily="34" charset="-122"/>
                 <a:cs typeface="Bricolage Grotesque ExtraBold" pitchFamily="34" charset="-120"/>
               </a:rPr>
-              <a:t>Từ</a:t>
-            </a:r>
-            <a:r>
-              <a:rPr lang="en-US" sz="6900" dirty="0" spc="10" kern="0">
+              <a:t>Ứng</a:t>
+            </a:r>
+            <a:r>
+              <a:rPr lang="en-US" sz="6900" dirty="0" spc="21" kern="0">
                 <a:solidFill>
                   <a:srgbClr val="F3EEE3"/>
                 </a:solidFill>
@@ -5488,10 +5488,10 @@
                 <a:ea typeface="Bricolage Grotesque ExtraBold" pitchFamily="34" charset="-122"/>
                 <a:cs typeface="Bricolage Grotesque ExtraBold" pitchFamily="34" charset="-120"/>
               </a:rPr>
-              <a:t> ứng</a:t>
-            </a:r>
-            <a:r>
-              <a:rPr lang="en-US" sz="6900" dirty="0" spc="2" kern="0">
+              <a:t> dụng,</a:t>
+            </a:r>
+            <a:r>
+              <a:rPr lang="en-US" sz="6900" dirty="0" spc="0" kern="0">
                 <a:solidFill>
                   <a:srgbClr val="F3EEE3"/>
                 </a:solidFill>
@@ -5499,10 +5499,10 @@
                 <a:ea typeface="Bricolage Grotesque ExtraBold" pitchFamily="34" charset="-122"/>
                 <a:cs typeface="Bricolage Grotesque ExtraBold" pitchFamily="34" charset="-120"/>
               </a:rPr>
-              <a:t> dụng</a:t>
-            </a:r>
-            <a:r>
-              <a:rPr lang="en-US" sz="6900" dirty="0" spc="-63" kern="0">
+              <a:t> giao</a:t>
+            </a:r>
+            <a:r>
+              <a:rPr lang="en-US" sz="6900" dirty="0" spc="-6" kern="0">
                 <a:solidFill>
                   <a:srgbClr val="F3EEE3"/>
                 </a:solidFill>
@@ -5510,10 +5510,10 @@
                 <a:ea typeface="Bricolage Grotesque ExtraBold" pitchFamily="34" charset="-122"/>
                 <a:cs typeface="Bricolage Grotesque ExtraBold" pitchFamily="34" charset="-120"/>
               </a:rPr>
-              <a:t> tới</a:t>
-            </a:r>
-            <a:r>
-              <a:rPr lang="en-US" sz="6900" dirty="0" spc="0" kern="0">
+              <a:t> tiếp,</a:t>
+            </a:r>
+            <a:r>
+              <a:rPr lang="en-US" sz="6900" dirty="0" spc="-1" kern="0">
                 <a:solidFill>
                   <a:srgbClr val="F3EEE3"/>
                 </a:solidFill>
@@ -5521,7 +5521,18 @@
                 <a:ea typeface="Bricolage Grotesque ExtraBold" pitchFamily="34" charset="-122"/>
                 <a:cs typeface="Bricolage Grotesque ExtraBold" pitchFamily="34" charset="-120"/>
               </a:rPr>
-              <a:t> dịch vụ</a:t>
+              <a:t> dịch</a:t>
+            </a:r>
+            <a:r>
+              <a:rPr lang="en-US" sz="6900" dirty="0" spc="1" kern="0">
+                <a:solidFill>
+                  <a:srgbClr val="F3EEE3"/>
+                </a:solidFill>
+                <a:latin typeface="Bricolage Grotesque ExtraBold" pitchFamily="34" charset="0"/>
+                <a:ea typeface="Bricolage Grotesque ExtraBold" pitchFamily="34" charset="-122"/>
+                <a:cs typeface="Bricolage Grotesque ExtraBold" pitchFamily="34" charset="-120"/>
+              </a:rPr>
+              <a:t> vụ</a:t>
             </a:r>
             <a:endParaRPr lang="en-US" sz="6900" dirty="0"/>
           </a:p>
@@ -6403,7 +6414,7 @@
               <a:buNone/>
             </a:pPr>
             <a:r>
-              <a:rPr lang="en-US" sz="1950" b="1" spc="302" kern="0" dirty="0">
+              <a:rPr lang="en-US" sz="1950" b="1" spc="301" kern="0" dirty="0">
                 <a:solidFill>
                   <a:srgbClr val="B45309"/>
                 </a:solidFill>
@@ -6411,7 +6422,18 @@
                 <a:ea typeface="Be Vietnam Pro" pitchFamily="34" charset="-122"/>
                 <a:cs typeface="Be Vietnam Pro" pitchFamily="34" charset="-120"/>
               </a:rPr>
-              <a:t>PHÍA</a:t>
+              <a:t>NƠI</a:t>
+            </a:r>
+            <a:r>
+              <a:rPr lang="en-US" sz="1950" b="1" spc="326" kern="0" dirty="0">
+                <a:solidFill>
+                  <a:srgbClr val="B45309"/>
+                </a:solidFill>
+                <a:latin typeface="Be Vietnam Pro" pitchFamily="34" charset="0"/>
+                <a:ea typeface="Be Vietnam Pro" pitchFamily="34" charset="-122"/>
+                <a:cs typeface="Be Vietnam Pro" pitchFamily="34" charset="-120"/>
+              </a:rPr>
+              <a:t> LƯU</a:t>
             </a:r>
             <a:r>
               <a:rPr lang="en-US" sz="1950" b="1" spc="301" kern="0" dirty="0">
@@ -6423,39 +6445,6 @@
                 <a:cs typeface="Be Vietnam Pro" pitchFamily="34" charset="-120"/>
               </a:rPr>
               <a:t> DỮ LIỆU</a:t>
-            </a:r>
-            <a:r>
-              <a:rPr lang="en-US" sz="1950" b="1" spc="288" kern="0" dirty="0">
-                <a:solidFill>
-                  <a:srgbClr val="B45309"/>
-                </a:solidFill>
-                <a:latin typeface="Be Vietnam Pro" pitchFamily="34" charset="0"/>
-                <a:ea typeface="Be Vietnam Pro" pitchFamily="34" charset="-122"/>
-                <a:cs typeface="Be Vietnam Pro" pitchFamily="34" charset="-120"/>
-              </a:rPr>
-              <a:t> CỦA</a:t>
-            </a:r>
-            <a:r>
-              <a:rPr lang="en-US" sz="1950" b="1" spc="302" kern="0" dirty="0">
-                <a:solidFill>
-                  <a:srgbClr val="B45309"/>
-                </a:solidFill>
-                <a:latin typeface="Be Vietnam Pro" pitchFamily="34" charset="0"/>
-                <a:ea typeface="Be Vietnam Pro" pitchFamily="34" charset="-122"/>
-                <a:cs typeface="Be Vietnam Pro" pitchFamily="34" charset="-120"/>
-              </a:rPr>
-              <a:t> ĐƯỜNG</a:t>
-            </a:r>
-            <a:r>
-              <a:rPr lang="en-US" sz="1950" b="1" spc="301" kern="0" dirty="0">
-                <a:solidFill>
-                  <a:srgbClr val="B45309"/>
-                </a:solidFill>
-                <a:latin typeface="Be Vietnam Pro" pitchFamily="34" charset="0"/>
-                <a:ea typeface="Be Vietnam Pro" pitchFamily="34" charset="-122"/>
-                <a:cs typeface="Be Vietnam Pro" pitchFamily="34" charset="-120"/>
-              </a:rPr>
-              <a:t> ĐI</a:t>
             </a:r>
             <a:endParaRPr lang="en-US" sz="1950" dirty="0"/>
           </a:p>
@@ -6871,7 +6860,7 @@
               <a:t>Hai</a:t>
             </a:r>
             <a:r>
-              <a:rPr lang="en-US" sz="2100" dirty="0" spc="-3" kern="0">
+              <a:rPr lang="en-US" sz="2100" dirty="0" spc="-1" kern="0">
                 <a:solidFill>
                   <a:srgbClr val="6B6A66"/>
                 </a:solidFill>
@@ -6879,10 +6868,10 @@
                 <a:ea typeface="Be Vietnam Pro" pitchFamily="34" charset="-122"/>
                 <a:cs typeface="Be Vietnam Pro" pitchFamily="34" charset="-120"/>
               </a:rPr>
-              <a:t> chỗ</a:t>
-            </a:r>
-            <a:r>
-              <a:rPr lang="en-US" sz="2100" dirty="0" spc="1" kern="0">
+              <a:t> nhóm</a:t>
+            </a:r>
+            <a:r>
+              <a:rPr lang="en-US" sz="2100" dirty="0" spc="13" kern="0">
                 <a:solidFill>
                   <a:srgbClr val="6B6A66"/>
                 </a:solidFill>
@@ -6890,7 +6879,29 @@
                 <a:ea typeface="Be Vietnam Pro" pitchFamily="34" charset="-122"/>
                 <a:cs typeface="Be Vietnam Pro" pitchFamily="34" charset="-120"/>
               </a:rPr>
-              <a:t> giữ</a:t>
+              <a:t> lưu</a:t>
+            </a:r>
+            <a:r>
+              <a:rPr lang="en-US" sz="2100" dirty="0" spc="-1" kern="0">
+                <a:solidFill>
+                  <a:srgbClr val="6B6A66"/>
+                </a:solidFill>
+                <a:latin typeface="Be Vietnam Pro" pitchFamily="34" charset="0"/>
+                <a:ea typeface="Be Vietnam Pro" pitchFamily="34" charset="-122"/>
+                <a:cs typeface="Be Vietnam Pro" pitchFamily="34" charset="-120"/>
+              </a:rPr>
+              <a:t> trữ,</a:t>
+            </a:r>
+            <a:r>
+              <a:rPr lang="en-US" sz="2100" dirty="0" spc="-4" kern="0">
+                <a:solidFill>
+                  <a:srgbClr val="6B6A66"/>
+                </a:solidFill>
+                <a:latin typeface="Be Vietnam Pro" pitchFamily="34" charset="0"/>
+                <a:ea typeface="Be Vietnam Pro" pitchFamily="34" charset="-122"/>
+                <a:cs typeface="Be Vietnam Pro" pitchFamily="34" charset="-120"/>
+              </a:rPr>
+              <a:t> theo</a:t>
             </a:r>
             <a:r>
               <a:rPr lang="en-US" sz="2100" dirty="0" spc="-2" kern="0">
@@ -6901,10 +6912,10 @@
                 <a:ea typeface="Be Vietnam Pro" pitchFamily="34" charset="-122"/>
                 <a:cs typeface="Be Vietnam Pro" pitchFamily="34" charset="-120"/>
               </a:rPr>
-              <a:t> dữ</a:t>
-            </a:r>
-            <a:r>
-              <a:rPr lang="en-US" sz="2100" dirty="0" spc="1" kern="0">
+              <a:t> cách</a:t>
+            </a:r>
+            <a:r>
+              <a:rPr lang="en-US" sz="2100" dirty="0" spc="-1" kern="0">
                 <a:solidFill>
                   <a:srgbClr val="6B6A66"/>
                 </a:solidFill>
@@ -6912,10 +6923,10 @@
                 <a:ea typeface="Be Vietnam Pro" pitchFamily="34" charset="-122"/>
                 <a:cs typeface="Be Vietnam Pro" pitchFamily="34" charset="-120"/>
               </a:rPr>
-              <a:t> liệu</a:t>
-            </a:r>
-            <a:r>
-              <a:rPr lang="en-US" sz="2100" dirty="0" spc="-17" kern="0">
+              <a:t> chia mảng</a:t>
+            </a:r>
+            <a:r>
+              <a:rPr lang="en-US" sz="2100" dirty="0" spc="0" kern="0">
                 <a:solidFill>
                   <a:srgbClr val="6B6A66"/>
                 </a:solidFill>
@@ -6923,10 +6934,10 @@
                 <a:ea typeface="Be Vietnam Pro" pitchFamily="34" charset="-122"/>
                 <a:cs typeface="Be Vietnam Pro" pitchFamily="34" charset="-120"/>
               </a:rPr>
-              <a:t> trên</a:t>
-            </a:r>
-            <a:r>
-              <a:rPr lang="en-US" sz="2100" dirty="0" spc="4" kern="0">
+              <a:t> của</a:t>
+            </a:r>
+            <a:r>
+              <a:rPr lang="en-US" sz="2100" dirty="0" spc="-5" kern="0">
                 <a:solidFill>
                   <a:srgbClr val="6B6A66"/>
                 </a:solidFill>
@@ -6934,10 +6945,10 @@
                 <a:ea typeface="Be Vietnam Pro" pitchFamily="34" charset="-122"/>
                 <a:cs typeface="Be Vietnam Pro" pitchFamily="34" charset="-120"/>
               </a:rPr>
-              <a:t> đường</a:t>
-            </a:r>
-            <a:r>
-              <a:rPr lang="en-US" sz="2100" dirty="0" spc="-18" kern="0">
+              <a:t> bài</a:t>
+            </a:r>
+            <a:r>
+              <a:rPr lang="en-US" sz="2100" dirty="0" spc="0" kern="0">
                 <a:solidFill>
                   <a:srgbClr val="6B6A66"/>
                 </a:solidFill>
@@ -6945,18 +6956,7 @@
                 <a:ea typeface="Be Vietnam Pro" pitchFamily="34" charset="-122"/>
                 <a:cs typeface="Be Vietnam Pro" pitchFamily="34" charset="-120"/>
               </a:rPr>
-              <a:t> xem</a:t>
-            </a:r>
-            <a:r>
-              <a:rPr lang="en-US" sz="2100" dirty="0" spc="-1" kern="0">
-                <a:solidFill>
-                  <a:srgbClr val="6B6A66"/>
-                </a:solidFill>
-                <a:latin typeface="Be Vietnam Pro" pitchFamily="34" charset="0"/>
-                <a:ea typeface="Be Vietnam Pro" pitchFamily="34" charset="-122"/>
-                <a:cs typeface="Be Vietnam Pro" pitchFamily="34" charset="-120"/>
-              </a:rPr>
-              <a:t> phim.</a:t>
+              <a:t> nguồn.</a:t>
             </a:r>
             <a:endParaRPr lang="en-US" sz="2100" dirty="0"/>
           </a:p>
@@ -7495,7 +7495,7 @@
               <a:t> ngoài</a:t>
             </a:r>
             <a:r>
-              <a:rPr lang="en-US" sz="6900" dirty="0" spc="-64" kern="0">
+              <a:rPr lang="en-US" sz="6900" dirty="0" spc="1" kern="0">
                 <a:solidFill>
                   <a:srgbClr val="F3EEE3"/>
                 </a:solidFill>
@@ -7503,7 +7503,7 @@
                 <a:ea typeface="Bricolage Grotesque ExtraBold" pitchFamily="34" charset="-122"/>
                 <a:cs typeface="Bricolage Grotesque ExtraBold" pitchFamily="34" charset="-120"/>
               </a:rPr>
-              <a:t> đường</a:t>
+              <a:t> lần</a:t>
             </a:r>
             <a:r>
               <a:rPr lang="en-US" sz="6900" dirty="0" spc="-80" kern="0">
@@ -10912,7 +10912,7 @@
               <a:buNone/>
             </a:pPr>
             <a:r>
-              <a:rPr lang="en-US" sz="6900" dirty="0" spc="-4" kern="0">
+              <a:rPr lang="en-US" sz="6900" dirty="0" spc="-1" kern="0">
                 <a:solidFill>
                   <a:srgbClr val="14161C"/>
                 </a:solidFill>
@@ -10920,10 +10920,10 @@
                 <a:ea typeface="Bricolage Grotesque ExtraBold" pitchFamily="34" charset="-122"/>
                 <a:cs typeface="Bricolage Grotesque ExtraBold" pitchFamily="34" charset="-120"/>
               </a:rPr>
-              <a:t>Bấm</a:t>
-            </a:r>
-            <a:r>
-              <a:rPr lang="en-US" sz="6900" dirty="0" spc="-79" kern="0">
+              <a:t>Mảng</a:t>
+            </a:r>
+            <a:r>
+              <a:rPr lang="en-US" sz="6900" dirty="0" spc="2" kern="0">
                 <a:solidFill>
                   <a:srgbClr val="14161C"/>
                 </a:solidFill>
@@ -10931,10 +10931,10 @@
                 <a:ea typeface="Bricolage Grotesque ExtraBold" pitchFamily="34" charset="-122"/>
                 <a:cs typeface="Bricolage Grotesque ExtraBold" pitchFamily="34" charset="-120"/>
               </a:rPr>
-              <a:t> xem</a:t>
-            </a:r>
-            <a:r>
-              <a:rPr lang="en-US" sz="6900" dirty="0" spc="-13" kern="0">
+              <a:t> nào</a:t>
+            </a:r>
+            <a:r>
+              <a:rPr lang="en-US" sz="6900" dirty="0" spc="-12" kern="0">
                 <a:solidFill>
                   <a:srgbClr val="14161C"/>
                 </a:solidFill>
@@ -10942,10 +10942,10 @@
                 <a:ea typeface="Bricolage Grotesque ExtraBold" pitchFamily="34" charset="-122"/>
                 <a:cs typeface="Bricolage Grotesque ExtraBold" pitchFamily="34" charset="-120"/>
               </a:rPr>
-              <a:t> trên</a:t>
-            </a:r>
-            <a:r>
-              <a:rPr lang="en-US" sz="6900" dirty="0" spc="26" kern="0">
+              <a:t> gần</a:t>
+            </a:r>
+            <a:r>
+              <a:rPr lang="en-US" sz="6900" dirty="0" spc="1" kern="0">
                 <a:solidFill>
                   <a:srgbClr val="14161C"/>
                 </a:solidFill>
@@ -10953,7 +10953,7 @@
                 <a:ea typeface="Bricolage Grotesque ExtraBold" pitchFamily="34" charset="-122"/>
                 <a:cs typeface="Bricolage Grotesque ExtraBold" pitchFamily="34" charset="-120"/>
               </a:rPr>
-              <a:t> điện</a:t>
+              <a:t> lần</a:t>
             </a:r>
             <a:r>
               <a:rPr lang="en-US" sz="6900" dirty="0" spc="-5" kern="0">
@@ -10964,7 +10964,18 @@
                 <a:ea typeface="Bricolage Grotesque ExtraBold" pitchFamily="34" charset="-122"/>
                 <a:cs typeface="Bricolage Grotesque ExtraBold" pitchFamily="34" charset="-120"/>
               </a:rPr>
-              <a:t> thoại</a:t>
+              <a:t> bấm</a:t>
+            </a:r>
+            <a:r>
+              <a:rPr lang="en-US" sz="6900" dirty="0" spc="-86" kern="0">
+                <a:solidFill>
+                  <a:srgbClr val="14161C"/>
+                </a:solidFill>
+                <a:latin typeface="Bricolage Grotesque ExtraBold" pitchFamily="34" charset="0"/>
+                <a:ea typeface="Bricolage Grotesque ExtraBold" pitchFamily="34" charset="-122"/>
+                <a:cs typeface="Bricolage Grotesque ExtraBold" pitchFamily="34" charset="-120"/>
+              </a:rPr>
+              <a:t> xem?</a:t>
             </a:r>
             <a:endParaRPr lang="en-US" sz="6900" dirty="0"/>
           </a:p>
@@ -10972,42 +10983,19 @@
       </p:sp>
       <p:sp>
         <p:nvSpPr>
-          <p:cNvPr id="4" name="Connector line-1792383507014-795927753"/>
-          <p:cNvSpPr/>
-          <p:nvPr/>
-        </p:nvSpPr>
-        <p:spPr>
-          <a:xfrm>
-            <a:off x="914400" y="4000500"/>
-            <a:ext cx="16459200" cy="0"/>
-          </a:xfrm>
-          <a:prstGeom prst="line">
-            <a:avLst/>
-          </a:prstGeom>
-          <a:noFill/>
-          <a:ln w="47625">
-            <a:solidFill>
-              <a:srgbClr val="B45309"/>
-            </a:solidFill>
-            <a:prstDash val="solid"/>
-            <a:headEnd type="none"/>
-            <a:tailEnd type="none"/>
-          </a:ln>
-        </p:spPr>
-      </p:sp>
-      <p:sp>
-        <p:nvSpPr>
-          <p:cNvPr id="5" name="Shape 3"/>
-          <p:cNvSpPr/>
-          <p:nvPr/>
-        </p:nvSpPr>
-        <p:spPr>
-          <a:xfrm>
-            <a:off x="952500" y="3810000"/>
-            <a:ext cx="381000" cy="381000"/>
-          </a:xfrm>
-          <a:prstGeom prst="ellipse">
-            <a:avLst/>
+          <p:cNvPr id="4" name="Shape 2"/>
+          <p:cNvSpPr/>
+          <p:nvPr/>
+        </p:nvSpPr>
+        <p:spPr>
+          <a:xfrm>
+            <a:off x="914400" y="4095750"/>
+            <a:ext cx="4953000" cy="2286000"/>
+          </a:xfrm>
+          <a:prstGeom prst="roundRect">
+            <a:avLst>
+              <a:gd name="adj" fmla="val 13333"/>
+            </a:avLst>
           </a:prstGeom>
           <a:solidFill>
             <a:srgbClr val="B45309"/>
@@ -11017,14 +11005,14 @@
       </p:sp>
       <p:sp>
         <p:nvSpPr>
-          <p:cNvPr id="6" name="Text 4"/>
-          <p:cNvSpPr/>
-          <p:nvPr/>
-        </p:nvSpPr>
-        <p:spPr>
-          <a:xfrm>
-            <a:off x="914400" y="3143250"/>
-            <a:ext cx="3733800" cy="714375"/>
+          <p:cNvPr id="5" name="Text 3"/>
+          <p:cNvSpPr/>
+          <p:nvPr/>
+        </p:nvSpPr>
+        <p:spPr>
+          <a:xfrm>
+            <a:off x="1295400" y="4381500"/>
+            <a:ext cx="4191000" cy="428625"/>
           </a:xfrm>
           <a:prstGeom prst="rect">
             <a:avLst/>
@@ -11040,30 +11028,52 @@
               <a:buNone/>
             </a:pPr>
             <a:r>
-              <a:rPr lang="en-US" sz="3300" dirty="0" spc="-2" kern="0">
-                <a:solidFill>
-                  <a:srgbClr val="B45309"/>
-                </a:solidFill>
-                <a:latin typeface="Bricolage Grotesque ExtraBold" pitchFamily="34" charset="0"/>
-                <a:ea typeface="Bricolage Grotesque ExtraBold" pitchFamily="34" charset="-122"/>
-                <a:cs typeface="Bricolage Grotesque ExtraBold" pitchFamily="34" charset="-120"/>
-              </a:rPr>
-              <a:t>1</a:t>
-            </a:r>
-            <a:endParaRPr lang="en-US" sz="3300" dirty="0"/>
+              <a:rPr lang="en-US" sz="1950" b="1" spc="225" kern="0" dirty="0">
+                <a:solidFill>
+                  <a:srgbClr val="F3DFB8"/>
+                </a:solidFill>
+                <a:latin typeface="Be Vietnam Pro" pitchFamily="34" charset="0"/>
+                <a:ea typeface="Be Vietnam Pro" pitchFamily="34" charset="-122"/>
+                <a:cs typeface="Be Vietnam Pro" pitchFamily="34" charset="-120"/>
+              </a:rPr>
+              <a:t>LẦN</a:t>
+            </a:r>
+            <a:r>
+              <a:rPr lang="en-US" sz="1950" b="1" spc="218" kern="0" dirty="0">
+                <a:solidFill>
+                  <a:srgbClr val="F3DFB8"/>
+                </a:solidFill>
+                <a:latin typeface="Be Vietnam Pro" pitchFamily="34" charset="0"/>
+                <a:ea typeface="Be Vietnam Pro" pitchFamily="34" charset="-122"/>
+                <a:cs typeface="Be Vietnam Pro" pitchFamily="34" charset="-120"/>
+              </a:rPr>
+              <a:t> BẤM</a:t>
+            </a:r>
+            <a:r>
+              <a:rPr lang="en-US" sz="1950" b="1" spc="223" kern="0" dirty="0">
+                <a:solidFill>
+                  <a:srgbClr val="F3DFB8"/>
+                </a:solidFill>
+                <a:latin typeface="Be Vietnam Pro" pitchFamily="34" charset="0"/>
+                <a:ea typeface="Be Vietnam Pro" pitchFamily="34" charset="-122"/>
+                <a:cs typeface="Be Vietnam Pro" pitchFamily="34" charset="-120"/>
+              </a:rPr>
+              <a:t> XEM</a:t>
+            </a:r>
+            <a:endParaRPr lang="en-US" sz="1950" dirty="0"/>
           </a:p>
         </p:txBody>
       </p:sp>
       <p:sp>
         <p:nvSpPr>
-          <p:cNvPr id="7" name="Text 5"/>
-          <p:cNvSpPr/>
-          <p:nvPr/>
-        </p:nvSpPr>
-        <p:spPr>
-          <a:xfrm>
-            <a:off x="914400" y="4572000"/>
-            <a:ext cx="3733800" cy="1238250"/>
+          <p:cNvPr id="6" name="Text 4"/>
+          <p:cNvSpPr/>
+          <p:nvPr/>
+        </p:nvSpPr>
+        <p:spPr>
+          <a:xfrm>
+            <a:off x="1295400" y="4857750"/>
+            <a:ext cx="4191000" cy="1333500"/>
           </a:xfrm>
           <a:prstGeom prst="rect">
             <a:avLst/>
@@ -11082,26 +11092,48 @@
               <a:buNone/>
             </a:pPr>
             <a:r>
-              <a:rPr lang="en-US" sz="3450" dirty="0" spc="-4" kern="0">
-                <a:solidFill>
-                  <a:srgbClr val="14161C"/>
+              <a:rPr lang="en-US" sz="3450" dirty="0" spc="-1" kern="0">
+                <a:solidFill>
+                  <a:srgbClr val="F3EEE3"/>
                 </a:solidFill>
                 <a:latin typeface="Bricolage Grotesque ExtraBold" pitchFamily="34" charset="0"/>
                 <a:ea typeface="Bricolage Grotesque ExtraBold" pitchFamily="34" charset="-122"/>
                 <a:cs typeface="Bricolage Grotesque ExtraBold" pitchFamily="34" charset="-120"/>
               </a:rPr>
-              <a:t>Ứng</a:t>
-            </a:r>
-            <a:r>
-              <a:rPr lang="en-US" sz="3450" dirty="0" spc="-1" kern="0">
-                <a:solidFill>
-                  <a:srgbClr val="14161C"/>
+              <a:t>Các</a:t>
+            </a:r>
+            <a:r>
+              <a:rPr lang="en-US" sz="3450" dirty="0" spc="0" kern="0">
+                <a:solidFill>
+                  <a:srgbClr val="F3EEE3"/>
                 </a:solidFill>
                 <a:latin typeface="Bricolage Grotesque ExtraBold" pitchFamily="34" charset="0"/>
                 <a:ea typeface="Bricolage Grotesque ExtraBold" pitchFamily="34" charset="-122"/>
                 <a:cs typeface="Bricolage Grotesque ExtraBold" pitchFamily="34" charset="-120"/>
               </a:rPr>
-              <a:t> dụng</a:t>
+              <a:t> mảng</a:t>
+            </a:r>
+            <a:r>
+              <a:rPr lang="en-US" sz="3450" dirty="0" spc="3" kern="0">
+                <a:solidFill>
+                  <a:srgbClr val="F3EEE3"/>
+                </a:solidFill>
+                <a:latin typeface="Bricolage Grotesque ExtraBold" pitchFamily="34" charset="0"/>
+                <a:ea typeface="Bricolage Grotesque ExtraBold" pitchFamily="34" charset="-122"/>
+                <a:cs typeface="Bricolage Grotesque ExtraBold" pitchFamily="34" charset="-120"/>
+              </a:rPr>
+              <a:t> nằm</a:t>
+            </a:r>
+            <a:r>
+              <a:rPr lang="en-US" sz="3450" dirty="0" spc="-8" kern="0">
+                <a:solidFill>
+                  <a:srgbClr val="F3EEE3"/>
+                </a:solidFill>
+                <a:latin typeface="Bricolage Grotesque ExtraBold" pitchFamily="34" charset="0"/>
+                <a:ea typeface="Bricolage Grotesque ExtraBold" pitchFamily="34" charset="-122"/>
+                <a:cs typeface="Bricolage Grotesque ExtraBold" pitchFamily="34" charset="-120"/>
+              </a:rPr>
+              <a:t> gần</a:t>
             </a:r>
             <a:endParaRPr lang="en-US" sz="3450" dirty="0"/>
           </a:p>
@@ -11109,98 +11141,41 @@
       </p:sp>
       <p:sp>
         <p:nvSpPr>
+          <p:cNvPr id="7" name="Shape 5"/>
+          <p:cNvSpPr/>
+          <p:nvPr/>
+        </p:nvSpPr>
+        <p:spPr>
+          <a:xfrm>
+            <a:off x="10896600" y="2952750"/>
+            <a:ext cx="6477000" cy="1333500"/>
+          </a:xfrm>
+          <a:prstGeom prst="roundRect">
+            <a:avLst>
+              <a:gd name="adj" fmla="val 15714"/>
+            </a:avLst>
+          </a:prstGeom>
+          <a:solidFill>
+            <a:srgbClr val="FBF8F2"/>
+          </a:solidFill>
+          <a:ln w="19050">
+            <a:solidFill>
+              <a:srgbClr val="DDD5C1"/>
+            </a:solidFill>
+            <a:prstDash val="solid"/>
+          </a:ln>
+        </p:spPr>
+      </p:sp>
+      <p:sp>
+        <p:nvSpPr>
           <p:cNvPr id="8" name="Text 6"/>
           <p:cNvSpPr/>
           <p:nvPr/>
         </p:nvSpPr>
         <p:spPr>
           <a:xfrm>
-            <a:off x="914400" y="5905500"/>
-            <a:ext cx="3638550" cy="1905000"/>
-          </a:xfrm>
-          <a:prstGeom prst="rect">
-            <a:avLst/>
-          </a:prstGeom>
-          <a:noFill/>
-          <a:ln/>
-        </p:spPr>
-        <p:txBody>
-          <a:bodyPr wrap="square" lIns="0" tIns="5001" rIns="0" bIns="-5001" rtlCol="0" anchor="t"/>
-          <a:lstStyle/>
-          <a:p>
-            <a:pPr algn="l" indent="0" marL="0">
-              <a:lnSpc>
-                <a:spcPts val="3150"/>
-              </a:lnSpc>
-              <a:buNone/>
-            </a:pPr>
-            <a:r>
-              <a:rPr lang="en-US" sz="2250" dirty="0" spc="0" kern="0">
-                <a:solidFill>
-                  <a:srgbClr val="4A4944"/>
-                </a:solidFill>
-                <a:latin typeface="Be Vietnam Pro" pitchFamily="34" charset="0"/>
-                <a:ea typeface="Be Vietnam Pro" pitchFamily="34" charset="-122"/>
-                <a:cs typeface="Be Vietnam Pro" pitchFamily="34" charset="-120"/>
-              </a:rPr>
-              <a:t>Swift</a:t>
-            </a:r>
-            <a:r>
-              <a:rPr lang="en-US" sz="2250" dirty="0" spc="-3" kern="0">
-                <a:solidFill>
-                  <a:srgbClr val="4A4944"/>
-                </a:solidFill>
-                <a:latin typeface="Be Vietnam Pro" pitchFamily="34" charset="0"/>
-                <a:ea typeface="Be Vietnam Pro" pitchFamily="34" charset="-122"/>
-                <a:cs typeface="Be Vietnam Pro" pitchFamily="34" charset="-120"/>
-              </a:rPr>
-              <a:t> hoặc</a:t>
-            </a:r>
-            <a:r>
-              <a:rPr lang="en-US" sz="2250" dirty="0" spc="-16" kern="0">
-                <a:solidFill>
-                  <a:srgbClr val="4A4944"/>
-                </a:solidFill>
-                <a:latin typeface="Be Vietnam Pro" pitchFamily="34" charset="0"/>
-                <a:ea typeface="Be Vietnam Pro" pitchFamily="34" charset="-122"/>
-                <a:cs typeface="Be Vietnam Pro" pitchFamily="34" charset="-120"/>
-              </a:rPr>
-              <a:t> Kotlin.</a:t>
-            </a:r>
-            <a:endParaRPr lang="en-US" sz="2250" dirty="0"/>
-          </a:p>
-        </p:txBody>
-      </p:sp>
-      <p:sp>
-        <p:nvSpPr>
-          <p:cNvPr id="9" name="Shape 7"/>
-          <p:cNvSpPr/>
-          <p:nvPr/>
-        </p:nvSpPr>
-        <p:spPr>
-          <a:xfrm>
-            <a:off x="5067300" y="3810000"/>
-            <a:ext cx="381000" cy="381000"/>
-          </a:xfrm>
-          <a:prstGeom prst="ellipse">
-            <a:avLst/>
-          </a:prstGeom>
-          <a:solidFill>
-            <a:srgbClr val="B45309"/>
-          </a:solidFill>
-          <a:ln/>
-        </p:spPr>
-      </p:sp>
-      <p:sp>
-        <p:nvSpPr>
-          <p:cNvPr id="10" name="Text 8"/>
-          <p:cNvSpPr/>
-          <p:nvPr/>
-        </p:nvSpPr>
-        <p:spPr>
-          <a:xfrm>
-            <a:off x="5029200" y="3143250"/>
-            <a:ext cx="3733800" cy="714375"/>
+            <a:off x="11277600" y="3162300"/>
+            <a:ext cx="5715000" cy="390525"/>
           </a:xfrm>
           <a:prstGeom prst="rect">
             <a:avLst/>
@@ -11216,156 +11191,63 @@
               <a:buNone/>
             </a:pPr>
             <a:r>
-              <a:rPr lang="en-US" sz="3300" dirty="0" spc="6" kern="0">
+              <a:rPr lang="en-US" sz="1800" b="1" spc="256" kern="0" dirty="0">
                 <a:solidFill>
                   <a:srgbClr val="B45309"/>
                 </a:solidFill>
-                <a:latin typeface="Bricolage Grotesque ExtraBold" pitchFamily="34" charset="0"/>
-                <a:ea typeface="Bricolage Grotesque ExtraBold" pitchFamily="34" charset="-122"/>
-                <a:cs typeface="Bricolage Grotesque ExtraBold" pitchFamily="34" charset="-120"/>
-              </a:rPr>
-              <a:t>2</a:t>
-            </a:r>
-            <a:endParaRPr lang="en-US" sz="3300" dirty="0"/>
+                <a:latin typeface="Be Vietnam Pro" pitchFamily="34" charset="0"/>
+                <a:ea typeface="Be Vietnam Pro" pitchFamily="34" charset="-122"/>
+                <a:cs typeface="Be Vietnam Pro" pitchFamily="34" charset="-120"/>
+              </a:rPr>
+              <a:t>ỨNG</a:t>
+            </a:r>
+            <a:r>
+              <a:rPr lang="en-US" sz="1800" b="1" spc="226" kern="0" dirty="0">
+                <a:solidFill>
+                  <a:srgbClr val="B45309"/>
+                </a:solidFill>
+                <a:latin typeface="Be Vietnam Pro" pitchFamily="34" charset="0"/>
+                <a:ea typeface="Be Vietnam Pro" pitchFamily="34" charset="-122"/>
+                <a:cs typeface="Be Vietnam Pro" pitchFamily="34" charset="-120"/>
+              </a:rPr>
+              <a:t> DỤNG</a:t>
+            </a:r>
+            <a:r>
+              <a:rPr lang="en-US" sz="1800" b="1" spc="225" kern="0" dirty="0">
+                <a:solidFill>
+                  <a:srgbClr val="B45309"/>
+                </a:solidFill>
+                <a:latin typeface="Be Vietnam Pro" pitchFamily="34" charset="0"/>
+                <a:ea typeface="Be Vietnam Pro" pitchFamily="34" charset="-122"/>
+                <a:cs typeface="Be Vietnam Pro" pitchFamily="34" charset="-120"/>
+              </a:rPr>
+              <a:t> ·</a:t>
+            </a:r>
+            <a:r>
+              <a:rPr lang="en-US" sz="1800" b="1" spc="223" kern="0" dirty="0">
+                <a:solidFill>
+                  <a:srgbClr val="B45309"/>
+                </a:solidFill>
+                <a:latin typeface="Be Vietnam Pro" pitchFamily="34" charset="0"/>
+                <a:ea typeface="Be Vietnam Pro" pitchFamily="34" charset="-122"/>
+                <a:cs typeface="Be Vietnam Pro" pitchFamily="34" charset="-120"/>
+              </a:rPr>
+              <a:t> GRAPHQL</a:t>
+            </a:r>
+            <a:endParaRPr lang="en-US" sz="1800" dirty="0"/>
           </a:p>
         </p:txBody>
       </p:sp>
       <p:sp>
         <p:nvSpPr>
-          <p:cNvPr id="11" name="Text 9"/>
-          <p:cNvSpPr/>
-          <p:nvPr/>
-        </p:nvSpPr>
-        <p:spPr>
-          <a:xfrm>
-            <a:off x="5029200" y="4572000"/>
-            <a:ext cx="3733800" cy="1238250"/>
-          </a:xfrm>
-          <a:prstGeom prst="rect">
-            <a:avLst/>
-          </a:prstGeom>
-          <a:noFill/>
-          <a:ln/>
-        </p:spPr>
-        <p:txBody>
-          <a:bodyPr wrap="square" lIns="0" tIns="21907" rIns="0" bIns="-21907" rtlCol="0" anchor="t"/>
-          <a:lstStyle/>
-          <a:p>
-            <a:pPr algn="l" indent="0" marL="0">
-              <a:lnSpc>
-                <a:spcPts val="3795"/>
-              </a:lnSpc>
-              <a:buNone/>
-            </a:pPr>
-            <a:r>
-              <a:rPr lang="en-US" sz="3450" dirty="0" spc="-5" kern="0">
-                <a:solidFill>
-                  <a:srgbClr val="14161C"/>
-                </a:solidFill>
-                <a:latin typeface="Bricolage Grotesque ExtraBold" pitchFamily="34" charset="0"/>
-                <a:ea typeface="Bricolage Grotesque ExtraBold" pitchFamily="34" charset="-122"/>
-                <a:cs typeface="Bricolage Grotesque ExtraBold" pitchFamily="34" charset="-120"/>
-              </a:rPr>
-              <a:t>GraphQL</a:t>
-            </a:r>
-            <a:endParaRPr lang="en-US" sz="3450" dirty="0"/>
-          </a:p>
-        </p:txBody>
-      </p:sp>
-      <p:sp>
-        <p:nvSpPr>
-          <p:cNvPr id="12" name="Text 10"/>
-          <p:cNvSpPr/>
-          <p:nvPr/>
-        </p:nvSpPr>
-        <p:spPr>
-          <a:xfrm>
-            <a:off x="5029200" y="5905500"/>
-            <a:ext cx="3638550" cy="1905000"/>
-          </a:xfrm>
-          <a:prstGeom prst="rect">
-            <a:avLst/>
-          </a:prstGeom>
-          <a:noFill/>
-          <a:ln/>
-        </p:spPr>
-        <p:txBody>
-          <a:bodyPr wrap="square" lIns="0" tIns="5001" rIns="0" bIns="-5001" rtlCol="0" anchor="t"/>
-          <a:lstStyle/>
-          <a:p>
-            <a:pPr algn="l" indent="0" marL="0">
-              <a:lnSpc>
-                <a:spcPts val="3150"/>
-              </a:lnSpc>
-              <a:buNone/>
-            </a:pPr>
-            <a:r>
-              <a:rPr lang="en-US" sz="2250" dirty="0" spc="-2" kern="0">
-                <a:solidFill>
-                  <a:srgbClr val="4A4944"/>
-                </a:solidFill>
-                <a:latin typeface="Be Vietnam Pro" pitchFamily="34" charset="0"/>
-                <a:ea typeface="Be Vietnam Pro" pitchFamily="34" charset="-122"/>
-                <a:cs typeface="Be Vietnam Pro" pitchFamily="34" charset="-120"/>
-              </a:rPr>
-              <a:t>Hỏi</a:t>
-            </a:r>
-            <a:r>
-              <a:rPr lang="en-US" sz="2250" dirty="0" spc="-10" kern="0">
-                <a:solidFill>
-                  <a:srgbClr val="4A4944"/>
-                </a:solidFill>
-                <a:latin typeface="Be Vietnam Pro" pitchFamily="34" charset="0"/>
-                <a:ea typeface="Be Vietnam Pro" pitchFamily="34" charset="-122"/>
-                <a:cs typeface="Be Vietnam Pro" pitchFamily="34" charset="-120"/>
-              </a:rPr>
-              <a:t> máy</a:t>
-            </a:r>
-            <a:r>
-              <a:rPr lang="en-US" sz="2250" dirty="0" spc="4" kern="0">
-                <a:solidFill>
-                  <a:srgbClr val="4A4944"/>
-                </a:solidFill>
-                <a:latin typeface="Be Vietnam Pro" pitchFamily="34" charset="0"/>
-                <a:ea typeface="Be Vietnam Pro" pitchFamily="34" charset="-122"/>
-                <a:cs typeface="Be Vietnam Pro" pitchFamily="34" charset="-120"/>
-              </a:rPr>
-              <a:t> chủ.</a:t>
-            </a:r>
-            <a:endParaRPr lang="en-US" sz="2250" dirty="0"/>
-          </a:p>
-        </p:txBody>
-      </p:sp>
-      <p:sp>
-        <p:nvSpPr>
-          <p:cNvPr id="13" name="Shape 11"/>
-          <p:cNvSpPr/>
-          <p:nvPr/>
-        </p:nvSpPr>
-        <p:spPr>
-          <a:xfrm>
-            <a:off x="9182100" y="3810000"/>
-            <a:ext cx="381000" cy="381000"/>
-          </a:xfrm>
-          <a:prstGeom prst="ellipse">
-            <a:avLst/>
-          </a:prstGeom>
-          <a:solidFill>
-            <a:srgbClr val="B45309"/>
-          </a:solidFill>
-          <a:ln/>
-        </p:spPr>
-      </p:sp>
-      <p:sp>
-        <p:nvSpPr>
-          <p:cNvPr id="14" name="Text 12"/>
-          <p:cNvSpPr/>
-          <p:nvPr/>
-        </p:nvSpPr>
-        <p:spPr>
-          <a:xfrm>
-            <a:off x="9144000" y="3143250"/>
-            <a:ext cx="3733800" cy="714375"/>
+          <p:cNvPr id="9" name="Text 7"/>
+          <p:cNvSpPr/>
+          <p:nvPr/>
+        </p:nvSpPr>
+        <p:spPr>
+          <a:xfrm>
+            <a:off x="11277600" y="3543300"/>
+            <a:ext cx="5715000" cy="647700"/>
           </a:xfrm>
           <a:prstGeom prst="rect">
             <a:avLst/>
@@ -11381,49 +11263,18 @@
               <a:buNone/>
             </a:pPr>
             <a:r>
-              <a:rPr lang="en-US" sz="3300" dirty="0" spc="2" kern="0">
-                <a:solidFill>
-                  <a:srgbClr val="B45309"/>
+              <a:rPr lang="en-US" sz="3000" dirty="0" spc="4" kern="0">
+                <a:solidFill>
+                  <a:srgbClr val="14161C"/>
                 </a:solidFill>
                 <a:latin typeface="Bricolage Grotesque ExtraBold" pitchFamily="34" charset="0"/>
                 <a:ea typeface="Bricolage Grotesque ExtraBold" pitchFamily="34" charset="-122"/>
                 <a:cs typeface="Bricolage Grotesque ExtraBold" pitchFamily="34" charset="-120"/>
               </a:rPr>
-              <a:t>3</a:t>
-            </a:r>
-            <a:endParaRPr lang="en-US" sz="3300" dirty="0"/>
-          </a:p>
-        </p:txBody>
-      </p:sp>
-      <p:sp>
-        <p:nvSpPr>
-          <p:cNvPr id="15" name="Text 13"/>
-          <p:cNvSpPr/>
-          <p:nvPr/>
-        </p:nvSpPr>
-        <p:spPr>
-          <a:xfrm>
-            <a:off x="9144000" y="4572000"/>
-            <a:ext cx="3733800" cy="1238250"/>
-          </a:xfrm>
-          <a:prstGeom prst="rect">
-            <a:avLst/>
-          </a:prstGeom>
-          <a:noFill/>
-          <a:ln/>
-        </p:spPr>
-        <p:txBody>
-          <a:bodyPr wrap="square" lIns="0" tIns="21907" rIns="0" bIns="-21907" rtlCol="0" anchor="t"/>
-          <a:lstStyle/>
-          <a:p>
-            <a:pPr algn="l" indent="0" marL="0">
-              <a:lnSpc>
-                <a:spcPts val="3795"/>
-              </a:lnSpc>
-              <a:buNone/>
-            </a:pPr>
-            <a:r>
-              <a:rPr lang="en-US" sz="3450" dirty="0" spc="1" kern="0">
+              <a:t>Swift,</a:t>
+            </a:r>
+            <a:r>
+              <a:rPr lang="en-US" sz="3000" dirty="0" spc="-12" kern="0">
                 <a:solidFill>
                   <a:srgbClr val="14161C"/>
                 </a:solidFill>
@@ -11431,10 +11282,10 @@
                 <a:ea typeface="Bricolage Grotesque ExtraBold" pitchFamily="34" charset="-122"/>
                 <a:cs typeface="Bricolage Grotesque ExtraBold" pitchFamily="34" charset="-120"/>
               </a:rPr>
-              <a:t>Dịch</a:t>
-            </a:r>
-            <a:r>
-              <a:rPr lang="en-US" sz="3450" dirty="0" spc="0" kern="0">
+              <a:t> Kotlin;</a:t>
+            </a:r>
+            <a:r>
+              <a:rPr lang="en-US" sz="3000" dirty="0" spc="-5" kern="0">
                 <a:solidFill>
                   <a:srgbClr val="14161C"/>
                 </a:solidFill>
@@ -11442,139 +11293,74 @@
                 <a:ea typeface="Bricolage Grotesque ExtraBold" pitchFamily="34" charset="-122"/>
                 <a:cs typeface="Bricolage Grotesque ExtraBold" pitchFamily="34" charset="-120"/>
               </a:rPr>
-              <a:t> vụ,</a:t>
-            </a:r>
-            <a:r>
-              <a:rPr lang="en-US" sz="3450" dirty="0" spc="-1" kern="0">
-                <a:solidFill>
-                  <a:srgbClr val="14161C"/>
-                </a:solidFill>
-                <a:latin typeface="Bricolage Grotesque ExtraBold" pitchFamily="34" charset="0"/>
-                <a:ea typeface="Bricolage Grotesque ExtraBold" pitchFamily="34" charset="-122"/>
-                <a:cs typeface="Bricolage Grotesque ExtraBold" pitchFamily="34" charset="-120"/>
-              </a:rPr>
-              <a:t> dữ</a:t>
-            </a:r>
-            <a:r>
-              <a:rPr lang="en-US" sz="3450" dirty="0" spc="0" kern="0">
-                <a:solidFill>
-                  <a:srgbClr val="14161C"/>
-                </a:solidFill>
-                <a:latin typeface="Bricolage Grotesque ExtraBold" pitchFamily="34" charset="0"/>
-                <a:ea typeface="Bricolage Grotesque ExtraBold" pitchFamily="34" charset="-122"/>
-                <a:cs typeface="Bricolage Grotesque ExtraBold" pitchFamily="34" charset="-120"/>
-              </a:rPr>
-              <a:t> liệu</a:t>
-            </a:r>
-            <a:endParaRPr lang="en-US" sz="3450" dirty="0"/>
+              <a:t> GraphQL</a:t>
+            </a:r>
+            <a:endParaRPr lang="en-US" sz="3000" dirty="0"/>
           </a:p>
         </p:txBody>
       </p:sp>
       <p:sp>
         <p:nvSpPr>
-          <p:cNvPr id="16" name="Text 14"/>
-          <p:cNvSpPr/>
-          <p:nvPr/>
-        </p:nvSpPr>
-        <p:spPr>
-          <a:xfrm>
-            <a:off x="9144000" y="5905500"/>
-            <a:ext cx="3638550" cy="1905000"/>
-          </a:xfrm>
-          <a:prstGeom prst="rect">
+          <p:cNvPr id="10" name="Connector line-1792384343066-907004715"/>
+          <p:cNvSpPr/>
+          <p:nvPr/>
+        </p:nvSpPr>
+        <p:spPr>
+          <a:xfrm flipV="1">
+            <a:off x="5867400" y="3619500"/>
+            <a:ext cx="5029200" cy="1428750"/>
+          </a:xfrm>
+          <a:prstGeom prst="line">
             <a:avLst/>
           </a:prstGeom>
           <a:noFill/>
-          <a:ln/>
-        </p:spPr>
-        <p:txBody>
-          <a:bodyPr wrap="square" lIns="0" tIns="5001" rIns="0" bIns="-5001" rtlCol="0" anchor="t"/>
-          <a:lstStyle/>
-          <a:p>
-            <a:pPr algn="l" indent="0" marL="0">
-              <a:lnSpc>
-                <a:spcPts val="3150"/>
-              </a:lnSpc>
-              <a:buNone/>
-            </a:pPr>
-            <a:r>
-              <a:rPr lang="en-US" sz="2250" dirty="0" spc="-16" kern="0">
-                <a:solidFill>
-                  <a:srgbClr val="4A4944"/>
-                </a:solidFill>
-                <a:latin typeface="Be Vietnam Pro" pitchFamily="34" charset="0"/>
-                <a:ea typeface="Be Vietnam Pro" pitchFamily="34" charset="-122"/>
-                <a:cs typeface="Be Vietnam Pro" pitchFamily="34" charset="-120"/>
-              </a:rPr>
-              <a:t>Zuul,</a:t>
-            </a:r>
-            <a:r>
-              <a:rPr lang="en-US" sz="2250" dirty="0" spc="-27" kern="0">
-                <a:solidFill>
-                  <a:srgbClr val="4A4944"/>
-                </a:solidFill>
-                <a:latin typeface="Be Vietnam Pro" pitchFamily="34" charset="0"/>
-                <a:ea typeface="Be Vietnam Pro" pitchFamily="34" charset="-122"/>
-                <a:cs typeface="Be Vietnam Pro" pitchFamily="34" charset="-120"/>
-              </a:rPr>
-              <a:t> Eureka;</a:t>
-            </a:r>
-            <a:r>
-              <a:rPr lang="en-US" sz="2250" dirty="0" spc="-6" kern="0">
-                <a:solidFill>
-                  <a:srgbClr val="4A4944"/>
-                </a:solidFill>
-                <a:latin typeface="Be Vietnam Pro" pitchFamily="34" charset="0"/>
-                <a:ea typeface="Be Vietnam Pro" pitchFamily="34" charset="-122"/>
-                <a:cs typeface="Be Vietnam Pro" pitchFamily="34" charset="-120"/>
-              </a:rPr>
-              <a:t> EVCache,</a:t>
-            </a:r>
-            <a:r>
-              <a:rPr lang="en-US" sz="2250" dirty="0" spc="-11" kern="0">
-                <a:solidFill>
-                  <a:srgbClr val="4A4944"/>
-                </a:solidFill>
-                <a:latin typeface="Be Vietnam Pro" pitchFamily="34" charset="0"/>
-                <a:ea typeface="Be Vietnam Pro" pitchFamily="34" charset="-122"/>
-                <a:cs typeface="Be Vietnam Pro" pitchFamily="34" charset="-120"/>
-              </a:rPr>
-              <a:t> Cassandra.</a:t>
-            </a:r>
-            <a:endParaRPr lang="en-US" sz="2250" dirty="0"/>
-          </a:p>
-        </p:txBody>
-      </p:sp>
-      <p:sp>
-        <p:nvSpPr>
-          <p:cNvPr id="17" name="Shape 15"/>
-          <p:cNvSpPr/>
-          <p:nvPr/>
-        </p:nvSpPr>
-        <p:spPr>
-          <a:xfrm>
-            <a:off x="13296900" y="3810000"/>
-            <a:ext cx="381000" cy="381000"/>
-          </a:xfrm>
-          <a:prstGeom prst="ellipse">
-            <a:avLst/>
+          <a:ln w="38100">
+            <a:solidFill>
+              <a:srgbClr val="B45309"/>
+            </a:solidFill>
+            <a:prstDash val="solid"/>
+            <a:headEnd type="none"/>
+            <a:tailEnd type="none"/>
+          </a:ln>
+        </p:spPr>
+      </p:sp>
+      <p:sp>
+        <p:nvSpPr>
+          <p:cNvPr id="11" name="Shape 9"/>
+          <p:cNvSpPr/>
+          <p:nvPr/>
+        </p:nvSpPr>
+        <p:spPr>
+          <a:xfrm>
+            <a:off x="10896600" y="4572000"/>
+            <a:ext cx="6477000" cy="1333500"/>
+          </a:xfrm>
+          <a:prstGeom prst="roundRect">
+            <a:avLst>
+              <a:gd name="adj" fmla="val 15714"/>
+            </a:avLst>
           </a:prstGeom>
           <a:solidFill>
-            <a:srgbClr val="B45309"/>
+            <a:srgbClr val="FBF8F2"/>
           </a:solidFill>
-          <a:ln/>
-        </p:spPr>
-      </p:sp>
-      <p:sp>
-        <p:nvSpPr>
-          <p:cNvPr id="18" name="Text 16"/>
-          <p:cNvSpPr/>
-          <p:nvPr/>
-        </p:nvSpPr>
-        <p:spPr>
-          <a:xfrm>
-            <a:off x="13258800" y="3143250"/>
-            <a:ext cx="3733800" cy="714375"/>
+          <a:ln w="19050">
+            <a:solidFill>
+              <a:srgbClr val="DDD5C1"/>
+            </a:solidFill>
+            <a:prstDash val="solid"/>
+          </a:ln>
+        </p:spPr>
+      </p:sp>
+      <p:sp>
+        <p:nvSpPr>
+          <p:cNvPr id="12" name="Text 10"/>
+          <p:cNvSpPr/>
+          <p:nvPr/>
+        </p:nvSpPr>
+        <p:spPr>
+          <a:xfrm>
+            <a:off x="11277600" y="4781550"/>
+            <a:ext cx="5715000" cy="390525"/>
           </a:xfrm>
           <a:prstGeom prst="rect">
             <a:avLst/>
@@ -11590,147 +11376,74 @@
               <a:buNone/>
             </a:pPr>
             <a:r>
-              <a:rPr lang="en-US" sz="3300" dirty="0" spc="3" kern="0">
+              <a:rPr lang="en-US" sz="1800" b="1" spc="227" kern="0" dirty="0">
                 <a:solidFill>
                   <a:srgbClr val="B45309"/>
                 </a:solidFill>
-                <a:latin typeface="Bricolage Grotesque ExtraBold" pitchFamily="34" charset="0"/>
-                <a:ea typeface="Bricolage Grotesque ExtraBold" pitchFamily="34" charset="-122"/>
-                <a:cs typeface="Bricolage Grotesque ExtraBold" pitchFamily="34" charset="-120"/>
-              </a:rPr>
-              <a:t>4</a:t>
-            </a:r>
-            <a:endParaRPr lang="en-US" sz="3300" dirty="0"/>
+                <a:latin typeface="Be Vietnam Pro" pitchFamily="34" charset="0"/>
+                <a:ea typeface="Be Vietnam Pro" pitchFamily="34" charset="-122"/>
+                <a:cs typeface="Be Vietnam Pro" pitchFamily="34" charset="-120"/>
+              </a:rPr>
+              <a:t>DỊCH</a:t>
+            </a:r>
+            <a:r>
+              <a:rPr lang="en-US" sz="1800" b="1" spc="229" kern="0" dirty="0">
+                <a:solidFill>
+                  <a:srgbClr val="B45309"/>
+                </a:solidFill>
+                <a:latin typeface="Be Vietnam Pro" pitchFamily="34" charset="0"/>
+                <a:ea typeface="Be Vietnam Pro" pitchFamily="34" charset="-122"/>
+                <a:cs typeface="Be Vietnam Pro" pitchFamily="34" charset="-120"/>
+              </a:rPr>
+              <a:t> VỤ</a:t>
+            </a:r>
+            <a:r>
+              <a:rPr lang="en-US" sz="1800" b="1" spc="225" kern="0" dirty="0">
+                <a:solidFill>
+                  <a:srgbClr val="B45309"/>
+                </a:solidFill>
+                <a:latin typeface="Be Vietnam Pro" pitchFamily="34" charset="0"/>
+                <a:ea typeface="Be Vietnam Pro" pitchFamily="34" charset="-122"/>
+                <a:cs typeface="Be Vietnam Pro" pitchFamily="34" charset="-120"/>
+              </a:rPr>
+              <a:t> ·</a:t>
+            </a:r>
+            <a:r>
+              <a:rPr lang="en-US" sz="1800" b="1" spc="228" kern="0" dirty="0">
+                <a:solidFill>
+                  <a:srgbClr val="B45309"/>
+                </a:solidFill>
+                <a:latin typeface="Be Vietnam Pro" pitchFamily="34" charset="0"/>
+                <a:ea typeface="Be Vietnam Pro" pitchFamily="34" charset="-122"/>
+                <a:cs typeface="Be Vietnam Pro" pitchFamily="34" charset="-120"/>
+              </a:rPr>
+              <a:t> DỮ</a:t>
+            </a:r>
+            <a:r>
+              <a:rPr lang="en-US" sz="1800" b="1" spc="224" kern="0" dirty="0">
+                <a:solidFill>
+                  <a:srgbClr val="B45309"/>
+                </a:solidFill>
+                <a:latin typeface="Be Vietnam Pro" pitchFamily="34" charset="0"/>
+                <a:ea typeface="Be Vietnam Pro" pitchFamily="34" charset="-122"/>
+                <a:cs typeface="Be Vietnam Pro" pitchFamily="34" charset="-120"/>
+              </a:rPr>
+              <a:t> LIỆU</a:t>
+            </a:r>
+            <a:endParaRPr lang="en-US" sz="1800" dirty="0"/>
           </a:p>
         </p:txBody>
       </p:sp>
       <p:sp>
         <p:nvSpPr>
-          <p:cNvPr id="19" name="Text 17"/>
-          <p:cNvSpPr/>
-          <p:nvPr/>
-        </p:nvSpPr>
-        <p:spPr>
-          <a:xfrm>
-            <a:off x="13258800" y="4572000"/>
-            <a:ext cx="3733800" cy="1238250"/>
-          </a:xfrm>
-          <a:prstGeom prst="rect">
-            <a:avLst/>
-          </a:prstGeom>
-          <a:noFill/>
-          <a:ln/>
-        </p:spPr>
-        <p:txBody>
-          <a:bodyPr wrap="square" lIns="0" tIns="21907" rIns="0" bIns="-21907" rtlCol="0" anchor="t"/>
-          <a:lstStyle/>
-          <a:p>
-            <a:pPr algn="l" indent="0" marL="0">
-              <a:lnSpc>
-                <a:spcPts val="3795"/>
-              </a:lnSpc>
-              <a:buNone/>
-            </a:pPr>
-            <a:r>
-              <a:rPr lang="en-US" sz="3450" dirty="0" spc="2" kern="0">
-                <a:solidFill>
-                  <a:srgbClr val="14161C"/>
-                </a:solidFill>
-                <a:latin typeface="Bricolage Grotesque ExtraBold" pitchFamily="34" charset="0"/>
-                <a:ea typeface="Bricolage Grotesque ExtraBold" pitchFamily="34" charset="-122"/>
-                <a:cs typeface="Bricolage Grotesque ExtraBold" pitchFamily="34" charset="-120"/>
-              </a:rPr>
-              <a:t>Video</a:t>
-            </a:r>
-            <a:endParaRPr lang="en-US" sz="3450" dirty="0"/>
-          </a:p>
-        </p:txBody>
-      </p:sp>
-      <p:sp>
-        <p:nvSpPr>
-          <p:cNvPr id="20" name="Text 18"/>
-          <p:cNvSpPr/>
-          <p:nvPr/>
-        </p:nvSpPr>
-        <p:spPr>
-          <a:xfrm>
-            <a:off x="13258800" y="5905500"/>
-            <a:ext cx="3638550" cy="1905000"/>
-          </a:xfrm>
-          <a:prstGeom prst="rect">
-            <a:avLst/>
-          </a:prstGeom>
-          <a:noFill/>
-          <a:ln/>
-        </p:spPr>
-        <p:txBody>
-          <a:bodyPr wrap="square" lIns="0" tIns="5001" rIns="0" bIns="-5001" rtlCol="0" anchor="t"/>
-          <a:lstStyle/>
-          <a:p>
-            <a:pPr algn="l" indent="0" marL="0">
-              <a:lnSpc>
-                <a:spcPts val="3150"/>
-              </a:lnSpc>
-              <a:buNone/>
-            </a:pPr>
-            <a:r>
-              <a:rPr lang="en-US" sz="2250" dirty="0" spc="-13" kern="0">
-                <a:solidFill>
-                  <a:srgbClr val="4A4944"/>
-                </a:solidFill>
-                <a:latin typeface="Be Vietnam Pro" pitchFamily="34" charset="0"/>
-                <a:ea typeface="Be Vietnam Pro" pitchFamily="34" charset="-122"/>
-                <a:cs typeface="Be Vietnam Pro" pitchFamily="34" charset="-120"/>
-              </a:rPr>
-              <a:t>Phát</a:t>
-            </a:r>
-            <a:r>
-              <a:rPr lang="en-US" sz="2250" dirty="0" spc="3" kern="0">
-                <a:solidFill>
-                  <a:srgbClr val="4A4944"/>
-                </a:solidFill>
-                <a:latin typeface="Be Vietnam Pro" pitchFamily="34" charset="0"/>
-                <a:ea typeface="Be Vietnam Pro" pitchFamily="34" charset="-122"/>
-                <a:cs typeface="Be Vietnam Pro" pitchFamily="34" charset="-120"/>
-              </a:rPr>
-              <a:t> từ</a:t>
-            </a:r>
-            <a:r>
-              <a:rPr lang="en-US" sz="2250" dirty="0" spc="0" kern="0">
-                <a:solidFill>
-                  <a:srgbClr val="4A4944"/>
-                </a:solidFill>
-                <a:latin typeface="Be Vietnam Pro" pitchFamily="34" charset="0"/>
-                <a:ea typeface="Be Vietnam Pro" pitchFamily="34" charset="-122"/>
-                <a:cs typeface="Be Vietnam Pro" pitchFamily="34" charset="-120"/>
-              </a:rPr>
-              <a:t> S3,</a:t>
-            </a:r>
-            <a:r>
-              <a:rPr lang="en-US" sz="2250" dirty="0" spc="-1" kern="0">
-                <a:solidFill>
-                  <a:srgbClr val="4A4944"/>
-                </a:solidFill>
-                <a:latin typeface="Be Vietnam Pro" pitchFamily="34" charset="0"/>
-                <a:ea typeface="Be Vietnam Pro" pitchFamily="34" charset="-122"/>
-                <a:cs typeface="Be Vietnam Pro" pitchFamily="34" charset="-120"/>
-              </a:rPr>
-              <a:t> Open Connect.</a:t>
-            </a:r>
-            <a:endParaRPr lang="en-US" sz="2250" dirty="0"/>
-          </a:p>
-        </p:txBody>
-      </p:sp>
-      <p:sp>
-        <p:nvSpPr>
-          <p:cNvPr id="21" name="Text 19"/>
-          <p:cNvSpPr/>
-          <p:nvPr/>
-        </p:nvSpPr>
-        <p:spPr>
-          <a:xfrm>
-            <a:off x="914400" y="8191500"/>
-            <a:ext cx="16459200" cy="457200"/>
+          <p:cNvPr id="13" name="Text 11"/>
+          <p:cNvSpPr/>
+          <p:nvPr/>
+        </p:nvSpPr>
+        <p:spPr>
+          <a:xfrm>
+            <a:off x="11277600" y="5162550"/>
+            <a:ext cx="5715000" cy="647700"/>
           </a:xfrm>
           <a:prstGeom prst="rect">
             <a:avLst/>
@@ -11746,6 +11459,250 @@
               <a:buNone/>
             </a:pPr>
             <a:r>
+              <a:rPr lang="en-US" sz="3000" dirty="0" spc="-8" kern="0">
+                <a:solidFill>
+                  <a:srgbClr val="14161C"/>
+                </a:solidFill>
+                <a:latin typeface="Bricolage Grotesque ExtraBold" pitchFamily="34" charset="0"/>
+                <a:ea typeface="Bricolage Grotesque ExtraBold" pitchFamily="34" charset="-122"/>
+                <a:cs typeface="Bricolage Grotesque ExtraBold" pitchFamily="34" charset="-120"/>
+              </a:rPr>
+              <a:t>Zuul,</a:t>
+            </a:r>
+            <a:r>
+              <a:rPr lang="en-US" sz="3000" dirty="0" spc="-13" kern="0">
+                <a:solidFill>
+                  <a:srgbClr val="14161C"/>
+                </a:solidFill>
+                <a:latin typeface="Bricolage Grotesque ExtraBold" pitchFamily="34" charset="0"/>
+                <a:ea typeface="Bricolage Grotesque ExtraBold" pitchFamily="34" charset="-122"/>
+                <a:cs typeface="Bricolage Grotesque ExtraBold" pitchFamily="34" charset="-120"/>
+              </a:rPr>
+              <a:t> EVCache,</a:t>
+            </a:r>
+            <a:r>
+              <a:rPr lang="en-US" sz="3000" dirty="0" spc="-1" kern="0">
+                <a:solidFill>
+                  <a:srgbClr val="14161C"/>
+                </a:solidFill>
+                <a:latin typeface="Bricolage Grotesque ExtraBold" pitchFamily="34" charset="0"/>
+                <a:ea typeface="Bricolage Grotesque ExtraBold" pitchFamily="34" charset="-122"/>
+                <a:cs typeface="Bricolage Grotesque ExtraBold" pitchFamily="34" charset="-120"/>
+              </a:rPr>
+              <a:t> Cassandra</a:t>
+            </a:r>
+            <a:endParaRPr lang="en-US" sz="3000" dirty="0"/>
+          </a:p>
+        </p:txBody>
+      </p:sp>
+      <p:sp>
+        <p:nvSpPr>
+          <p:cNvPr id="14" name="Connector line-1792384343073-91942954"/>
+          <p:cNvSpPr/>
+          <p:nvPr/>
+        </p:nvSpPr>
+        <p:spPr>
+          <a:xfrm>
+            <a:off x="5867400" y="5238750"/>
+            <a:ext cx="5029200" cy="0"/>
+          </a:xfrm>
+          <a:prstGeom prst="line">
+            <a:avLst/>
+          </a:prstGeom>
+          <a:noFill/>
+          <a:ln w="38100">
+            <a:solidFill>
+              <a:srgbClr val="B45309"/>
+            </a:solidFill>
+            <a:prstDash val="solid"/>
+            <a:headEnd type="none"/>
+            <a:tailEnd type="none"/>
+          </a:ln>
+        </p:spPr>
+      </p:sp>
+      <p:sp>
+        <p:nvSpPr>
+          <p:cNvPr id="15" name="Shape 13"/>
+          <p:cNvSpPr/>
+          <p:nvPr/>
+        </p:nvSpPr>
+        <p:spPr>
+          <a:xfrm>
+            <a:off x="10896600" y="6191250"/>
+            <a:ext cx="6477000" cy="1333500"/>
+          </a:xfrm>
+          <a:prstGeom prst="roundRect">
+            <a:avLst>
+              <a:gd name="adj" fmla="val 15714"/>
+            </a:avLst>
+          </a:prstGeom>
+          <a:solidFill>
+            <a:srgbClr val="F3DFB8"/>
+          </a:solidFill>
+          <a:ln/>
+        </p:spPr>
+      </p:sp>
+      <p:sp>
+        <p:nvSpPr>
+          <p:cNvPr id="16" name="Text 14"/>
+          <p:cNvSpPr/>
+          <p:nvPr/>
+        </p:nvSpPr>
+        <p:spPr>
+          <a:xfrm>
+            <a:off x="11277600" y="6400800"/>
+            <a:ext cx="5715000" cy="390525"/>
+          </a:xfrm>
+          <a:prstGeom prst="rect">
+            <a:avLst/>
+          </a:prstGeom>
+          <a:noFill/>
+          <a:ln/>
+        </p:spPr>
+        <p:txBody>
+          <a:bodyPr wrap="square" lIns="0" tIns="0" rIns="0" bIns="0" rtlCol="0" anchor="t"/>
+          <a:lstStyle/>
+          <a:p>
+            <a:pPr algn="l" indent="0" marL="0">
+              <a:buNone/>
+            </a:pPr>
+            <a:r>
+              <a:rPr lang="en-US" sz="1800" b="1" spc="255" kern="0" dirty="0">
+                <a:solidFill>
+                  <a:srgbClr val="B45309"/>
+                </a:solidFill>
+                <a:latin typeface="Be Vietnam Pro" pitchFamily="34" charset="0"/>
+                <a:ea typeface="Be Vietnam Pro" pitchFamily="34" charset="-122"/>
+                <a:cs typeface="Be Vietnam Pro" pitchFamily="34" charset="-120"/>
+              </a:rPr>
+              <a:t>LƯU</a:t>
+            </a:r>
+            <a:r>
+              <a:rPr lang="en-US" sz="1800" b="1" spc="223" kern="0" dirty="0">
+                <a:solidFill>
+                  <a:srgbClr val="B45309"/>
+                </a:solidFill>
+                <a:latin typeface="Be Vietnam Pro" pitchFamily="34" charset="0"/>
+                <a:ea typeface="Be Vietnam Pro" pitchFamily="34" charset="-122"/>
+                <a:cs typeface="Be Vietnam Pro" pitchFamily="34" charset="-120"/>
+              </a:rPr>
+              <a:t> VIDEO</a:t>
+            </a:r>
+            <a:endParaRPr lang="en-US" sz="1800" dirty="0"/>
+          </a:p>
+        </p:txBody>
+      </p:sp>
+      <p:sp>
+        <p:nvSpPr>
+          <p:cNvPr id="17" name="Text 15"/>
+          <p:cNvSpPr/>
+          <p:nvPr/>
+        </p:nvSpPr>
+        <p:spPr>
+          <a:xfrm>
+            <a:off x="11277600" y="6781800"/>
+            <a:ext cx="5715000" cy="647700"/>
+          </a:xfrm>
+          <a:prstGeom prst="rect">
+            <a:avLst/>
+          </a:prstGeom>
+          <a:noFill/>
+          <a:ln/>
+        </p:spPr>
+        <p:txBody>
+          <a:bodyPr wrap="square" lIns="0" tIns="0" rIns="0" bIns="0" rtlCol="0" anchor="t"/>
+          <a:lstStyle/>
+          <a:p>
+            <a:pPr algn="l" indent="0" marL="0">
+              <a:buNone/>
+            </a:pPr>
+            <a:r>
+              <a:rPr lang="en-US" sz="3000" dirty="0" spc="14" kern="0">
+                <a:solidFill>
+                  <a:srgbClr val="14161C"/>
+                </a:solidFill>
+                <a:latin typeface="Bricolage Grotesque ExtraBold" pitchFamily="34" charset="0"/>
+                <a:ea typeface="Bricolage Grotesque ExtraBold" pitchFamily="34" charset="-122"/>
+                <a:cs typeface="Bricolage Grotesque ExtraBold" pitchFamily="34" charset="-120"/>
+              </a:rPr>
+              <a:t>S3,</a:t>
+            </a:r>
+            <a:r>
+              <a:rPr lang="en-US" sz="3000" dirty="0" spc="0" kern="0">
+                <a:solidFill>
+                  <a:srgbClr val="14161C"/>
+                </a:solidFill>
+                <a:latin typeface="Bricolage Grotesque ExtraBold" pitchFamily="34" charset="0"/>
+                <a:ea typeface="Bricolage Grotesque ExtraBold" pitchFamily="34" charset="-122"/>
+                <a:cs typeface="Bricolage Grotesque ExtraBold" pitchFamily="34" charset="-120"/>
+              </a:rPr>
+              <a:t> Open</a:t>
+            </a:r>
+            <a:r>
+              <a:rPr lang="en-US" sz="3000" dirty="0" spc="1" kern="0">
+                <a:solidFill>
+                  <a:srgbClr val="14161C"/>
+                </a:solidFill>
+                <a:latin typeface="Bricolage Grotesque ExtraBold" pitchFamily="34" charset="0"/>
+                <a:ea typeface="Bricolage Grotesque ExtraBold" pitchFamily="34" charset="-122"/>
+                <a:cs typeface="Bricolage Grotesque ExtraBold" pitchFamily="34" charset="-120"/>
+              </a:rPr>
+              <a:t> Connect</a:t>
+            </a:r>
+            <a:endParaRPr lang="en-US" sz="3000" dirty="0"/>
+          </a:p>
+        </p:txBody>
+      </p:sp>
+      <p:sp>
+        <p:nvSpPr>
+          <p:cNvPr id="18" name="Connector line-1792384343078-195329569"/>
+          <p:cNvSpPr/>
+          <p:nvPr/>
+        </p:nvSpPr>
+        <p:spPr>
+          <a:xfrm>
+            <a:off x="5867400" y="5429250"/>
+            <a:ext cx="5029200" cy="1428750"/>
+          </a:xfrm>
+          <a:prstGeom prst="line">
+            <a:avLst/>
+          </a:prstGeom>
+          <a:noFill/>
+          <a:ln w="38100">
+            <a:solidFill>
+              <a:srgbClr val="B45309"/>
+            </a:solidFill>
+            <a:prstDash val="solid"/>
+            <a:headEnd type="none"/>
+            <a:tailEnd type="none"/>
+          </a:ln>
+        </p:spPr>
+      </p:sp>
+      <p:sp>
+        <p:nvSpPr>
+          <p:cNvPr id="19" name="Text 17"/>
+          <p:cNvSpPr/>
+          <p:nvPr/>
+        </p:nvSpPr>
+        <p:spPr>
+          <a:xfrm>
+            <a:off x="914400" y="7905750"/>
+            <a:ext cx="16459200" cy="457200"/>
+          </a:xfrm>
+          <a:prstGeom prst="rect">
+            <a:avLst/>
+          </a:prstGeom>
+          <a:noFill/>
+          <a:ln/>
+        </p:spPr>
+        <p:txBody>
+          <a:bodyPr wrap="square" lIns="0" tIns="0" rIns="0" bIns="0" rtlCol="0" anchor="t"/>
+          <a:lstStyle/>
+          <a:p>
+            <a:pPr algn="l" indent="0" marL="0">
+              <a:buNone/>
+            </a:pPr>
+            <a:r>
               <a:rPr lang="en-US" sz="2100" dirty="0" spc="0" kern="0">
                 <a:solidFill>
                   <a:srgbClr val="6B6A66"/>
@@ -11754,7 +11711,95 @@
                 <a:ea typeface="Be Vietnam Pro" pitchFamily="34" charset="-122"/>
                 <a:cs typeface="Be Vietnam Pro" pitchFamily="34" charset="-120"/>
               </a:rPr>
-              <a:t>Không</a:t>
+              <a:t>Nguồn</a:t>
+            </a:r>
+            <a:r>
+              <a:rPr lang="en-US" sz="2100" dirty="0" spc="-1" kern="0">
+                <a:solidFill>
+                  <a:srgbClr val="6B6A66"/>
+                </a:solidFill>
+                <a:latin typeface="Be Vietnam Pro" pitchFamily="34" charset="0"/>
+                <a:ea typeface="Be Vietnam Pro" pitchFamily="34" charset="-122"/>
+                <a:cs typeface="Be Vietnam Pro" pitchFamily="34" charset="-120"/>
+              </a:rPr>
+              <a:t> không nói</a:t>
+            </a:r>
+            <a:r>
+              <a:rPr lang="en-US" sz="2100" dirty="0" spc="0" kern="0">
+                <a:solidFill>
+                  <a:srgbClr val="6B6A66"/>
+                </a:solidFill>
+                <a:latin typeface="Be Vietnam Pro" pitchFamily="34" charset="0"/>
+                <a:ea typeface="Be Vietnam Pro" pitchFamily="34" charset="-122"/>
+                <a:cs typeface="Be Vietnam Pro" pitchFamily="34" charset="-120"/>
+              </a:rPr>
+              <a:t> thứ</a:t>
+            </a:r>
+            <a:r>
+              <a:rPr lang="en-US" sz="2100" dirty="0" spc="-1" kern="0">
+                <a:solidFill>
+                  <a:srgbClr val="6B6A66"/>
+                </a:solidFill>
+                <a:latin typeface="Be Vietnam Pro" pitchFamily="34" charset="0"/>
+                <a:ea typeface="Be Vietnam Pro" pitchFamily="34" charset="-122"/>
+                <a:cs typeface="Be Vietnam Pro" pitchFamily="34" charset="-120"/>
+              </a:rPr>
+              <a:t> tự</a:t>
+            </a:r>
+            <a:r>
+              <a:rPr lang="en-US" sz="2100" dirty="0" spc="-18" kern="0">
+                <a:solidFill>
+                  <a:srgbClr val="6B6A66"/>
+                </a:solidFill>
+                <a:latin typeface="Be Vietnam Pro" pitchFamily="34" charset="0"/>
+                <a:ea typeface="Be Vietnam Pro" pitchFamily="34" charset="-122"/>
+                <a:cs typeface="Be Vietnam Pro" pitchFamily="34" charset="-120"/>
+              </a:rPr>
+              <a:t> yêu</a:t>
+            </a:r>
+            <a:r>
+              <a:rPr lang="en-US" sz="2100" dirty="0" spc="-2" kern="0">
+                <a:solidFill>
+                  <a:srgbClr val="6B6A66"/>
+                </a:solidFill>
+                <a:latin typeface="Be Vietnam Pro" pitchFamily="34" charset="0"/>
+                <a:ea typeface="Be Vietnam Pro" pitchFamily="34" charset="-122"/>
+                <a:cs typeface="Be Vietnam Pro" pitchFamily="34" charset="-120"/>
+              </a:rPr>
+              <a:t> cầu</a:t>
+            </a:r>
+            <a:r>
+              <a:rPr lang="en-US" sz="2100" dirty="0" spc="28" kern="0">
+                <a:solidFill>
+                  <a:srgbClr val="6B6A66"/>
+                </a:solidFill>
+                <a:latin typeface="Be Vietnam Pro" pitchFamily="34" charset="0"/>
+                <a:ea typeface="Be Vietnam Pro" pitchFamily="34" charset="-122"/>
+                <a:cs typeface="Be Vietnam Pro" pitchFamily="34" charset="-120"/>
+              </a:rPr>
+              <a:t> đi</a:t>
+            </a:r>
+            <a:r>
+              <a:rPr lang="en-US" sz="2100" dirty="0" spc="-2" kern="0">
+                <a:solidFill>
+                  <a:srgbClr val="6B6A66"/>
+                </a:solidFill>
+                <a:latin typeface="Be Vietnam Pro" pitchFamily="34" charset="0"/>
+                <a:ea typeface="Be Vietnam Pro" pitchFamily="34" charset="-122"/>
+                <a:cs typeface="Be Vietnam Pro" pitchFamily="34" charset="-120"/>
+              </a:rPr>
+              <a:t> qua.</a:t>
+            </a:r>
+            <a:r>
+              <a:rPr lang="en-US" sz="2100" dirty="0" spc="-1" kern="0">
+                <a:solidFill>
+                  <a:srgbClr val="6B6A66"/>
+                </a:solidFill>
+                <a:latin typeface="Be Vietnam Pro" pitchFamily="34" charset="0"/>
+                <a:ea typeface="Be Vietnam Pro" pitchFamily="34" charset="-122"/>
+                <a:cs typeface="Be Vietnam Pro" pitchFamily="34" charset="-120"/>
+              </a:rPr>
+              <a:t> Không</a:t>
             </a:r>
             <a:r>
               <a:rPr lang="en-US" sz="2100" dirty="0" spc="-24" kern="0">
@@ -11779,7 +11824,7 @@
               <a:t> lời</a:t>
             </a:r>
             <a:r>
-              <a:rPr lang="en-US" sz="2100" dirty="0" spc="-13" kern="0">
+              <a:rPr lang="en-US" sz="2100" dirty="0" spc="-12" kern="0">
                 <a:solidFill>
                   <a:srgbClr val="6B6A66"/>
                 </a:solidFill>
@@ -11790,7 +11835,7 @@
               <a:t> ngay:</a:t>
             </a:r>
             <a:r>
-              <a:rPr lang="en-US" sz="2100" dirty="0" spc="-10" kern="0">
+              <a:rPr lang="en-US" sz="2100" dirty="0" spc="-11" kern="0">
                 <a:solidFill>
                   <a:srgbClr val="6B6A66"/>
                 </a:solidFill>
@@ -11809,18 +11854,7 @@
                 <a:ea typeface="Be Vietnam Pro" pitchFamily="34" charset="-122"/>
                 <a:cs typeface="Be Vietnam Pro" pitchFamily="34" charset="-120"/>
               </a:rPr>
-              <a:t> tin,</a:t>
-            </a:r>
-            <a:r>
-              <a:rPr lang="en-US" sz="2100" dirty="0" spc="-1" kern="0">
-                <a:solidFill>
-                  <a:srgbClr val="6B6A66"/>
-                </a:solidFill>
-                <a:latin typeface="Be Vietnam Pro" pitchFamily="34" charset="0"/>
-                <a:ea typeface="Be Vietnam Pro" pitchFamily="34" charset="-122"/>
-                <a:cs typeface="Be Vietnam Pro" pitchFamily="34" charset="-120"/>
-              </a:rPr>
-              <a:t> xử</a:t>
+              <a:t> tin, xử</a:t>
             </a:r>
             <a:r>
               <a:rPr lang="en-US" sz="2100" dirty="0" spc="-3" kern="0">
@@ -11883,7 +11917,7 @@
       </p:sp>
       <p:sp>
         <p:nvSpPr>
-          <p:cNvPr id="22" name="Shape 20"/>
+          <p:cNvPr id="20" name="Shape 18"/>
           <p:cNvSpPr/>
           <p:nvPr/>
         </p:nvSpPr>
@@ -11908,7 +11942,7 @@
       </p:sp>
       <p:sp>
         <p:nvSpPr>
-          <p:cNvPr id="23" name="Shape 21"/>
+          <p:cNvPr id="21" name="Shape 19"/>
           <p:cNvSpPr/>
           <p:nvPr/>
         </p:nvSpPr>
@@ -11933,7 +11967,7 @@
       </p:sp>
       <p:sp>
         <p:nvSpPr>
-          <p:cNvPr id="24" name="Shape 22"/>
+          <p:cNvPr id="22" name="Shape 20"/>
           <p:cNvSpPr/>
           <p:nvPr/>
         </p:nvSpPr>
@@ -11958,7 +11992,7 @@
       </p:sp>
       <p:sp>
         <p:nvSpPr>
-          <p:cNvPr id="25" name="Shape 23"/>
+          <p:cNvPr id="23" name="Shape 21"/>
           <p:cNvSpPr/>
           <p:nvPr/>
         </p:nvSpPr>
@@ -11983,7 +12017,7 @@
       </p:sp>
       <p:sp>
         <p:nvSpPr>
-          <p:cNvPr id="26" name="Shape 24"/>
+          <p:cNvPr id="24" name="Shape 22"/>
           <p:cNvSpPr/>
           <p:nvPr/>
         </p:nvSpPr>
@@ -12008,7 +12042,7 @@
       </p:sp>
       <p:sp>
         <p:nvSpPr>
-          <p:cNvPr id="27" name="Shape 25"/>
+          <p:cNvPr id="25" name="Shape 23"/>
           <p:cNvSpPr/>
           <p:nvPr/>
         </p:nvSpPr>
@@ -12033,7 +12067,7 @@
       </p:sp>
       <p:sp>
         <p:nvSpPr>
-          <p:cNvPr id="28" name="Shape 26"/>
+          <p:cNvPr id="26" name="Shape 24"/>
           <p:cNvSpPr/>
           <p:nvPr/>
         </p:nvSpPr>
@@ -12058,7 +12092,7 @@
       </p:sp>
       <p:sp>
         <p:nvSpPr>
-          <p:cNvPr id="29" name="Shape 27"/>
+          <p:cNvPr id="27" name="Shape 25"/>
           <p:cNvSpPr/>
           <p:nvPr/>
         </p:nvSpPr>
@@ -12083,7 +12117,7 @@
       </p:sp>
       <p:sp>
         <p:nvSpPr>
-          <p:cNvPr id="30" name="Shape 28"/>
+          <p:cNvPr id="28" name="Shape 26"/>
           <p:cNvSpPr/>
           <p:nvPr/>
         </p:nvSpPr>
@@ -12106,7 +12140,7 @@
       </p:sp>
       <p:sp>
         <p:nvSpPr>
-          <p:cNvPr id="31" name="Shape 29"/>
+          <p:cNvPr id="29" name="Shape 27"/>
           <p:cNvSpPr/>
           <p:nvPr/>
         </p:nvSpPr>
@@ -12129,7 +12163,7 @@
       </p:sp>
       <p:sp>
         <p:nvSpPr>
-          <p:cNvPr id="32" name="Text 30"/>
+          <p:cNvPr id="30" name="Text 28"/>
           <p:cNvSpPr/>
           <p:nvPr/>
         </p:nvSpPr>
@@ -12245,7 +12279,7 @@
       </p:sp>
       <p:sp>
         <p:nvSpPr>
-          <p:cNvPr id="33" name="Shape 31"/>
+          <p:cNvPr id="31" name="Shape 29"/>
           <p:cNvSpPr/>
           <p:nvPr/>
         </p:nvSpPr>
@@ -12269,7 +12303,7 @@
       </p:sp>
       <p:pic>
         <p:nvPicPr>
-          <p:cNvPr id="34" name="Moda image moda-export-watermark-803a203e-b81c-4b5c-ae28-df3029160195" descr="">    </p:cNvPr>
+          <p:cNvPr id="32" name="Moda image moda-export-watermark-803a203e-b81c-4b5c-ae28-df3029160195" descr="">    </p:cNvPr>
           <p:cNvPicPr>
             <a:picLocks noChangeAspect="1"/>
           </p:cNvPicPr>

--- a/system-design-101/vi/lessons/sd-02-032/slides/sd-02-032.pptx
+++ b/system-design-101/vi/lessons/sd-02-032/slides/sd-02-032.pptx
@@ -2924,7 +2924,7 @@
           </p:nvPr>
         </p:nvGraphicFramePr>
         <p:xfrm>
-          <a:off x="914400" y="2476500"/>
+          <a:off x="914400" y="2381250"/>
           <a:ext cx="13716000" cy="914400"/>
         </p:xfrm>
         <a:graphic>
@@ -2936,7 +2936,7 @@
                 <a:gridCol w="6254496"/>
                 <a:gridCol w="7900416"/>
               </a:tblGrid>
-              <a:tr h="990600">
+              <a:tr h="800100">
                 <a:tc>
                   <a:txBody>
                     <a:bodyPr/>
@@ -3135,7 +3135,7 @@
                   </a:tcPr>
                 </a:tc>
               </a:tr>
-              <a:tr h="990600">
+              <a:tr h="800100">
                 <a:tc>
                   <a:txBody>
                     <a:bodyPr/>
@@ -3374,7 +3374,7 @@
                   </a:tcPr>
                 </a:tc>
               </a:tr>
-              <a:tr h="990600">
+              <a:tr h="800100">
                 <a:tc>
                   <a:txBody>
                     <a:bodyPr/>
@@ -3591,7 +3591,7 @@
                   </a:tcPr>
                 </a:tc>
               </a:tr>
-              <a:tr h="990600">
+              <a:tr h="800100">
                 <a:tc>
                   <a:txBody>
                     <a:bodyPr/>
@@ -3808,6 +3808,473 @@
                   </a:tcPr>
                 </a:tc>
               </a:tr>
+              <a:tr h="800100">
+                <a:tc>
+                  <a:txBody>
+                    <a:bodyPr/>
+                    <a:lstStyle/>
+                    <a:p>
+                      <a:pPr algn="l" indent="0" marL="0">
+                        <a:lnSpc>
+                          <a:spcPts val="2700"/>
+                        </a:lnSpc>
+                        <a:buNone/>
+                      </a:pPr>
+                      <a:r>
+                        <a:rPr lang="en-US" sz="2250" dirty="0" spc="-2" kern="0">
+                          <a:solidFill>
+                            <a:srgbClr val="FFB454"/>
+                          </a:solidFill>
+                          <a:latin typeface="Be Vietnam Pro" pitchFamily="34" charset="0"/>
+                          <a:ea typeface="Be Vietnam Pro" pitchFamily="34" charset="-122"/>
+                          <a:cs typeface="Be Vietnam Pro" pitchFamily="34" charset="-120"/>
+                        </a:rPr>
+                        <a:t>EV</a:t>
+                      </a:r>
+                      <a:endParaRPr lang="en-US" sz="1200" dirty="0"/>
+                    </a:p>
+                  </a:txBody>
+                  <a:tcPr marL="76200" marR="76200" marT="76200" marB="76200">
+                    <a:lnL w="9525" cap="flat" cmpd="sng" algn="ctr">
+                      <a:solidFill>
+                        <a:srgbClr val="2D3140"/>
+                      </a:solidFill>
+                      <a:prstDash val="solid"/>
+                      <a:round/>
+                      <a:headEnd type="none" w="med" len="med"/>
+                      <a:tailEnd type="none" w="med" len="med"/>
+                    </a:lnL>
+                    <a:lnR w="0" cap="flat" cmpd="sng" algn="ctr">
+                      <a:noFill/>
+                    </a:lnR>
+                    <a:lnT w="9525" cap="flat" cmpd="sng" algn="ctr">
+                      <a:solidFill>
+                        <a:srgbClr val="2D3140"/>
+                      </a:solidFill>
+                      <a:prstDash val="solid"/>
+                      <a:round/>
+                      <a:headEnd type="none" w="med" len="med"/>
+                      <a:tailEnd type="none" w="med" len="med"/>
+                    </a:lnT>
+                    <a:lnB w="0" cap="flat" cmpd="sng" algn="ctr">
+                      <a:noFill/>
+                    </a:lnB>
+                    <a:solidFill>
+                      <a:srgbClr val="14161C"/>
+                    </a:solidFill>
+                  </a:tcPr>
+                </a:tc>
+                <a:tc>
+                  <a:txBody>
+                    <a:bodyPr/>
+                    <a:lstStyle/>
+                    <a:p>
+                      <a:pPr algn="l" indent="0" marL="0">
+                        <a:lnSpc>
+                          <a:spcPts val="2700"/>
+                        </a:lnSpc>
+                        <a:buNone/>
+                      </a:pPr>
+                      <a:r>
+                        <a:rPr lang="en-US" sz="2250" dirty="0" spc="-12" kern="0">
+                          <a:solidFill>
+                            <a:srgbClr val="E4E1D8"/>
+                          </a:solidFill>
+                          <a:latin typeface="Be Vietnam Pro" pitchFamily="34" charset="0"/>
+                          <a:ea typeface="Be Vietnam Pro" pitchFamily="34" charset="-122"/>
+                          <a:cs typeface="Be Vietnam Pro" pitchFamily="34" charset="-120"/>
+                        </a:rPr>
+                        <a:t>Ephemeral</a:t>
+                      </a:r>
+                      <a:r>
+                        <a:rPr lang="en-US" sz="2250" dirty="0" spc="-18" kern="0">
+                          <a:solidFill>
+                            <a:srgbClr val="E4E1D8"/>
+                          </a:solidFill>
+                          <a:latin typeface="Be Vietnam Pro" pitchFamily="34" charset="0"/>
+                          <a:ea typeface="Be Vietnam Pro" pitchFamily="34" charset="-122"/>
+                          <a:cs typeface="Be Vietnam Pro" pitchFamily="34" charset="-120"/>
+                        </a:rPr>
+                        <a:t> Volatile</a:t>
+                      </a:r>
+                      <a:endParaRPr lang="en-US" sz="1200" dirty="0"/>
+                    </a:p>
+                  </a:txBody>
+                  <a:tcPr marL="76200" marR="76200" marT="76200" marB="76200">
+                    <a:lnL w="9525" cap="flat" cmpd="sng" algn="ctr">
+                      <a:solidFill>
+                        <a:srgbClr val="2D3140"/>
+                      </a:solidFill>
+                      <a:prstDash val="solid"/>
+                      <a:round/>
+                      <a:headEnd type="none" w="med" len="med"/>
+                      <a:tailEnd type="none" w="med" len="med"/>
+                    </a:lnL>
+                    <a:lnR w="0" cap="flat" cmpd="sng" algn="ctr">
+                      <a:noFill/>
+                    </a:lnR>
+                    <a:lnT w="9525" cap="flat" cmpd="sng" algn="ctr">
+                      <a:solidFill>
+                        <a:srgbClr val="2D3140"/>
+                      </a:solidFill>
+                      <a:prstDash val="solid"/>
+                      <a:round/>
+                      <a:headEnd type="none" w="med" len="med"/>
+                      <a:tailEnd type="none" w="med" len="med"/>
+                    </a:lnT>
+                    <a:lnB w="0" cap="flat" cmpd="sng" algn="ctr">
+                      <a:noFill/>
+                    </a:lnB>
+                    <a:solidFill>
+                      <a:srgbClr val="14161C"/>
+                    </a:solidFill>
+                  </a:tcPr>
+                </a:tc>
+                <a:tc>
+                  <a:txBody>
+                    <a:bodyPr/>
+                    <a:lstStyle/>
+                    <a:p>
+                      <a:pPr algn="l" indent="0" marL="0">
+                        <a:lnSpc>
+                          <a:spcPts val="2700"/>
+                        </a:lnSpc>
+                        <a:buNone/>
+                      </a:pPr>
+                      <a:r>
+                        <a:rPr lang="en-US" sz="2250" dirty="0" spc="-18" kern="0">
+                          <a:solidFill>
+                            <a:srgbClr val="E4E1D8"/>
+                          </a:solidFill>
+                          <a:latin typeface="Be Vietnam Pro" pitchFamily="34" charset="0"/>
+                          <a:ea typeface="Be Vietnam Pro" pitchFamily="34" charset="-122"/>
+                          <a:cs typeface="Be Vietnam Pro" pitchFamily="34" charset="-120"/>
+                        </a:rPr>
+                        <a:t>tạm</a:t>
+                      </a:r>
+                      <a:r>
+                        <a:rPr lang="en-US" sz="2250" dirty="0" spc="0" kern="0">
+                          <a:solidFill>
+                            <a:srgbClr val="E4E1D8"/>
+                          </a:solidFill>
+                          <a:latin typeface="Be Vietnam Pro" pitchFamily="34" charset="0"/>
+                          <a:ea typeface="Be Vietnam Pro" pitchFamily="34" charset="-122"/>
+                          <a:cs typeface="Be Vietnam Pro" pitchFamily="34" charset="-120"/>
+                        </a:rPr>
+                        <a:t> thời,</a:t>
+                      </a:r>
+                      <a:r>
+                        <a:rPr lang="en-US" sz="2250" dirty="0" spc="1" kern="0">
+                          <a:solidFill>
+                            <a:srgbClr val="E4E1D8"/>
+                          </a:solidFill>
+                          <a:latin typeface="Be Vietnam Pro" pitchFamily="34" charset="0"/>
+                          <a:ea typeface="Be Vietnam Pro" pitchFamily="34" charset="-122"/>
+                          <a:cs typeface="Be Vietnam Pro" pitchFamily="34" charset="-120"/>
+                        </a:rPr>
+                        <a:t> dễ</a:t>
+                      </a:r>
+                      <a:r>
+                        <a:rPr lang="en-US" sz="2250" dirty="0" spc="-11" kern="0">
+                          <a:solidFill>
+                            <a:srgbClr val="E4E1D8"/>
+                          </a:solidFill>
+                          <a:latin typeface="Be Vietnam Pro" pitchFamily="34" charset="0"/>
+                          <a:ea typeface="Be Vietnam Pro" pitchFamily="34" charset="-122"/>
+                          <a:cs typeface="Be Vietnam Pro" pitchFamily="34" charset="-120"/>
+                        </a:rPr>
+                        <a:t> mất,</a:t>
+                      </a:r>
+                      <a:r>
+                        <a:rPr lang="en-US" sz="2250" dirty="0" spc="-16" kern="0">
+                          <a:solidFill>
+                            <a:srgbClr val="E4E1D8"/>
+                          </a:solidFill>
+                          <a:latin typeface="Be Vietnam Pro" pitchFamily="34" charset="0"/>
+                          <a:ea typeface="Be Vietnam Pro" pitchFamily="34" charset="-122"/>
+                          <a:cs typeface="Be Vietnam Pro" pitchFamily="34" charset="-120"/>
+                        </a:rPr>
+                        <a:t> trong</a:t>
+                      </a:r>
+                      <a:r>
+                        <a:rPr lang="en-US" sz="2250" dirty="0" spc="-7" kern="0">
+                          <a:solidFill>
+                            <a:srgbClr val="E4E1D8"/>
+                          </a:solidFill>
+                          <a:latin typeface="Be Vietnam Pro" pitchFamily="34" charset="0"/>
+                          <a:ea typeface="Be Vietnam Pro" pitchFamily="34" charset="-122"/>
+                          <a:cs typeface="Be Vietnam Pro" pitchFamily="34" charset="-120"/>
+                        </a:rPr>
+                        <a:t> EVCache</a:t>
+                      </a:r>
+                      <a:endParaRPr lang="en-US" sz="1200" dirty="0"/>
+                    </a:p>
+                  </a:txBody>
+                  <a:tcPr marL="76200" marR="76200" marT="76200" marB="76200">
+                    <a:lnL w="9525" cap="flat" cmpd="sng" algn="ctr">
+                      <a:solidFill>
+                        <a:srgbClr val="2D3140"/>
+                      </a:solidFill>
+                      <a:prstDash val="solid"/>
+                      <a:round/>
+                      <a:headEnd type="none" w="med" len="med"/>
+                      <a:tailEnd type="none" w="med" len="med"/>
+                    </a:lnL>
+                    <a:lnR w="9525" cap="flat" cmpd="sng" algn="ctr">
+                      <a:solidFill>
+                        <a:srgbClr val="2D3140"/>
+                      </a:solidFill>
+                      <a:prstDash val="solid"/>
+                      <a:round/>
+                      <a:headEnd type="none" w="med" len="med"/>
+                      <a:tailEnd type="none" w="med" len="med"/>
+                    </a:lnR>
+                    <a:lnT w="9525" cap="flat" cmpd="sng" algn="ctr">
+                      <a:solidFill>
+                        <a:srgbClr val="2D3140"/>
+                      </a:solidFill>
+                      <a:prstDash val="solid"/>
+                      <a:round/>
+                      <a:headEnd type="none" w="med" len="med"/>
+                      <a:tailEnd type="none" w="med" len="med"/>
+                    </a:lnT>
+                    <a:lnB w="0" cap="flat" cmpd="sng" algn="ctr">
+                      <a:noFill/>
+                    </a:lnB>
+                    <a:solidFill>
+                      <a:srgbClr val="14161C"/>
+                    </a:solidFill>
+                  </a:tcPr>
+                </a:tc>
+              </a:tr>
+              <a:tr h="800100">
+                <a:tc>
+                  <a:txBody>
+                    <a:bodyPr/>
+                    <a:lstStyle/>
+                    <a:p>
+                      <a:pPr algn="l" indent="0" marL="0">
+                        <a:lnSpc>
+                          <a:spcPts val="2700"/>
+                        </a:lnSpc>
+                        <a:buNone/>
+                      </a:pPr>
+                      <a:r>
+                        <a:rPr lang="en-US" sz="2250" dirty="0" spc="2" kern="0">
+                          <a:solidFill>
+                            <a:srgbClr val="FFB454"/>
+                          </a:solidFill>
+                          <a:latin typeface="Be Vietnam Pro" pitchFamily="34" charset="0"/>
+                          <a:ea typeface="Be Vietnam Pro" pitchFamily="34" charset="-122"/>
+                          <a:cs typeface="Be Vietnam Pro" pitchFamily="34" charset="-120"/>
+                        </a:rPr>
+                        <a:t>DB</a:t>
+                      </a:r>
+                      <a:endParaRPr lang="en-US" sz="1200" dirty="0"/>
+                    </a:p>
+                  </a:txBody>
+                  <a:tcPr marL="76200" marR="76200" marT="76200" marB="76200">
+                    <a:lnL w="9525" cap="flat" cmpd="sng" algn="ctr">
+                      <a:solidFill>
+                        <a:srgbClr val="2D3140"/>
+                      </a:solidFill>
+                      <a:prstDash val="solid"/>
+                      <a:round/>
+                      <a:headEnd type="none" w="med" len="med"/>
+                      <a:tailEnd type="none" w="med" len="med"/>
+                    </a:lnL>
+                    <a:lnR w="0" cap="flat" cmpd="sng" algn="ctr">
+                      <a:noFill/>
+                    </a:lnR>
+                    <a:lnT w="9525" cap="flat" cmpd="sng" algn="ctr">
+                      <a:solidFill>
+                        <a:srgbClr val="2D3140"/>
+                      </a:solidFill>
+                      <a:prstDash val="solid"/>
+                      <a:round/>
+                      <a:headEnd type="none" w="med" len="med"/>
+                      <a:tailEnd type="none" w="med" len="med"/>
+                    </a:lnT>
+                    <a:lnB w="0" cap="flat" cmpd="sng" algn="ctr">
+                      <a:noFill/>
+                    </a:lnB>
+                    <a:solidFill>
+                      <a:srgbClr val="1A1D25"/>
+                    </a:solidFill>
+                  </a:tcPr>
+                </a:tc>
+                <a:tc>
+                  <a:txBody>
+                    <a:bodyPr/>
+                    <a:lstStyle/>
+                    <a:p>
+                      <a:pPr algn="l" indent="0" marL="0">
+                        <a:lnSpc>
+                          <a:spcPts val="2700"/>
+                        </a:lnSpc>
+                        <a:buNone/>
+                      </a:pPr>
+                      <a:r>
+                        <a:rPr lang="en-US" sz="2250" dirty="0" spc="-15" kern="0">
+                          <a:solidFill>
+                            <a:srgbClr val="E4E1D8"/>
+                          </a:solidFill>
+                          <a:latin typeface="Be Vietnam Pro" pitchFamily="34" charset="0"/>
+                          <a:ea typeface="Be Vietnam Pro" pitchFamily="34" charset="-122"/>
+                          <a:cs typeface="Be Vietnam Pro" pitchFamily="34" charset="-120"/>
+                        </a:rPr>
+                        <a:t>DataBase</a:t>
+                      </a:r>
+                      <a:endParaRPr lang="en-US" sz="1200" dirty="0"/>
+                    </a:p>
+                  </a:txBody>
+                  <a:tcPr marL="76200" marR="76200" marT="76200" marB="76200">
+                    <a:lnL w="9525" cap="flat" cmpd="sng" algn="ctr">
+                      <a:solidFill>
+                        <a:srgbClr val="2D3140"/>
+                      </a:solidFill>
+                      <a:prstDash val="solid"/>
+                      <a:round/>
+                      <a:headEnd type="none" w="med" len="med"/>
+                      <a:tailEnd type="none" w="med" len="med"/>
+                    </a:lnL>
+                    <a:lnR w="0" cap="flat" cmpd="sng" algn="ctr">
+                      <a:noFill/>
+                    </a:lnR>
+                    <a:lnT w="9525" cap="flat" cmpd="sng" algn="ctr">
+                      <a:solidFill>
+                        <a:srgbClr val="2D3140"/>
+                      </a:solidFill>
+                      <a:prstDash val="solid"/>
+                      <a:round/>
+                      <a:headEnd type="none" w="med" len="med"/>
+                      <a:tailEnd type="none" w="med" len="med"/>
+                    </a:lnT>
+                    <a:lnB w="0" cap="flat" cmpd="sng" algn="ctr">
+                      <a:noFill/>
+                    </a:lnB>
+                    <a:solidFill>
+                      <a:srgbClr val="1A1D25"/>
+                    </a:solidFill>
+                  </a:tcPr>
+                </a:tc>
+                <a:tc>
+                  <a:txBody>
+                    <a:bodyPr/>
+                    <a:lstStyle/>
+                    <a:p>
+                      <a:pPr algn="l" indent="0" marL="0">
+                        <a:lnSpc>
+                          <a:spcPts val="2700"/>
+                        </a:lnSpc>
+                        <a:buNone/>
+                      </a:pPr>
+                      <a:r>
+                        <a:rPr lang="en-US" sz="2250" dirty="0" spc="-1" kern="0">
+                          <a:solidFill>
+                            <a:srgbClr val="E4E1D8"/>
+                          </a:solidFill>
+                          <a:latin typeface="Be Vietnam Pro" pitchFamily="34" charset="0"/>
+                          <a:ea typeface="Be Vietnam Pro" pitchFamily="34" charset="-122"/>
+                          <a:cs typeface="Be Vietnam Pro" pitchFamily="34" charset="-120"/>
+                        </a:rPr>
+                        <a:t>cơ</a:t>
+                      </a:r>
+                      <a:r>
+                        <a:rPr lang="en-US" sz="2250" dirty="0" spc="-2" kern="0">
+                          <a:solidFill>
+                            <a:srgbClr val="E4E1D8"/>
+                          </a:solidFill>
+                          <a:latin typeface="Be Vietnam Pro" pitchFamily="34" charset="0"/>
+                          <a:ea typeface="Be Vietnam Pro" pitchFamily="34" charset="-122"/>
+                          <a:cs typeface="Be Vietnam Pro" pitchFamily="34" charset="-120"/>
+                        </a:rPr>
+                        <a:t> sở</a:t>
+                      </a:r>
+                      <a:r>
+                        <a:rPr lang="en-US" sz="2250" dirty="0" spc="4" kern="0">
+                          <a:solidFill>
+                            <a:srgbClr val="E4E1D8"/>
+                          </a:solidFill>
+                          <a:latin typeface="Be Vietnam Pro" pitchFamily="34" charset="0"/>
+                          <a:ea typeface="Be Vietnam Pro" pitchFamily="34" charset="-122"/>
+                          <a:cs typeface="Be Vietnam Pro" pitchFamily="34" charset="-120"/>
+                        </a:rPr>
+                        <a:t> dữ</a:t>
+                      </a:r>
+                      <a:r>
+                        <a:rPr lang="en-US" sz="2250" dirty="0" spc="-2" kern="0">
+                          <a:solidFill>
+                            <a:srgbClr val="E4E1D8"/>
+                          </a:solidFill>
+                          <a:latin typeface="Be Vietnam Pro" pitchFamily="34" charset="0"/>
+                          <a:ea typeface="Be Vietnam Pro" pitchFamily="34" charset="-122"/>
+                          <a:cs typeface="Be Vietnam Pro" pitchFamily="34" charset="-120"/>
+                        </a:rPr>
+                        <a:t> liệu,</a:t>
+                      </a:r>
+                      <a:r>
+                        <a:rPr lang="en-US" sz="2250" dirty="0" spc="-16" kern="0">
+                          <a:solidFill>
+                            <a:srgbClr val="E4E1D8"/>
+                          </a:solidFill>
+                          <a:latin typeface="Be Vietnam Pro" pitchFamily="34" charset="0"/>
+                          <a:ea typeface="Be Vietnam Pro" pitchFamily="34" charset="-122"/>
+                          <a:cs typeface="Be Vietnam Pro" pitchFamily="34" charset="-120"/>
+                        </a:rPr>
+                        <a:t> trong</a:t>
+                      </a:r>
+                      <a:r>
+                        <a:rPr lang="en-US" sz="2250" dirty="0" spc="-11" kern="0">
+                          <a:solidFill>
+                            <a:srgbClr val="E4E1D8"/>
+                          </a:solidFill>
+                          <a:latin typeface="Be Vietnam Pro" pitchFamily="34" charset="0"/>
+                          <a:ea typeface="Be Vietnam Pro" pitchFamily="34" charset="-122"/>
+                          <a:cs typeface="Be Vietnam Pro" pitchFamily="34" charset="-120"/>
+                        </a:rPr>
+                        <a:t> CockroachDB</a:t>
+                      </a:r>
+                      <a:endParaRPr lang="en-US" sz="1200" dirty="0"/>
+                    </a:p>
+                  </a:txBody>
+                  <a:tcPr marL="76200" marR="76200" marT="76200" marB="76200">
+                    <a:lnL w="9525" cap="flat" cmpd="sng" algn="ctr">
+                      <a:solidFill>
+                        <a:srgbClr val="2D3140"/>
+                      </a:solidFill>
+                      <a:prstDash val="solid"/>
+                      <a:round/>
+                      <a:headEnd type="none" w="med" len="med"/>
+                      <a:tailEnd type="none" w="med" len="med"/>
+                    </a:lnL>
+                    <a:lnR w="9525" cap="flat" cmpd="sng" algn="ctr">
+                      <a:solidFill>
+                        <a:srgbClr val="2D3140"/>
+                      </a:solidFill>
+                      <a:prstDash val="solid"/>
+                      <a:round/>
+                      <a:headEnd type="none" w="med" len="med"/>
+                      <a:tailEnd type="none" w="med" len="med"/>
+                    </a:lnR>
+                    <a:lnT w="9525" cap="flat" cmpd="sng" algn="ctr">
+                      <a:solidFill>
+                        <a:srgbClr val="2D3140"/>
+                      </a:solidFill>
+                      <a:prstDash val="solid"/>
+                      <a:round/>
+                      <a:headEnd type="none" w="med" len="med"/>
+                      <a:tailEnd type="none" w="med" len="med"/>
+                    </a:lnT>
+                    <a:lnB w="0" cap="flat" cmpd="sng" algn="ctr">
+                      <a:noFill/>
+                    </a:lnB>
+                    <a:solidFill>
+                      <a:srgbClr val="1A1D25"/>
+                    </a:solidFill>
+                  </a:tcPr>
+                </a:tc>
+              </a:tr>
             </a:tbl>
           </a:graphicData>
         </a:graphic>
@@ -3820,7 +4287,7 @@
         </p:nvSpPr>
         <p:spPr>
           <a:xfrm>
-            <a:off x="914400" y="6915150"/>
+            <a:off x="914400" y="7677150"/>
             <a:ext cx="11430000" cy="428625"/>
           </a:xfrm>
           <a:prstGeom prst="rect">
@@ -3870,7 +4337,7 @@
         </p:nvSpPr>
         <p:spPr>
           <a:xfrm>
-            <a:off x="914400" y="7334250"/>
+            <a:off x="914400" y="8096250"/>
             <a:ext cx="16459200" cy="552450"/>
           </a:xfrm>
           <a:prstGeom prst="rect">
@@ -3986,7 +4453,7 @@
         </p:nvSpPr>
         <p:spPr>
           <a:xfrm>
-            <a:off x="914400" y="7867650"/>
+            <a:off x="914400" y="8629650"/>
             <a:ext cx="16459200" cy="390525"/>
           </a:xfrm>
           <a:prstGeom prst="rect">

--- a/system-design-101/vi/lessons/sd-02-032/slides/sd-02-032.pptx
+++ b/system-design-101/vi/lessons/sd-02-032/slides/sd-02-032.pptx
@@ -5872,7 +5872,7 @@
               <a:buNone/>
             </a:pPr>
             <a:r>
-              <a:rPr lang="en-US" sz="1950" b="1" spc="300" kern="0" dirty="0">
+              <a:rPr lang="en-US" sz="1950" b="1" spc="336" kern="0" dirty="0">
                 <a:solidFill>
                   <a:srgbClr val="7C93FF"/>
                 </a:solidFill>
@@ -5880,7 +5880,40 @@
                 <a:ea typeface="Be Vietnam Pro" pitchFamily="34" charset="-122"/>
                 <a:cs typeface="Be Vietnam Pro" pitchFamily="34" charset="-120"/>
               </a:rPr>
-              <a:t>GẦN</a:t>
+              <a:t>ỨNG</a:t>
+            </a:r>
+            <a:r>
+              <a:rPr lang="en-US" sz="1950" b="1" spc="301" kern="0" dirty="0">
+                <a:solidFill>
+                  <a:srgbClr val="7C93FF"/>
+                </a:solidFill>
+                <a:latin typeface="Be Vietnam Pro" pitchFamily="34" charset="0"/>
+                <a:ea typeface="Be Vietnam Pro" pitchFamily="34" charset="-122"/>
+                <a:cs typeface="Be Vietnam Pro" pitchFamily="34" charset="-120"/>
+              </a:rPr>
+              <a:t> DỤNG</a:t>
+            </a:r>
+            <a:r>
+              <a:rPr lang="en-US" sz="1950" b="1" spc="250" kern="0" dirty="0">
+                <a:solidFill>
+                  <a:srgbClr val="7C93FF"/>
+                </a:solidFill>
+                <a:latin typeface="Be Vietnam Pro" pitchFamily="34" charset="0"/>
+                <a:ea typeface="Be Vietnam Pro" pitchFamily="34" charset="-122"/>
+                <a:cs typeface="Be Vietnam Pro" pitchFamily="34" charset="-120"/>
+              </a:rPr>
+              <a:t> VÀ</a:t>
+            </a:r>
+            <a:r>
+              <a:rPr lang="en-US" sz="1950" b="1" spc="301" kern="0" dirty="0">
+                <a:solidFill>
+                  <a:srgbClr val="7C93FF"/>
+                </a:solidFill>
+                <a:latin typeface="Be Vietnam Pro" pitchFamily="34" charset="0"/>
+                <a:ea typeface="Be Vietnam Pro" pitchFamily="34" charset="-122"/>
+                <a:cs typeface="Be Vietnam Pro" pitchFamily="34" charset="-120"/>
+              </a:rPr>
+              <a:t> DỊCH</a:t>
             </a:r>
             <a:r>
               <a:rPr lang="en-US" sz="1950" b="1" spc="302" kern="0" dirty="0">
@@ -5891,18 +5924,7 @@
                 <a:ea typeface="Be Vietnam Pro" pitchFamily="34" charset="-122"/>
                 <a:cs typeface="Be Vietnam Pro" pitchFamily="34" charset="-120"/>
               </a:rPr>
-              <a:t> NGƯỜI</a:t>
-            </a:r>
-            <a:r>
-              <a:rPr lang="en-US" sz="1950" b="1" spc="298" kern="0" dirty="0">
-                <a:solidFill>
-                  <a:srgbClr val="7C93FF"/>
-                </a:solidFill>
-                <a:latin typeface="Be Vietnam Pro" pitchFamily="34" charset="0"/>
-                <a:ea typeface="Be Vietnam Pro" pitchFamily="34" charset="-122"/>
-                <a:cs typeface="Be Vietnam Pro" pitchFamily="34" charset="-120"/>
-              </a:rPr>
-              <a:t> XEM</a:t>
+              <a:t> VỤ</a:t>
             </a:r>
             <a:endParaRPr lang="en-US" sz="1950" dirty="0"/>
           </a:p>
@@ -7940,7 +7962,7 @@
               <a:buNone/>
             </a:pPr>
             <a:r>
-              <a:rPr lang="en-US" sz="6900" dirty="0" spc="15" kern="0">
+              <a:rPr lang="en-US" sz="6900" dirty="0" spc="-12" kern="0">
                 <a:solidFill>
                   <a:srgbClr val="F3EEE3"/>
                 </a:solidFill>
@@ -7948,10 +7970,10 @@
                 <a:ea typeface="Bricolage Grotesque ExtraBold" pitchFamily="34" charset="-122"/>
                 <a:cs typeface="Bricolage Grotesque ExtraBold" pitchFamily="34" charset="-120"/>
               </a:rPr>
-              <a:t>Đứng</a:t>
-            </a:r>
-            <a:r>
-              <a:rPr lang="en-US" sz="6900" dirty="0" spc="-33" kern="0">
+              <a:t>Truyền</a:t>
+            </a:r>
+            <a:r>
+              <a:rPr lang="en-US" sz="6900" dirty="0" spc="2" kern="0">
                 <a:solidFill>
                   <a:srgbClr val="F3EEE3"/>
                 </a:solidFill>
@@ -7959,10 +7981,10 @@
                 <a:ea typeface="Bricolage Grotesque ExtraBold" pitchFamily="34" charset="-122"/>
                 <a:cs typeface="Bricolage Grotesque ExtraBold" pitchFamily="34" charset="-120"/>
               </a:rPr>
-              <a:t> ngoài</a:t>
-            </a:r>
-            <a:r>
-              <a:rPr lang="en-US" sz="6900" dirty="0" spc="1" kern="0">
+              <a:t> tin</a:t>
+            </a:r>
+            <a:r>
+              <a:rPr lang="en-US" sz="6900" dirty="0" spc="-77" kern="0">
                 <a:solidFill>
                   <a:srgbClr val="F3EEE3"/>
                 </a:solidFill>
@@ -7970,10 +7992,10 @@
                 <a:ea typeface="Bricolage Grotesque ExtraBold" pitchFamily="34" charset="-122"/>
                 <a:cs typeface="Bricolage Grotesque ExtraBold" pitchFamily="34" charset="-120"/>
               </a:rPr>
-              <a:t> lần</a:t>
-            </a:r>
-            <a:r>
-              <a:rPr lang="en-US" sz="6900" dirty="0" spc="-80" kern="0">
+              <a:t> và</a:t>
+            </a:r>
+            <a:r>
+              <a:rPr lang="en-US" sz="6900" dirty="0" spc="-7" kern="0">
                 <a:solidFill>
                   <a:srgbClr val="F3EEE3"/>
                 </a:solidFill>
@@ -7981,7 +8003,29 @@
                 <a:ea typeface="Bricolage Grotesque ExtraBold" pitchFamily="34" charset="-122"/>
                 <a:cs typeface="Bricolage Grotesque ExtraBold" pitchFamily="34" charset="-120"/>
               </a:rPr>
-              <a:t> xem</a:t>
+              <a:t> xử</a:t>
+            </a:r>
+            <a:r>
+              <a:rPr lang="en-US" sz="6900" dirty="0" spc="-1" kern="0">
+                <a:solidFill>
+                  <a:srgbClr val="F3EEE3"/>
+                </a:solidFill>
+                <a:latin typeface="Bricolage Grotesque ExtraBold" pitchFamily="34" charset="0"/>
+                <a:ea typeface="Bricolage Grotesque ExtraBold" pitchFamily="34" charset="-122"/>
+                <a:cs typeface="Bricolage Grotesque ExtraBold" pitchFamily="34" charset="-120"/>
+              </a:rPr>
+              <a:t> lý dữ</a:t>
+            </a:r>
+            <a:r>
+              <a:rPr lang="en-US" sz="6900" dirty="0" spc="7" kern="0">
+                <a:solidFill>
+                  <a:srgbClr val="F3EEE3"/>
+                </a:solidFill>
+                <a:latin typeface="Bricolage Grotesque ExtraBold" pitchFamily="34" charset="0"/>
+                <a:ea typeface="Bricolage Grotesque ExtraBold" pitchFamily="34" charset="-122"/>
+                <a:cs typeface="Bricolage Grotesque ExtraBold" pitchFamily="34" charset="-120"/>
+              </a:rPr>
+              <a:t> liệu</a:t>
             </a:r>
             <a:endParaRPr lang="en-US" sz="6900" dirty="0"/>
           </a:p>
@@ -9284,7 +9328,7 @@
                         <a:buNone/>
                       </a:pPr>
                       <a:r>
-                        <a:rPr lang="en-US" sz="2400" b="1" dirty="0" spc="-7" kern="0">
+                        <a:rPr lang="en-US" sz="2400" b="1" dirty="0" spc="-1" kern="0">
                           <a:solidFill>
                             <a:srgbClr val="6B6A66"/>
                           </a:solidFill>
@@ -9292,7 +9336,40 @@
                           <a:ea typeface="Be Vietnam Pro" pitchFamily="34" charset="-122"/>
                           <a:cs typeface="Be Vietnam Pro" pitchFamily="34" charset="-120"/>
                         </a:rPr>
-                        <a:t>Nhóm</a:t>
+                        <a:t>Thứ</a:t>
+                      </a:r>
+                      <a:r>
+                        <a:rPr lang="en-US" sz="2400" b="1" dirty="0" spc="3" kern="0">
+                          <a:solidFill>
+                            <a:srgbClr val="6B6A66"/>
+                          </a:solidFill>
+                          <a:latin typeface="Be Vietnam Pro" pitchFamily="34" charset="0"/>
+                          <a:ea typeface="Be Vietnam Pro" pitchFamily="34" charset="-122"/>
+                          <a:cs typeface="Be Vietnam Pro" pitchFamily="34" charset="-120"/>
+                        </a:rPr>
+                        <a:t> tự</a:t>
+                      </a:r>
+                      <a:r>
+                        <a:rPr lang="en-US" sz="2400" b="1" dirty="0" spc="-13" kern="0">
+                          <a:solidFill>
+                            <a:srgbClr val="6B6A66"/>
+                          </a:solidFill>
+                          <a:latin typeface="Be Vietnam Pro" pitchFamily="34" charset="0"/>
+                          <a:ea typeface="Be Vietnam Pro" pitchFamily="34" charset="-122"/>
+                          <a:cs typeface="Be Vietnam Pro" pitchFamily="34" charset="-120"/>
+                        </a:rPr>
+                        <a:t> trong</a:t>
+                      </a:r>
+                      <a:r>
+                        <a:rPr lang="en-US" sz="2400" b="1" dirty="0" spc="-6" kern="0">
+                          <a:solidFill>
+                            <a:srgbClr val="6B6A66"/>
+                          </a:solidFill>
+                          <a:latin typeface="Be Vietnam Pro" pitchFamily="34" charset="0"/>
+                          <a:ea typeface="Be Vietnam Pro" pitchFamily="34" charset="-122"/>
+                          <a:cs typeface="Be Vietnam Pro" pitchFamily="34" charset="-120"/>
+                        </a:rPr>
+                        <a:t> nguồn</a:t>
                       </a:r>
                       <a:endParaRPr lang="en-US" sz="1200" dirty="0"/>
                     </a:p>
@@ -9354,28 +9431,6 @@
                         </a:rPr>
                         <a:t> cụ</a:t>
                       </a:r>
-                      <a:r>
-                        <a:rPr lang="en-US" sz="2400" b="1" dirty="0" spc="-5" kern="0">
-                          <a:solidFill>
-                            <a:srgbClr val="6B6A66"/>
-                          </a:solidFill>
-                          <a:latin typeface="Be Vietnam Pro" pitchFamily="34" charset="0"/>
-                          <a:ea typeface="Be Vietnam Pro" pitchFamily="34" charset="-122"/>
-                          <a:cs typeface="Be Vietnam Pro" pitchFamily="34" charset="-120"/>
-                        </a:rPr>
-                        <a:t> theo</a:t>
-                      </a:r>
-                      <a:r>
-                        <a:rPr lang="en-US" sz="2400" b="1" dirty="0" spc="-6" kern="0">
-                          <a:solidFill>
-                            <a:srgbClr val="6B6A66"/>
-                          </a:solidFill>
-                          <a:latin typeface="Be Vietnam Pro" pitchFamily="34" charset="0"/>
-                          <a:ea typeface="Be Vietnam Pro" pitchFamily="34" charset="-122"/>
-                          <a:cs typeface="Be Vietnam Pro" pitchFamily="34" charset="-120"/>
-                        </a:rPr>
-                        <a:t> nguồn</a:t>
-                      </a:r>
                       <a:endParaRPr lang="en-US" sz="1200" dirty="0"/>
                     </a:p>
                   </a:txBody>
@@ -9423,17 +9478,6 @@
                         <a:buNone/>
                       </a:pPr>
                       <a:r>
-                        <a:rPr lang="en-US" sz="2400" b="1" dirty="0" spc="-8" kern="0">
-                          <a:solidFill>
-                            <a:srgbClr val="E8472B"/>
-                          </a:solidFill>
-                          <a:latin typeface="Be Vietnam Pro" pitchFamily="34" charset="0"/>
-                          <a:ea typeface="Be Vietnam Pro" pitchFamily="34" charset="-122"/>
-                          <a:cs typeface="Be Vietnam Pro" pitchFamily="34" charset="-120"/>
-                        </a:rPr>
-                        <a:t>Theo</a:t>
-                      </a:r>
-                      <a:r>
                         <a:rPr lang="en-US" sz="2400" b="1" dirty="0" spc="-2" kern="0">
                           <a:solidFill>
                             <a:srgbClr val="E8472B"/>
@@ -9442,18 +9486,7 @@
                           <a:ea typeface="Be Vietnam Pro" pitchFamily="34" charset="-122"/>
                           <a:cs typeface="Be Vietnam Pro" pitchFamily="34" charset="-120"/>
                         </a:rPr>
-                        <a:t> dõi</a:t>
-                      </a:r>
-                      <a:r>
-                        <a:rPr lang="en-US" sz="2400" b="1" dirty="0" spc="-4" kern="0">
-                          <a:solidFill>
-                            <a:srgbClr val="E8472B"/>
-                          </a:solidFill>
-                          <a:latin typeface="Be Vietnam Pro" pitchFamily="34" charset="0"/>
-                          <a:ea typeface="Be Vietnam Pro" pitchFamily="34" charset="-122"/>
-                          <a:cs typeface="Be Vietnam Pro" pitchFamily="34" charset="-120"/>
-                        </a:rPr>
-                        <a:t> việc</a:t>
+                        <a:t>1–3</a:t>
                       </a:r>
                       <a:endParaRPr lang="en-US" sz="1200" dirty="0"/>
                     </a:p>
@@ -9585,7 +9618,7 @@
                         <a:buNone/>
                       </a:pPr>
                       <a:r>
-                        <a:rPr lang="en-US" sz="2400" b="1" dirty="0" spc="27" kern="0">
+                        <a:rPr lang="en-US" sz="2400" b="1" dirty="0" spc="1" kern="0">
                           <a:solidFill>
                             <a:srgbClr val="E8472B"/>
                           </a:solidFill>
@@ -9593,18 +9626,7 @@
                           <a:ea typeface="Be Vietnam Pro" pitchFamily="34" charset="-122"/>
                           <a:cs typeface="Be Vietnam Pro" pitchFamily="34" charset="-120"/>
                         </a:rPr>
-                        <a:t>Dựng</a:t>
-                      </a:r>
-                      <a:r>
-                        <a:rPr lang="en-US" sz="2400" b="1" dirty="0" spc="-2" kern="0">
-                          <a:solidFill>
-                            <a:srgbClr val="E8472B"/>
-                          </a:solidFill>
-                          <a:latin typeface="Be Vietnam Pro" pitchFamily="34" charset="0"/>
-                          <a:ea typeface="Be Vietnam Pro" pitchFamily="34" charset="-122"/>
-                          <a:cs typeface="Be Vietnam Pro" pitchFamily="34" charset="-120"/>
-                        </a:rPr>
-                        <a:t> mã</a:t>
+                        <a:t>4–5</a:t>
                       </a:r>
                       <a:endParaRPr lang="en-US" sz="1200" dirty="0"/>
                     </a:p>
@@ -9725,7 +9747,7 @@
                         <a:buNone/>
                       </a:pPr>
                       <a:r>
-                        <a:rPr lang="en-US" sz="2400" b="1" dirty="0" spc="-7" kern="0">
+                        <a:rPr lang="en-US" sz="2400" b="1" dirty="0" spc="3" kern="0">
                           <a:solidFill>
                             <a:srgbClr val="E8472B"/>
                           </a:solidFill>
@@ -9733,40 +9755,7 @@
                           <a:ea typeface="Be Vietnam Pro" pitchFamily="34" charset="-122"/>
                           <a:cs typeface="Be Vietnam Pro" pitchFamily="34" charset="-120"/>
                         </a:rPr>
-                        <a:t>Phát</a:t>
-                      </a:r>
-                      <a:r>
-                        <a:rPr lang="en-US" sz="2400" b="1" dirty="0" spc="-1" kern="0">
-                          <a:solidFill>
-                            <a:srgbClr val="E8472B"/>
-                          </a:solidFill>
-                          <a:latin typeface="Be Vietnam Pro" pitchFamily="34" charset="0"/>
-                          <a:ea typeface="Be Vietnam Pro" pitchFamily="34" charset="-122"/>
-                          <a:cs typeface="Be Vietnam Pro" pitchFamily="34" charset="-120"/>
-                        </a:rPr>
-                        <a:t> hành,</a:t>
-                      </a:r>
-                      <a:r>
-                        <a:rPr lang="en-US" sz="2400" b="1" dirty="0" spc="-3" kern="0">
-                          <a:solidFill>
-                            <a:srgbClr val="E8472B"/>
-                          </a:solidFill>
-                          <a:latin typeface="Be Vietnam Pro" pitchFamily="34" charset="0"/>
-                          <a:ea typeface="Be Vietnam Pro" pitchFamily="34" charset="-122"/>
-                          <a:cs typeface="Be Vietnam Pro" pitchFamily="34" charset="-120"/>
-                        </a:rPr>
-                        <a:t> kiểm</a:t>
-                      </a:r>
-                      <a:r>
-                        <a:rPr lang="en-US" sz="2400" b="1" dirty="0" spc="-11" kern="0">
-                          <a:solidFill>
-                            <a:srgbClr val="E8472B"/>
-                          </a:solidFill>
-                          <a:latin typeface="Be Vietnam Pro" pitchFamily="34" charset="0"/>
-                          <a:ea typeface="Be Vietnam Pro" pitchFamily="34" charset="-122"/>
-                          <a:cs typeface="Be Vietnam Pro" pitchFamily="34" charset="-120"/>
-                        </a:rPr>
-                        <a:t> tra</a:t>
+                        <a:t>6–8</a:t>
                       </a:r>
                       <a:endParaRPr lang="en-US" sz="1200" dirty="0"/>
                     </a:p>
@@ -9925,6 +9914,17 @@
               <a:buNone/>
             </a:pPr>
             <a:r>
+              <a:rPr lang="en-US" sz="2100" dirty="0" spc="0" kern="0">
+                <a:solidFill>
+                  <a:srgbClr val="6B6A66"/>
+                </a:solidFill>
+                <a:latin typeface="Be Vietnam Pro" pitchFamily="34" charset="0"/>
+                <a:ea typeface="Be Vietnam Pro" pitchFamily="34" charset="-122"/>
+                <a:cs typeface="Be Vietnam Pro" pitchFamily="34" charset="-120"/>
+              </a:rPr>
+              <a:t>Nguồn</a:t>
+            </a:r>
+            <a:r>
               <a:rPr lang="en-US" sz="2100" dirty="0" spc="-1" kern="0">
                 <a:solidFill>
                   <a:srgbClr val="6B6A66"/>
@@ -9933,7 +9933,62 @@
                 <a:ea typeface="Be Vietnam Pro" pitchFamily="34" charset="-122"/>
                 <a:cs typeface="Be Vietnam Pro" pitchFamily="34" charset="-120"/>
               </a:rPr>
-              <a:t>Cách</a:t>
+              <a:t> chỉ</a:t>
+            </a:r>
+            <a:r>
+              <a:rPr lang="en-US" sz="2100" dirty="0" spc="-4" kern="0">
+                <a:solidFill>
+                  <a:srgbClr val="6B6A66"/>
+                </a:solidFill>
+                <a:latin typeface="Be Vietnam Pro" pitchFamily="34" charset="0"/>
+                <a:ea typeface="Be Vietnam Pro" pitchFamily="34" charset="-122"/>
+                <a:cs typeface="Be Vietnam Pro" pitchFamily="34" charset="-120"/>
+              </a:rPr>
+              <a:t> liệt</a:t>
+            </a:r>
+            <a:r>
+              <a:rPr lang="en-US" sz="2100" dirty="0" spc="-30" kern="0">
+                <a:solidFill>
+                  <a:srgbClr val="6B6A66"/>
+                </a:solidFill>
+                <a:latin typeface="Be Vietnam Pro" pitchFamily="34" charset="0"/>
+                <a:ea typeface="Be Vietnam Pro" pitchFamily="34" charset="-122"/>
+                <a:cs typeface="Be Vietnam Pro" pitchFamily="34" charset="-120"/>
+              </a:rPr>
+              <a:t> kê</a:t>
+            </a:r>
+            <a:r>
+              <a:rPr lang="en-US" sz="2100" dirty="0" spc="-8" kern="0">
+                <a:solidFill>
+                  <a:srgbClr val="6B6A66"/>
+                </a:solidFill>
+                <a:latin typeface="Be Vietnam Pro" pitchFamily="34" charset="0"/>
+                <a:ea typeface="Be Vietnam Pro" pitchFamily="34" charset="-122"/>
+                <a:cs typeface="Be Vietnam Pro" pitchFamily="34" charset="-120"/>
+              </a:rPr>
+              <a:t> tên,</a:t>
+            </a:r>
+            <a:r>
+              <a:rPr lang="en-US" sz="2100" dirty="0" spc="-1" kern="0">
+                <a:solidFill>
+                  <a:srgbClr val="6B6A66"/>
+                </a:solidFill>
+                <a:latin typeface="Be Vietnam Pro" pitchFamily="34" charset="0"/>
+                <a:ea typeface="Be Vietnam Pro" pitchFamily="34" charset="-122"/>
+                <a:cs typeface="Be Vietnam Pro" pitchFamily="34" charset="-120"/>
+              </a:rPr>
+              <a:t> không nói mỗi</a:t>
+            </a:r>
+            <a:r>
+              <a:rPr lang="en-US" sz="2100" dirty="0" spc="-2" kern="0">
+                <a:solidFill>
+                  <a:srgbClr val="6B6A66"/>
+                </a:solidFill>
+                <a:latin typeface="Be Vietnam Pro" pitchFamily="34" charset="0"/>
+                <a:ea typeface="Be Vietnam Pro" pitchFamily="34" charset="-122"/>
+                <a:cs typeface="Be Vietnam Pro" pitchFamily="34" charset="-120"/>
+              </a:rPr>
+              <a:t> công</a:t>
             </a:r>
             <a:r>
               <a:rPr lang="en-US" sz="2100" dirty="0" spc="0" kern="0">
@@ -9944,7 +9999,7 @@
                 <a:ea typeface="Be Vietnam Pro" pitchFamily="34" charset="-122"/>
                 <a:cs typeface="Be Vietnam Pro" pitchFamily="34" charset="-120"/>
               </a:rPr>
-              <a:t> chia</a:t>
+              <a:t> cụ</a:t>
             </a:r>
             <a:r>
               <a:rPr lang="en-US" sz="2100" dirty="0" spc="-2" kern="0">
@@ -9955,10 +10010,10 @@
                 <a:ea typeface="Be Vietnam Pro" pitchFamily="34" charset="-122"/>
                 <a:cs typeface="Be Vietnam Pro" pitchFamily="34" charset="-120"/>
               </a:rPr>
-              <a:t> nhóm</a:t>
-            </a:r>
-            <a:r>
-              <a:rPr lang="en-US" sz="2100" dirty="0" spc="-3" kern="0">
+              <a:t> làm</a:t>
+            </a:r>
+            <a:r>
+              <a:rPr lang="en-US" sz="2100" dirty="0" spc="0" kern="0">
                 <a:solidFill>
                   <a:srgbClr val="6B6A66"/>
                 </a:solidFill>
@@ -9966,51 +10021,7 @@
                 <a:ea typeface="Be Vietnam Pro" pitchFamily="34" charset="-122"/>
                 <a:cs typeface="Be Vietnam Pro" pitchFamily="34" charset="-120"/>
               </a:rPr>
-              <a:t> là</a:t>
-            </a:r>
-            <a:r>
-              <a:rPr lang="en-US" sz="2100" dirty="0" spc="-1" kern="0">
-                <a:solidFill>
-                  <a:srgbClr val="6B6A66"/>
-                </a:solidFill>
-                <a:latin typeface="Be Vietnam Pro" pitchFamily="34" charset="0"/>
-                <a:ea typeface="Be Vietnam Pro" pitchFamily="34" charset="-122"/>
-                <a:cs typeface="Be Vietnam Pro" pitchFamily="34" charset="-120"/>
-              </a:rPr>
-              <a:t> của</a:t>
-            </a:r>
-            <a:r>
-              <a:rPr lang="en-US" sz="2100" dirty="0" spc="5" kern="0">
-                <a:solidFill>
-                  <a:srgbClr val="6B6A66"/>
-                </a:solidFill>
-                <a:latin typeface="Be Vietnam Pro" pitchFamily="34" charset="0"/>
-                <a:ea typeface="Be Vietnam Pro" pitchFamily="34" charset="-122"/>
-                <a:cs typeface="Be Vietnam Pro" pitchFamily="34" charset="-120"/>
-              </a:rPr>
-              <a:t> người</a:t>
-            </a:r>
-            <a:r>
-              <a:rPr lang="en-US" sz="2100" dirty="0" spc="0" kern="0">
-                <a:solidFill>
-                  <a:srgbClr val="6B6A66"/>
-                </a:solidFill>
-                <a:latin typeface="Be Vietnam Pro" pitchFamily="34" charset="0"/>
-                <a:ea typeface="Be Vietnam Pro" pitchFamily="34" charset="-122"/>
-                <a:cs typeface="Be Vietnam Pro" pitchFamily="34" charset="-120"/>
-              </a:rPr>
-              <a:t> biên</a:t>
-            </a:r>
-            <a:r>
-              <a:rPr lang="en-US" sz="2100" dirty="0" spc="-6" kern="0">
-                <a:solidFill>
-                  <a:srgbClr val="6B6A66"/>
-                </a:solidFill>
-                <a:latin typeface="Be Vietnam Pro" pitchFamily="34" charset="0"/>
-                <a:ea typeface="Be Vietnam Pro" pitchFamily="34" charset="-122"/>
-                <a:cs typeface="Be Vietnam Pro" pitchFamily="34" charset="-120"/>
-              </a:rPr>
-              <a:t> soạn.</a:t>
+              <a:t> gì.</a:t>
             </a:r>
             <a:endParaRPr lang="en-US" sz="2100" dirty="0"/>
           </a:p>
@@ -11379,7 +11390,7 @@
               <a:buNone/>
             </a:pPr>
             <a:r>
-              <a:rPr lang="en-US" sz="6900" dirty="0" spc="-1" kern="0">
+              <a:rPr lang="en-US" sz="6900" dirty="0" spc="-4" kern="0">
                 <a:solidFill>
                   <a:srgbClr val="14161C"/>
                 </a:solidFill>
@@ -11387,10 +11398,10 @@
                 <a:ea typeface="Bricolage Grotesque ExtraBold" pitchFamily="34" charset="-122"/>
                 <a:cs typeface="Bricolage Grotesque ExtraBold" pitchFamily="34" charset="-120"/>
               </a:rPr>
-              <a:t>Mảng</a:t>
-            </a:r>
-            <a:r>
-              <a:rPr lang="en-US" sz="6900" dirty="0" spc="2" kern="0">
+              <a:t>Bấm</a:t>
+            </a:r>
+            <a:r>
+              <a:rPr lang="en-US" sz="6900" dirty="0" spc="-79" kern="0">
                 <a:solidFill>
                   <a:srgbClr val="14161C"/>
                 </a:solidFill>
@@ -11398,10 +11409,10 @@
                 <a:ea typeface="Bricolage Grotesque ExtraBold" pitchFamily="34" charset="-122"/>
                 <a:cs typeface="Bricolage Grotesque ExtraBold" pitchFamily="34" charset="-120"/>
               </a:rPr>
-              <a:t> nào</a:t>
-            </a:r>
-            <a:r>
-              <a:rPr lang="en-US" sz="6900" dirty="0" spc="-12" kern="0">
+              <a:t> xem</a:t>
+            </a:r>
+            <a:r>
+              <a:rPr lang="en-US" sz="6900" dirty="0" spc="2" kern="0">
                 <a:solidFill>
                   <a:srgbClr val="14161C"/>
                 </a:solidFill>
@@ -11409,10 +11420,10 @@
                 <a:ea typeface="Bricolage Grotesque ExtraBold" pitchFamily="34" charset="-122"/>
                 <a:cs typeface="Bricolage Grotesque ExtraBold" pitchFamily="34" charset="-120"/>
               </a:rPr>
-              <a:t> gần</a:t>
-            </a:r>
-            <a:r>
-              <a:rPr lang="en-US" sz="6900" dirty="0" spc="1" kern="0">
+              <a:t> phim: nguồn nói</a:t>
+            </a:r>
+            <a:r>
+              <a:rPr lang="en-US" sz="6900" dirty="0" spc="-22" kern="0">
                 <a:solidFill>
                   <a:srgbClr val="14161C"/>
                 </a:solidFill>
@@ -11420,29 +11431,7 @@
                 <a:ea typeface="Bricolage Grotesque ExtraBold" pitchFamily="34" charset="-122"/>
                 <a:cs typeface="Bricolage Grotesque ExtraBold" pitchFamily="34" charset="-120"/>
               </a:rPr>
-              <a:t> lần</a:t>
-            </a:r>
-            <a:r>
-              <a:rPr lang="en-US" sz="6900" dirty="0" spc="-5" kern="0">
-                <a:solidFill>
-                  <a:srgbClr val="14161C"/>
-                </a:solidFill>
-                <a:latin typeface="Bricolage Grotesque ExtraBold" pitchFamily="34" charset="0"/>
-                <a:ea typeface="Bricolage Grotesque ExtraBold" pitchFamily="34" charset="-122"/>
-                <a:cs typeface="Bricolage Grotesque ExtraBold" pitchFamily="34" charset="-120"/>
-              </a:rPr>
-              <a:t> bấm</a:t>
-            </a:r>
-            <a:r>
-              <a:rPr lang="en-US" sz="6900" dirty="0" spc="-86" kern="0">
-                <a:solidFill>
-                  <a:srgbClr val="14161C"/>
-                </a:solidFill>
-                <a:latin typeface="Bricolage Grotesque ExtraBold" pitchFamily="34" charset="0"/>
-                <a:ea typeface="Bricolage Grotesque ExtraBold" pitchFamily="34" charset="-122"/>
-                <a:cs typeface="Bricolage Grotesque ExtraBold" pitchFamily="34" charset="-120"/>
-              </a:rPr>
-              <a:t> xem?</a:t>
+              <a:t> gì?</a:t>
             </a:r>
             <a:endParaRPr lang="en-US" sz="6900" dirty="0"/>
           </a:p>
@@ -11495,6 +11484,17 @@
               <a:buNone/>
             </a:pPr>
             <a:r>
+              <a:rPr lang="en-US" sz="1950" b="1" spc="218" kern="0" dirty="0">
+                <a:solidFill>
+                  <a:srgbClr val="F3DFB8"/>
+                </a:solidFill>
+                <a:latin typeface="Be Vietnam Pro" pitchFamily="34" charset="0"/>
+                <a:ea typeface="Be Vietnam Pro" pitchFamily="34" charset="-122"/>
+                <a:cs typeface="Be Vietnam Pro" pitchFamily="34" charset="-120"/>
+              </a:rPr>
+              <a:t>BÀI</a:t>
+            </a:r>
+            <a:r>
               <a:rPr lang="en-US" sz="1950" b="1" spc="225" kern="0" dirty="0">
                 <a:solidFill>
                   <a:srgbClr val="F3DFB8"/>
@@ -11503,29 +11503,7 @@
                 <a:ea typeface="Be Vietnam Pro" pitchFamily="34" charset="-122"/>
                 <a:cs typeface="Be Vietnam Pro" pitchFamily="34" charset="-120"/>
               </a:rPr>
-              <a:t>LẦN</a:t>
-            </a:r>
-            <a:r>
-              <a:rPr lang="en-US" sz="1950" b="1" spc="218" kern="0" dirty="0">
-                <a:solidFill>
-                  <a:srgbClr val="F3DFB8"/>
-                </a:solidFill>
-                <a:latin typeface="Be Vietnam Pro" pitchFamily="34" charset="0"/>
-                <a:ea typeface="Be Vietnam Pro" pitchFamily="34" charset="-122"/>
-                <a:cs typeface="Be Vietnam Pro" pitchFamily="34" charset="-120"/>
-              </a:rPr>
-              <a:t> BẤM</a:t>
-            </a:r>
-            <a:r>
-              <a:rPr lang="en-US" sz="1950" b="1" spc="223" kern="0" dirty="0">
-                <a:solidFill>
-                  <a:srgbClr val="F3DFB8"/>
-                </a:solidFill>
-                <a:latin typeface="Be Vietnam Pro" pitchFamily="34" charset="0"/>
-                <a:ea typeface="Be Vietnam Pro" pitchFamily="34" charset="-122"/>
-                <a:cs typeface="Be Vietnam Pro" pitchFamily="34" charset="-120"/>
-              </a:rPr>
-              <a:t> XEM</a:t>
+              <a:t> NGUỒN</a:t>
             </a:r>
             <a:endParaRPr lang="en-US" sz="1950" dirty="0"/>
           </a:p>
@@ -11559,7 +11537,7 @@
               <a:buNone/>
             </a:pPr>
             <a:r>
-              <a:rPr lang="en-US" sz="3450" dirty="0" spc="-1" kern="0">
+              <a:rPr lang="en-US" sz="3450" dirty="0" spc="2" kern="0">
                 <a:solidFill>
                   <a:srgbClr val="F3EEE3"/>
                 </a:solidFill>
@@ -11567,10 +11545,10 @@
                 <a:ea typeface="Bricolage Grotesque ExtraBold" pitchFamily="34" charset="-122"/>
                 <a:cs typeface="Bricolage Grotesque ExtraBold" pitchFamily="34" charset="-120"/>
               </a:rPr>
-              <a:t>Các</a:t>
-            </a:r>
-            <a:r>
-              <a:rPr lang="en-US" sz="3450" dirty="0" spc="0" kern="0">
+              <a:t>Chỉ</a:t>
+            </a:r>
+            <a:r>
+              <a:rPr lang="en-US" sz="3450" dirty="0" spc="1" kern="0">
                 <a:solidFill>
                   <a:srgbClr val="F3EEE3"/>
                 </a:solidFill>
@@ -11578,10 +11556,10 @@
                 <a:ea typeface="Bricolage Grotesque ExtraBold" pitchFamily="34" charset="-122"/>
                 <a:cs typeface="Bricolage Grotesque ExtraBold" pitchFamily="34" charset="-120"/>
               </a:rPr>
-              <a:t> mảng</a:t>
-            </a:r>
-            <a:r>
-              <a:rPr lang="en-US" sz="3450" dirty="0" spc="3" kern="0">
+              <a:t> có</a:t>
+            </a:r>
+            <a:r>
+              <a:rPr lang="en-US" sz="3450" dirty="0" spc="-11" kern="0">
                 <a:solidFill>
                   <a:srgbClr val="F3EEE3"/>
                 </a:solidFill>
@@ -11589,10 +11567,10 @@
                 <a:ea typeface="Bricolage Grotesque ExtraBold" pitchFamily="34" charset="-122"/>
                 <a:cs typeface="Bricolage Grotesque ExtraBold" pitchFamily="34" charset="-120"/>
               </a:rPr>
-              <a:t> nằm</a:t>
-            </a:r>
-            <a:r>
-              <a:rPr lang="en-US" sz="3450" dirty="0" spc="-8" kern="0">
+              <a:t> tên</a:t>
+            </a:r>
+            <a:r>
+              <a:rPr lang="en-US" sz="3450" dirty="0" spc="1" kern="0">
                 <a:solidFill>
                   <a:srgbClr val="F3EEE3"/>
                 </a:solidFill>
@@ -11600,7 +11578,7 @@
                 <a:ea typeface="Bricolage Grotesque ExtraBold" pitchFamily="34" charset="-122"/>
                 <a:cs typeface="Bricolage Grotesque ExtraBold" pitchFamily="34" charset="-120"/>
               </a:rPr>
-              <a:t> gần</a:t>
+              <a:t> theo mảng</a:t>
             </a:r>
             <a:endParaRPr lang="en-US" sz="3450" dirty="0"/>
           </a:p>
@@ -12189,7 +12167,84 @@
                 <a:ea typeface="Be Vietnam Pro" pitchFamily="34" charset="-122"/>
                 <a:cs typeface="Be Vietnam Pro" pitchFamily="34" charset="-120"/>
               </a:rPr>
-              <a:t> không nói</a:t>
+              <a:t> không nói mảng nào</a:t>
+            </a:r>
+            <a:r>
+              <a:rPr lang="en-US" sz="2100" dirty="0" spc="-2" kern="0">
+                <a:solidFill>
+                  <a:srgbClr val="6B6A66"/>
+                </a:solidFill>
+                <a:latin typeface="Be Vietnam Pro" pitchFamily="34" charset="0"/>
+                <a:ea typeface="Be Vietnam Pro" pitchFamily="34" charset="-122"/>
+                <a:cs typeface="Be Vietnam Pro" pitchFamily="34" charset="-120"/>
+              </a:rPr>
+              <a:t> phục</a:t>
+            </a:r>
+            <a:r>
+              <a:rPr lang="en-US" sz="2100" dirty="0" spc="-1" kern="0">
+                <a:solidFill>
+                  <a:srgbClr val="6B6A66"/>
+                </a:solidFill>
+                <a:latin typeface="Be Vietnam Pro" pitchFamily="34" charset="0"/>
+                <a:ea typeface="Be Vietnam Pro" pitchFamily="34" charset="-122"/>
+                <a:cs typeface="Be Vietnam Pro" pitchFamily="34" charset="-120"/>
+              </a:rPr>
+              <a:t> vụ</a:t>
+            </a:r>
+            <a:r>
+              <a:rPr lang="en-US" sz="2100" dirty="0" spc="-8" kern="0">
+                <a:solidFill>
+                  <a:srgbClr val="6B6A66"/>
+                </a:solidFill>
+                <a:latin typeface="Be Vietnam Pro" pitchFamily="34" charset="0"/>
+                <a:ea typeface="Be Vietnam Pro" pitchFamily="34" charset="-122"/>
+                <a:cs typeface="Be Vietnam Pro" pitchFamily="34" charset="-120"/>
+              </a:rPr>
+              <a:t> một</a:t>
+            </a:r>
+            <a:r>
+              <a:rPr lang="en-US" sz="2100" dirty="0" spc="-1" kern="0">
+                <a:solidFill>
+                  <a:srgbClr val="6B6A66"/>
+                </a:solidFill>
+                <a:latin typeface="Be Vietnam Pro" pitchFamily="34" charset="0"/>
+                <a:ea typeface="Be Vietnam Pro" pitchFamily="34" charset="-122"/>
+                <a:cs typeface="Be Vietnam Pro" pitchFamily="34" charset="-120"/>
+              </a:rPr>
+              <a:t> lần</a:t>
+            </a:r>
+            <a:r>
+              <a:rPr lang="en-US" sz="2100" dirty="0" spc="-15" kern="0">
+                <a:solidFill>
+                  <a:srgbClr val="6B6A66"/>
+                </a:solidFill>
+                <a:latin typeface="Be Vietnam Pro" pitchFamily="34" charset="0"/>
+                <a:ea typeface="Be Vietnam Pro" pitchFamily="34" charset="-122"/>
+                <a:cs typeface="Be Vietnam Pro" pitchFamily="34" charset="-120"/>
+              </a:rPr>
+              <a:t> xem,</a:t>
+            </a:r>
+            <a:r>
+              <a:rPr lang="en-US" sz="2100" dirty="0" spc="-10" kern="0">
+                <a:solidFill>
+                  <a:srgbClr val="6B6A66"/>
+                </a:solidFill>
+                <a:latin typeface="Be Vietnam Pro" pitchFamily="34" charset="0"/>
+                <a:ea typeface="Be Vietnam Pro" pitchFamily="34" charset="-122"/>
+                <a:cs typeface="Be Vietnam Pro" pitchFamily="34" charset="-120"/>
+              </a:rPr>
+              <a:t> hay</a:t>
+            </a:r>
+            <a:r>
+              <a:rPr lang="en-US" sz="2100" dirty="0" spc="-5" kern="0">
+                <a:solidFill>
+                  <a:srgbClr val="6B6A66"/>
+                </a:solidFill>
+                <a:latin typeface="Be Vietnam Pro" pitchFamily="34" charset="0"/>
+                <a:ea typeface="Be Vietnam Pro" pitchFamily="34" charset="-122"/>
+                <a:cs typeface="Be Vietnam Pro" pitchFamily="34" charset="-120"/>
+              </a:rPr>
+              <a:t> theo</a:t>
             </a:r>
             <a:r>
               <a:rPr lang="en-US" sz="2100" dirty="0" spc="0" kern="0">
@@ -12211,172 +12266,7 @@
                 <a:ea typeface="Be Vietnam Pro" pitchFamily="34" charset="-122"/>
                 <a:cs typeface="Be Vietnam Pro" pitchFamily="34" charset="-120"/>
               </a:rPr>
-              <a:t> tự</a:t>
-            </a:r>
-            <a:r>
-              <a:rPr lang="en-US" sz="2100" dirty="0" spc="-18" kern="0">
-                <a:solidFill>
-                  <a:srgbClr val="6B6A66"/>
-                </a:solidFill>
-                <a:latin typeface="Be Vietnam Pro" pitchFamily="34" charset="0"/>
-                <a:ea typeface="Be Vietnam Pro" pitchFamily="34" charset="-122"/>
-                <a:cs typeface="Be Vietnam Pro" pitchFamily="34" charset="-120"/>
-              </a:rPr>
-              <a:t> yêu</a:t>
-            </a:r>
-            <a:r>
-              <a:rPr lang="en-US" sz="2100" dirty="0" spc="-2" kern="0">
-                <a:solidFill>
-                  <a:srgbClr val="6B6A66"/>
-                </a:solidFill>
-                <a:latin typeface="Be Vietnam Pro" pitchFamily="34" charset="0"/>
-                <a:ea typeface="Be Vietnam Pro" pitchFamily="34" charset="-122"/>
-                <a:cs typeface="Be Vietnam Pro" pitchFamily="34" charset="-120"/>
-              </a:rPr>
-              <a:t> cầu</a:t>
-            </a:r>
-            <a:r>
-              <a:rPr lang="en-US" sz="2100" dirty="0" spc="28" kern="0">
-                <a:solidFill>
-                  <a:srgbClr val="6B6A66"/>
-                </a:solidFill>
-                <a:latin typeface="Be Vietnam Pro" pitchFamily="34" charset="0"/>
-                <a:ea typeface="Be Vietnam Pro" pitchFamily="34" charset="-122"/>
-                <a:cs typeface="Be Vietnam Pro" pitchFamily="34" charset="-120"/>
-              </a:rPr>
-              <a:t> đi</a:t>
-            </a:r>
-            <a:r>
-              <a:rPr lang="en-US" sz="2100" dirty="0" spc="-2" kern="0">
-                <a:solidFill>
-                  <a:srgbClr val="6B6A66"/>
-                </a:solidFill>
-                <a:latin typeface="Be Vietnam Pro" pitchFamily="34" charset="0"/>
-                <a:ea typeface="Be Vietnam Pro" pitchFamily="34" charset="-122"/>
-                <a:cs typeface="Be Vietnam Pro" pitchFamily="34" charset="-120"/>
-              </a:rPr>
-              <a:t> qua.</a:t>
-            </a:r>
-            <a:r>
-              <a:rPr lang="en-US" sz="2100" dirty="0" spc="-1" kern="0">
-                <a:solidFill>
-                  <a:srgbClr val="6B6A66"/>
-                </a:solidFill>
-                <a:latin typeface="Be Vietnam Pro" pitchFamily="34" charset="0"/>
-                <a:ea typeface="Be Vietnam Pro" pitchFamily="34" charset="-122"/>
-                <a:cs typeface="Be Vietnam Pro" pitchFamily="34" charset="-120"/>
-              </a:rPr>
-              <a:t> Không</a:t>
-            </a:r>
-            <a:r>
-              <a:rPr lang="en-US" sz="2100" dirty="0" spc="-24" kern="0">
-                <a:solidFill>
-                  <a:srgbClr val="6B6A66"/>
-                </a:solidFill>
-                <a:latin typeface="Be Vietnam Pro" pitchFamily="34" charset="0"/>
-                <a:ea typeface="Be Vietnam Pro" pitchFamily="34" charset="-122"/>
-                <a:cs typeface="Be Vietnam Pro" pitchFamily="34" charset="-120"/>
-              </a:rPr>
-              <a:t> trả</a:t>
-            </a:r>
-            <a:r>
-              <a:rPr lang="en-US" sz="2100" dirty="0" spc="-2" kern="0">
-                <a:solidFill>
-                  <a:srgbClr val="6B6A66"/>
-                </a:solidFill>
-                <a:latin typeface="Be Vietnam Pro" pitchFamily="34" charset="0"/>
-                <a:ea typeface="Be Vietnam Pro" pitchFamily="34" charset="-122"/>
-                <a:cs typeface="Be Vietnam Pro" pitchFamily="34" charset="-120"/>
-              </a:rPr>
-              <a:t> lời</a:t>
-            </a:r>
-            <a:r>
-              <a:rPr lang="en-US" sz="2100" dirty="0" spc="-12" kern="0">
-                <a:solidFill>
-                  <a:srgbClr val="6B6A66"/>
-                </a:solidFill>
-                <a:latin typeface="Be Vietnam Pro" pitchFamily="34" charset="0"/>
-                <a:ea typeface="Be Vietnam Pro" pitchFamily="34" charset="-122"/>
-                <a:cs typeface="Be Vietnam Pro" pitchFamily="34" charset="-120"/>
-              </a:rPr>
-              <a:t> ngay:</a:t>
-            </a:r>
-            <a:r>
-              <a:rPr lang="en-US" sz="2100" dirty="0" spc="-11" kern="0">
-                <a:solidFill>
-                  <a:srgbClr val="6B6A66"/>
-                </a:solidFill>
-                <a:latin typeface="Be Vietnam Pro" pitchFamily="34" charset="0"/>
-                <a:ea typeface="Be Vietnam Pro" pitchFamily="34" charset="-122"/>
-                <a:cs typeface="Be Vietnam Pro" pitchFamily="34" charset="-120"/>
-              </a:rPr>
-              <a:t> truyền</a:t>
-            </a:r>
-            <a:r>
-              <a:rPr lang="en-US" sz="2100" dirty="0" spc="0" kern="0">
-                <a:solidFill>
-                  <a:srgbClr val="6B6A66"/>
-                </a:solidFill>
-                <a:latin typeface="Be Vietnam Pro" pitchFamily="34" charset="0"/>
-                <a:ea typeface="Be Vietnam Pro" pitchFamily="34" charset="-122"/>
-                <a:cs typeface="Be Vietnam Pro" pitchFamily="34" charset="-120"/>
-              </a:rPr>
-              <a:t> tin, xử</a:t>
-            </a:r>
-            <a:r>
-              <a:rPr lang="en-US" sz="2100" dirty="0" spc="-3" kern="0">
-                <a:solidFill>
-                  <a:srgbClr val="6B6A66"/>
-                </a:solidFill>
-                <a:latin typeface="Be Vietnam Pro" pitchFamily="34" charset="0"/>
-                <a:ea typeface="Be Vietnam Pro" pitchFamily="34" charset="-122"/>
-                <a:cs typeface="Be Vietnam Pro" pitchFamily="34" charset="-120"/>
-              </a:rPr>
-              <a:t> lý</a:t>
-            </a:r>
-            <a:r>
-              <a:rPr lang="en-US" sz="2100" dirty="0" spc="-2" kern="0">
-                <a:solidFill>
-                  <a:srgbClr val="6B6A66"/>
-                </a:solidFill>
-                <a:latin typeface="Be Vietnam Pro" pitchFamily="34" charset="0"/>
-                <a:ea typeface="Be Vietnam Pro" pitchFamily="34" charset="-122"/>
-                <a:cs typeface="Be Vietnam Pro" pitchFamily="34" charset="-120"/>
-              </a:rPr>
-              <a:t> dữ</a:t>
-            </a:r>
-            <a:r>
-              <a:rPr lang="en-US" sz="2100" dirty="0" spc="0" kern="0">
-                <a:solidFill>
-                  <a:srgbClr val="6B6A66"/>
-                </a:solidFill>
-                <a:latin typeface="Be Vietnam Pro" pitchFamily="34" charset="0"/>
-                <a:ea typeface="Be Vietnam Pro" pitchFamily="34" charset="-122"/>
-                <a:cs typeface="Be Vietnam Pro" pitchFamily="34" charset="-120"/>
-              </a:rPr>
-              <a:t> liệu,</a:t>
-            </a:r>
-            <a:r>
-              <a:rPr lang="en-US" sz="2100" dirty="0" spc="-11" kern="0">
-                <a:solidFill>
-                  <a:srgbClr val="6B6A66"/>
-                </a:solidFill>
-                <a:latin typeface="Be Vietnam Pro" pitchFamily="34" charset="0"/>
-                <a:ea typeface="Be Vietnam Pro" pitchFamily="34" charset="-122"/>
-                <a:cs typeface="Be Vietnam Pro" pitchFamily="34" charset="-120"/>
-              </a:rPr>
-              <a:t> phát</a:t>
-            </a:r>
-            <a:r>
-              <a:rPr lang="en-US" sz="2100" dirty="0" spc="-1" kern="0">
-                <a:solidFill>
-                  <a:srgbClr val="6B6A66"/>
-                </a:solidFill>
-                <a:latin typeface="Be Vietnam Pro" pitchFamily="34" charset="0"/>
-                <a:ea typeface="Be Vietnam Pro" pitchFamily="34" charset="-122"/>
-                <a:cs typeface="Be Vietnam Pro" pitchFamily="34" charset="-120"/>
-              </a:rPr>
-              <a:t> hành.</a:t>
+              <a:t> tự nào.</a:t>
             </a:r>
             <a:endParaRPr lang="en-US" sz="2100" dirty="0"/>
           </a:p>

--- a/system-design-101/vi/lessons/sd-02-032/slides/sd-02-032.pptx
+++ b/system-design-101/vi/lessons/sd-02-032/slides/sd-02-032.pptx
@@ -9802,7 +9802,7 @@
                         <a:buNone/>
                       </a:pPr>
                       <a:r>
-                        <a:rPr lang="en-US" sz="2400" dirty="0" spc="-11" kern="0">
+                        <a:rPr lang="en-US" sz="2400" dirty="0" spc="-1" kern="0">
                           <a:solidFill>
                             <a:srgbClr val="14161C"/>
                           </a:solidFill>
@@ -9810,18 +9810,7 @@
                           <a:ea typeface="Be Vietnam Pro" pitchFamily="34" charset="-122"/>
                           <a:cs typeface="Be Vietnam Pro" pitchFamily="34" charset="-120"/>
                         </a:rPr>
-                        <a:t>Spinnaker,</a:t>
-                      </a:r>
-                      <a:r>
-                        <a:rPr lang="en-US" sz="2400" dirty="0" spc="0" kern="0">
-                          <a:solidFill>
-                            <a:srgbClr val="14161C"/>
-                          </a:solidFill>
-                          <a:latin typeface="Be Vietnam Pro" pitchFamily="34" charset="0"/>
-                          <a:ea typeface="Be Vietnam Pro" pitchFamily="34" charset="-122"/>
-                          <a:cs typeface="Be Vietnam Pro" pitchFamily="34" charset="-120"/>
-                        </a:rPr>
-                        <a:t> Chaos</a:t>
+                        <a:t>Chaos</a:t>
                       </a:r>
                       <a:r>
                         <a:rPr lang="en-US" sz="2400" dirty="0" spc="-24" kern="0">
@@ -9835,7 +9824,18 @@
                         <a:t> Monkey,</a:t>
                       </a:r>
                       <a:r>
-                        <a:rPr lang="en-US" sz="2400" dirty="0" spc="-3" kern="0">
+                        <a:rPr lang="en-US" sz="2400" dirty="0" spc="-9" kern="0">
+                          <a:solidFill>
+                            <a:srgbClr val="14161C"/>
+                          </a:solidFill>
+                          <a:latin typeface="Be Vietnam Pro" pitchFamily="34" charset="0"/>
+                          <a:ea typeface="Be Vietnam Pro" pitchFamily="34" charset="-122"/>
+                          <a:cs typeface="Be Vietnam Pro" pitchFamily="34" charset="-120"/>
+                        </a:rPr>
+                        <a:t> Spinnaker,</a:t>
+                      </a:r>
+                      <a:r>
+                        <a:rPr lang="en-US" sz="2400" dirty="0" spc="-4" kern="0">
                           <a:solidFill>
                             <a:srgbClr val="14161C"/>
                           </a:solidFill>

--- a/system-design-101/vi/lessons/sd-02-032/slides/sd-02-032.pptx
+++ b/system-design-101/vi/lessons/sd-02-032/slides/sd-02-032.pptx
@@ -1884,7 +1884,7 @@
               <a:buNone/>
             </a:pPr>
             <a:r>
-              <a:rPr lang="en-US" sz="3000" dirty="0" spc="-90" kern="0">
+              <a:rPr lang="en-US" sz="3000" dirty="0" spc="2" kern="0">
                 <a:solidFill>
                   <a:srgbClr val="E4E1D8"/>
                 </a:solidFill>
@@ -1892,7 +1892,7 @@
                 <a:ea typeface="Be Vietnam Pro" pitchFamily="34" charset="-122"/>
                 <a:cs typeface="Be Vietnam Pro" pitchFamily="34" charset="-120"/>
               </a:rPr>
-              <a:t>Tám</a:t>
+              <a:t>Hỏng</a:t>
             </a:r>
             <a:r>
               <a:rPr lang="en-US" sz="3000" dirty="0" spc="0" kern="0">
@@ -1903,10 +1903,10 @@
                 <a:ea typeface="Be Vietnam Pro" pitchFamily="34" charset="-122"/>
                 <a:cs typeface="Be Vietnam Pro" pitchFamily="34" charset="-120"/>
               </a:rPr>
-              <a:t> mảng</a:t>
-            </a:r>
-            <a:r>
-              <a:rPr lang="en-US" sz="3000" dirty="0" spc="-11" kern="0">
+              <a:t> thì</a:t>
+            </a:r>
+            <a:r>
+              <a:rPr lang="en-US" sz="3000" dirty="0" spc="10" kern="0">
                 <a:solidFill>
                   <a:srgbClr val="E4E1D8"/>
                 </a:solidFill>
@@ -1914,10 +1914,10 @@
                 <a:ea typeface="Be Vietnam Pro" pitchFamily="34" charset="-122"/>
                 <a:cs typeface="Be Vietnam Pro" pitchFamily="34" charset="-120"/>
               </a:rPr>
-              <a:t> gồm</a:t>
-            </a:r>
-            <a:r>
-              <a:rPr lang="en-US" sz="3000" dirty="0" spc="19" kern="0">
+              <a:t> người</a:t>
+            </a:r>
+            <a:r>
+              <a:rPr lang="en-US" sz="3000" dirty="0" spc="-22" kern="0">
                 <a:solidFill>
                   <a:srgbClr val="E4E1D8"/>
                 </a:solidFill>
@@ -1925,10 +1925,10 @@
                 <a:ea typeface="Be Vietnam Pro" pitchFamily="34" charset="-122"/>
                 <a:cs typeface="Be Vietnam Pro" pitchFamily="34" charset="-120"/>
               </a:rPr>
-              <a:t> những</a:t>
-            </a:r>
-            <a:r>
-              <a:rPr lang="en-US" sz="3000" dirty="0" spc="1" kern="0">
+              <a:t> xem</a:t>
+            </a:r>
+            <a:r>
+              <a:rPr lang="en-US" sz="3000" dirty="0" spc="-10" kern="0">
                 <a:solidFill>
                   <a:srgbClr val="E4E1D8"/>
                 </a:solidFill>
@@ -1936,7 +1936,18 @@
                 <a:ea typeface="Be Vietnam Pro" pitchFamily="34" charset="-122"/>
                 <a:cs typeface="Be Vietnam Pro" pitchFamily="34" charset="-120"/>
               </a:rPr>
-              <a:t> công cụ</a:t>
+              <a:t> thấy</a:t>
+            </a:r>
+            <a:r>
+              <a:rPr lang="en-US" sz="3000" dirty="0" spc="2" kern="0">
+                <a:solidFill>
+                  <a:srgbClr val="E4E1D8"/>
+                </a:solidFill>
+                <a:latin typeface="Be Vietnam Pro" pitchFamily="34" charset="0"/>
+                <a:ea typeface="Be Vietnam Pro" pitchFamily="34" charset="-122"/>
+                <a:cs typeface="Be Vietnam Pro" pitchFamily="34" charset="-120"/>
+              </a:rPr>
+              <a:t> khi</a:t>
             </a:r>
             <a:r>
               <a:rPr lang="en-US" sz="3000" dirty="0" spc="-2" kern="0">
@@ -2022,10 +2033,10 @@
                 <a:ea typeface="Be Vietnam Pro" pitchFamily="34" charset="-122"/>
                 <a:cs typeface="Be Vietnam Pro" pitchFamily="34" charset="-120"/>
               </a:rPr>
-              <a:t> mảng, từ</a:t>
-            </a:r>
-            <a:r>
-              <a:rPr lang="en-US" sz="2100" dirty="0" spc="22" kern="0">
+              <a:t> mảng của</a:t>
+            </a:r>
+            <a:r>
+              <a:rPr lang="en-US" sz="2100" dirty="0" spc="0" kern="0">
                 <a:solidFill>
                   <a:srgbClr val="9AA0B5"/>
                 </a:solidFill>
@@ -2033,7 +2044,29 @@
                 <a:ea typeface="Be Vietnam Pro" pitchFamily="34" charset="-122"/>
                 <a:cs typeface="Be Vietnam Pro" pitchFamily="34" charset="-120"/>
               </a:rPr>
-              <a:t> ứng</a:t>
+              <a:t> nguồn,</a:t>
+            </a:r>
+            <a:r>
+              <a:rPr lang="en-US" sz="2100" dirty="0" spc="-9" kern="0">
+                <a:solidFill>
+                  <a:srgbClr val="9AA0B5"/>
+                </a:solidFill>
+                <a:latin typeface="Be Vietnam Pro" pitchFamily="34" charset="0"/>
+                <a:ea typeface="Be Vietnam Pro" pitchFamily="34" charset="-122"/>
+                <a:cs typeface="Be Vietnam Pro" pitchFamily="34" charset="-120"/>
+              </a:rPr>
+              <a:t> một</a:t>
+            </a:r>
+            <a:r>
+              <a:rPr lang="en-US" sz="2100" dirty="0" spc="-2" kern="0">
+                <a:solidFill>
+                  <a:srgbClr val="9AA0B5"/>
+                </a:solidFill>
+                <a:latin typeface="Be Vietnam Pro" pitchFamily="34" charset="0"/>
+                <a:ea typeface="Be Vietnam Pro" pitchFamily="34" charset="-122"/>
+                <a:cs typeface="Be Vietnam Pro" pitchFamily="34" charset="-120"/>
+              </a:rPr>
+              <a:t> phép</a:t>
             </a:r>
             <a:r>
               <a:rPr lang="en-US" sz="2100" dirty="0" spc="-1" kern="0">
@@ -2044,10 +2077,10 @@
                 <a:ea typeface="Be Vietnam Pro" pitchFamily="34" charset="-122"/>
                 <a:cs typeface="Be Vietnam Pro" pitchFamily="34" charset="-120"/>
               </a:rPr>
-              <a:t> dụng</a:t>
-            </a:r>
-            <a:r>
-              <a:rPr lang="en-US" sz="2100" dirty="0" spc="-12" kern="0">
+              <a:t> thử của</a:t>
+            </a:r>
+            <a:r>
+              <a:rPr lang="en-US" sz="2100" dirty="0" spc="-5" kern="0">
                 <a:solidFill>
                   <a:srgbClr val="9AA0B5"/>
                 </a:solidFill>
@@ -2055,10 +2088,10 @@
                 <a:ea typeface="Be Vietnam Pro" pitchFamily="34" charset="-122"/>
                 <a:cs typeface="Be Vietnam Pro" pitchFamily="34" charset="-120"/>
               </a:rPr>
-              <a:t> tới phát</a:t>
-            </a:r>
-            <a:r>
-              <a:rPr lang="en-US" sz="2100" dirty="0" spc="-1" kern="0">
+              <a:t> bài</a:t>
+            </a:r>
+            <a:r>
+              <a:rPr lang="en-US" sz="2100" dirty="0" spc="-7" kern="0">
                 <a:solidFill>
                   <a:srgbClr val="9AA0B5"/>
                 </a:solidFill>
@@ -2066,7 +2099,7 @@
                 <a:ea typeface="Be Vietnam Pro" pitchFamily="34" charset="-122"/>
                 <a:cs typeface="Be Vietnam Pro" pitchFamily="34" charset="-120"/>
               </a:rPr>
-              <a:t> hành.</a:t>
+              <a:t> này.</a:t>
             </a:r>
             <a:endParaRPr lang="en-US" sz="2100" dirty="0"/>
           </a:p>
@@ -11390,7 +11423,7 @@
               <a:buNone/>
             </a:pPr>
             <a:r>
-              <a:rPr lang="en-US" sz="6900" dirty="0" spc="-4" kern="0">
+              <a:rPr lang="en-US" sz="6900" dirty="0" spc="-32" kern="0">
                 <a:solidFill>
                   <a:srgbClr val="14161C"/>
                 </a:solidFill>
@@ -11398,10 +11431,10 @@
                 <a:ea typeface="Bricolage Grotesque ExtraBold" pitchFamily="34" charset="-122"/>
                 <a:cs typeface="Bricolage Grotesque ExtraBold" pitchFamily="34" charset="-120"/>
               </a:rPr>
-              <a:t>Bấm</a:t>
-            </a:r>
-            <a:r>
-              <a:rPr lang="en-US" sz="6900" dirty="0" spc="-79" kern="0">
+              <a:t>EVCache</a:t>
+            </a:r>
+            <a:r>
+              <a:rPr lang="en-US" sz="6900" dirty="0" spc="7" kern="0">
                 <a:solidFill>
                   <a:srgbClr val="14161C"/>
                 </a:solidFill>
@@ -11409,10 +11442,10 @@
                 <a:ea typeface="Bricolage Grotesque ExtraBold" pitchFamily="34" charset="-122"/>
                 <a:cs typeface="Bricolage Grotesque ExtraBold" pitchFamily="34" charset="-120"/>
               </a:rPr>
-              <a:t> xem</a:t>
-            </a:r>
-            <a:r>
-              <a:rPr lang="en-US" sz="6900" dirty="0" spc="2" kern="0">
+              <a:t> tắt:</a:t>
+            </a:r>
+            <a:r>
+              <a:rPr lang="en-US" sz="6900" dirty="0" spc="-66" kern="0">
                 <a:solidFill>
                   <a:srgbClr val="14161C"/>
                 </a:solidFill>
@@ -11420,10 +11453,32 @@
                 <a:ea typeface="Bricolage Grotesque ExtraBold" pitchFamily="34" charset="-122"/>
                 <a:cs typeface="Bricolage Grotesque ExtraBold" pitchFamily="34" charset="-120"/>
               </a:rPr>
-              <a:t> phim: nguồn nói</a:t>
-            </a:r>
-            <a:r>
-              <a:rPr lang="en-US" sz="6900" dirty="0" spc="-22" kern="0">
+              <a:t> người</a:t>
+            </a:r>
+            <a:r>
+              <a:rPr lang="en-US" sz="6900" dirty="0" spc="-79" kern="0">
+                <a:solidFill>
+                  <a:srgbClr val="14161C"/>
+                </a:solidFill>
+                <a:latin typeface="Bricolage Grotesque ExtraBold" pitchFamily="34" charset="0"/>
+                <a:ea typeface="Bricolage Grotesque ExtraBold" pitchFamily="34" charset="-122"/>
+                <a:cs typeface="Bricolage Grotesque ExtraBold" pitchFamily="34" charset="-120"/>
+              </a:rPr>
+              <a:t> xem</a:t>
+            </a:r>
+            <a:r>
+              <a:rPr lang="en-US" sz="6900" dirty="0" spc="-1" kern="0">
+                <a:solidFill>
+                  <a:srgbClr val="14161C"/>
+                </a:solidFill>
+                <a:latin typeface="Bricolage Grotesque ExtraBold" pitchFamily="34" charset="0"/>
+                <a:ea typeface="Bricolage Grotesque ExtraBold" pitchFamily="34" charset="-122"/>
+                <a:cs typeface="Bricolage Grotesque ExtraBold" pitchFamily="34" charset="-120"/>
+              </a:rPr>
+              <a:t> thấy</a:t>
+            </a:r>
+            <a:r>
+              <a:rPr lang="en-US" sz="6900" dirty="0" spc="-21" kern="0">
                 <a:solidFill>
                   <a:srgbClr val="14161C"/>
                 </a:solidFill>
@@ -11484,7 +11539,7 @@
               <a:buNone/>
             </a:pPr>
             <a:r>
-              <a:rPr lang="en-US" sz="1950" b="1" spc="218" kern="0" dirty="0">
+              <a:rPr lang="en-US" sz="1950" b="1" spc="224" kern="0" dirty="0">
                 <a:solidFill>
                   <a:srgbClr val="F3DFB8"/>
                 </a:solidFill>
@@ -11492,10 +11547,10 @@
                 <a:ea typeface="Be Vietnam Pro" pitchFamily="34" charset="-122"/>
                 <a:cs typeface="Be Vietnam Pro" pitchFamily="34" charset="-120"/>
               </a:rPr>
-              <a:t>BÀI</a:t>
-            </a:r>
-            <a:r>
-              <a:rPr lang="en-US" sz="1950" b="1" spc="225" kern="0" dirty="0">
+              <a:t>PHÉP</a:t>
+            </a:r>
+            <a:r>
+              <a:rPr lang="en-US" sz="1950" b="1" spc="227" kern="0" dirty="0">
                 <a:solidFill>
                   <a:srgbClr val="F3DFB8"/>
                 </a:solidFill>
@@ -11503,7 +11558,7 @@
                 <a:ea typeface="Be Vietnam Pro" pitchFamily="34" charset="-122"/>
                 <a:cs typeface="Be Vietnam Pro" pitchFamily="34" charset="-120"/>
               </a:rPr>
-              <a:t> NGUỒN</a:t>
+              <a:t> THỬ</a:t>
             </a:r>
             <a:endParaRPr lang="en-US" sz="1950" dirty="0"/>
           </a:p>
@@ -11537,7 +11592,7 @@
               <a:buNone/>
             </a:pPr>
             <a:r>
-              <a:rPr lang="en-US" sz="3450" dirty="0" spc="2" kern="0">
+              <a:rPr lang="en-US" sz="3450" dirty="0" spc="0" kern="0">
                 <a:solidFill>
                   <a:srgbClr val="F3EEE3"/>
                 </a:solidFill>
@@ -11545,10 +11600,10 @@
                 <a:ea typeface="Bricolage Grotesque ExtraBold" pitchFamily="34" charset="-122"/>
                 <a:cs typeface="Bricolage Grotesque ExtraBold" pitchFamily="34" charset="-120"/>
               </a:rPr>
-              <a:t>Chỉ</a:t>
-            </a:r>
-            <a:r>
-              <a:rPr lang="en-US" sz="3450" dirty="0" spc="1" kern="0">
+              <a:t>Hỏng</a:t>
+            </a:r>
+            <a:r>
+              <a:rPr lang="en-US" sz="3450" dirty="0" spc="-12" kern="0">
                 <a:solidFill>
                   <a:srgbClr val="F3EEE3"/>
                 </a:solidFill>
@@ -11556,10 +11611,10 @@
                 <a:ea typeface="Bricolage Grotesque ExtraBold" pitchFamily="34" charset="-122"/>
                 <a:cs typeface="Bricolage Grotesque ExtraBold" pitchFamily="34" charset="-120"/>
               </a:rPr>
-              <a:t> có</a:t>
-            </a:r>
-            <a:r>
-              <a:rPr lang="en-US" sz="3450" dirty="0" spc="-11" kern="0">
+              <a:t> thì</a:t>
+            </a:r>
+            <a:r>
+              <a:rPr lang="en-US" sz="3450" dirty="0" spc="-2" kern="0">
                 <a:solidFill>
                   <a:srgbClr val="F3EEE3"/>
                 </a:solidFill>
@@ -11567,10 +11622,10 @@
                 <a:ea typeface="Bricolage Grotesque ExtraBold" pitchFamily="34" charset="-122"/>
                 <a:cs typeface="Bricolage Grotesque ExtraBold" pitchFamily="34" charset="-120"/>
               </a:rPr>
-              <a:t> tên</a:t>
-            </a:r>
-            <a:r>
-              <a:rPr lang="en-US" sz="3450" dirty="0" spc="1" kern="0">
+              <a:t> ai</a:t>
+            </a:r>
+            <a:r>
+              <a:rPr lang="en-US" sz="3450" dirty="0" spc="-4" kern="0">
                 <a:solidFill>
                   <a:srgbClr val="F3EEE3"/>
                 </a:solidFill>
@@ -11578,7 +11633,29 @@
                 <a:ea typeface="Bricolage Grotesque ExtraBold" pitchFamily="34" charset="-122"/>
                 <a:cs typeface="Bricolage Grotesque ExtraBold" pitchFamily="34" charset="-120"/>
               </a:rPr>
-              <a:t> theo mảng</a:t>
+              <a:t> thấy,</a:t>
+            </a:r>
+            <a:r>
+              <a:rPr lang="en-US" sz="3450" dirty="0" spc="0" kern="0">
+                <a:solidFill>
+                  <a:srgbClr val="F3EEE3"/>
+                </a:solidFill>
+                <a:latin typeface="Bricolage Grotesque ExtraBold" pitchFamily="34" charset="0"/>
+                <a:ea typeface="Bricolage Grotesque ExtraBold" pitchFamily="34" charset="-122"/>
+                <a:cs typeface="Bricolage Grotesque ExtraBold" pitchFamily="34" charset="-120"/>
+              </a:rPr>
+              <a:t> khi</a:t>
+            </a:r>
+            <a:r>
+              <a:rPr lang="en-US" sz="3450" dirty="0" spc="-17" kern="0">
+                <a:solidFill>
+                  <a:srgbClr val="F3EEE3"/>
+                </a:solidFill>
+                <a:latin typeface="Bricolage Grotesque ExtraBold" pitchFamily="34" charset="0"/>
+                <a:ea typeface="Bricolage Grotesque ExtraBold" pitchFamily="34" charset="-122"/>
+                <a:cs typeface="Bricolage Grotesque ExtraBold" pitchFamily="34" charset="-120"/>
+              </a:rPr>
+              <a:t> nào?</a:t>
             </a:r>
             <a:endParaRPr lang="en-US" sz="3450" dirty="0"/>
           </a:p>
@@ -11636,7 +11713,7 @@
               <a:buNone/>
             </a:pPr>
             <a:r>
-              <a:rPr lang="en-US" sz="1800" b="1" spc="256" kern="0" dirty="0">
+              <a:rPr lang="en-US" sz="1800" b="1" spc="182" kern="0" dirty="0">
                 <a:solidFill>
                   <a:srgbClr val="B45309"/>
                 </a:solidFill>
@@ -11644,10 +11721,10 @@
                 <a:ea typeface="Be Vietnam Pro" pitchFamily="34" charset="-122"/>
                 <a:cs typeface="Be Vietnam Pro" pitchFamily="34" charset="-120"/>
               </a:rPr>
-              <a:t>ỨNG</a:t>
-            </a:r>
-            <a:r>
-              <a:rPr lang="en-US" sz="1800" b="1" spc="226" kern="0" dirty="0">
+              <a:t>THẤY</a:t>
+            </a:r>
+            <a:r>
+              <a:rPr lang="en-US" sz="1800" b="1" spc="189" kern="0" dirty="0">
                 <a:solidFill>
                   <a:srgbClr val="B45309"/>
                 </a:solidFill>
@@ -11655,29 +11732,7 @@
                 <a:ea typeface="Be Vietnam Pro" pitchFamily="34" charset="-122"/>
                 <a:cs typeface="Be Vietnam Pro" pitchFamily="34" charset="-120"/>
               </a:rPr>
-              <a:t> DỤNG</a:t>
-            </a:r>
-            <a:r>
-              <a:rPr lang="en-US" sz="1800" b="1" spc="225" kern="0" dirty="0">
-                <a:solidFill>
-                  <a:srgbClr val="B45309"/>
-                </a:solidFill>
-                <a:latin typeface="Be Vietnam Pro" pitchFamily="34" charset="0"/>
-                <a:ea typeface="Be Vietnam Pro" pitchFamily="34" charset="-122"/>
-                <a:cs typeface="Be Vietnam Pro" pitchFamily="34" charset="-120"/>
-              </a:rPr>
-              <a:t> ·</a:t>
-            </a:r>
-            <a:r>
-              <a:rPr lang="en-US" sz="1800" b="1" spc="223" kern="0" dirty="0">
-                <a:solidFill>
-                  <a:srgbClr val="B45309"/>
-                </a:solidFill>
-                <a:latin typeface="Be Vietnam Pro" pitchFamily="34" charset="0"/>
-                <a:ea typeface="Be Vietnam Pro" pitchFamily="34" charset="-122"/>
-                <a:cs typeface="Be Vietnam Pro" pitchFamily="34" charset="-120"/>
-              </a:rPr>
-              <a:t> GRAPHQL</a:t>
+              <a:t> NGAY</a:t>
             </a:r>
             <a:endParaRPr lang="en-US" sz="1800" dirty="0"/>
           </a:p>
@@ -11708,7 +11763,7 @@
               <a:buNone/>
             </a:pPr>
             <a:r>
-              <a:rPr lang="en-US" sz="3000" dirty="0" spc="4" kern="0">
+              <a:rPr lang="en-US" sz="3000" dirty="0" spc="-2" kern="0">
                 <a:solidFill>
                   <a:srgbClr val="14161C"/>
                 </a:solidFill>
@@ -11716,10 +11771,10 @@
                 <a:ea typeface="Bricolage Grotesque ExtraBold" pitchFamily="34" charset="-122"/>
                 <a:cs typeface="Bricolage Grotesque ExtraBold" pitchFamily="34" charset="-120"/>
               </a:rPr>
-              <a:t>Swift,</a:t>
-            </a:r>
-            <a:r>
-              <a:rPr lang="en-US" sz="3000" dirty="0" spc="-12" kern="0">
+              <a:t>Ứng</a:t>
+            </a:r>
+            <a:r>
+              <a:rPr lang="en-US" sz="3000" dirty="0" spc="8" kern="0">
                 <a:solidFill>
                   <a:srgbClr val="14161C"/>
                 </a:solidFill>
@@ -11727,10 +11782,10 @@
                 <a:ea typeface="Bricolage Grotesque ExtraBold" pitchFamily="34" charset="-122"/>
                 <a:cs typeface="Bricolage Grotesque ExtraBold" pitchFamily="34" charset="-120"/>
               </a:rPr>
-              <a:t> Kotlin;</a:t>
-            </a:r>
-            <a:r>
-              <a:rPr lang="en-US" sz="3000" dirty="0" spc="-5" kern="0">
+              <a:t> dụng,</a:t>
+            </a:r>
+            <a:r>
+              <a:rPr lang="en-US" sz="3000" dirty="0" spc="-7" kern="0">
                 <a:solidFill>
                   <a:srgbClr val="14161C"/>
                 </a:solidFill>
@@ -11738,7 +11793,29 @@
                 <a:ea typeface="Bricolage Grotesque ExtraBold" pitchFamily="34" charset="-122"/>
                 <a:cs typeface="Bricolage Grotesque ExtraBold" pitchFamily="34" charset="-120"/>
               </a:rPr>
-              <a:t> GraphQL</a:t>
+              <a:t> Zuul,</a:t>
+            </a:r>
+            <a:r>
+              <a:rPr lang="en-US" sz="3000" dirty="0" spc="0" kern="0">
+                <a:solidFill>
+                  <a:srgbClr val="14161C"/>
+                </a:solidFill>
+                <a:latin typeface="Bricolage Grotesque ExtraBold" pitchFamily="34" charset="0"/>
+                <a:ea typeface="Bricolage Grotesque ExtraBold" pitchFamily="34" charset="-122"/>
+                <a:cs typeface="Bricolage Grotesque ExtraBold" pitchFamily="34" charset="-120"/>
+              </a:rPr>
+              <a:t> Open</a:t>
+            </a:r>
+            <a:r>
+              <a:rPr lang="en-US" sz="3000" dirty="0" spc="1" kern="0">
+                <a:solidFill>
+                  <a:srgbClr val="14161C"/>
+                </a:solidFill>
+                <a:latin typeface="Bricolage Grotesque ExtraBold" pitchFamily="34" charset="0"/>
+                <a:ea typeface="Bricolage Grotesque ExtraBold" pitchFamily="34" charset="-122"/>
+                <a:cs typeface="Bricolage Grotesque ExtraBold" pitchFamily="34" charset="-120"/>
+              </a:rPr>
+              <a:t> Connect</a:t>
             </a:r>
             <a:endParaRPr lang="en-US" sz="3000" dirty="0"/>
           </a:p>
@@ -11821,7 +11898,7 @@
               <a:buNone/>
             </a:pPr>
             <a:r>
-              <a:rPr lang="en-US" sz="1800" b="1" spc="227" kern="0" dirty="0">
+              <a:rPr lang="en-US" sz="1800" b="1" spc="228" kern="0" dirty="0">
                 <a:solidFill>
                   <a:srgbClr val="B45309"/>
                 </a:solidFill>
@@ -11829,10 +11906,10 @@
                 <a:ea typeface="Be Vietnam Pro" pitchFamily="34" charset="-122"/>
                 <a:cs typeface="Be Vietnam Pro" pitchFamily="34" charset="-120"/>
               </a:rPr>
-              <a:t>DỊCH</a:t>
-            </a:r>
-            <a:r>
-              <a:rPr lang="en-US" sz="1800" b="1" spc="229" kern="0" dirty="0">
+              <a:t>CÓ</a:t>
+            </a:r>
+            <a:r>
+              <a:rPr lang="en-US" sz="1800" b="1" spc="226" kern="0" dirty="0">
                 <a:solidFill>
                   <a:srgbClr val="B45309"/>
                 </a:solidFill>
@@ -11840,10 +11917,10 @@
                 <a:ea typeface="Be Vietnam Pro" pitchFamily="34" charset="-122"/>
                 <a:cs typeface="Be Vietnam Pro" pitchFamily="34" charset="-120"/>
               </a:rPr>
-              <a:t> VỤ</a:t>
-            </a:r>
-            <a:r>
-              <a:rPr lang="en-US" sz="1800" b="1" spc="225" kern="0" dirty="0">
+              <a:t> THỂ</a:t>
+            </a:r>
+            <a:r>
+              <a:rPr lang="en-US" sz="1800" b="1" spc="228" kern="0" dirty="0">
                 <a:solidFill>
                   <a:srgbClr val="B45309"/>
                 </a:solidFill>
@@ -11851,10 +11928,10 @@
                 <a:ea typeface="Be Vietnam Pro" pitchFamily="34" charset="-122"/>
                 <a:cs typeface="Be Vietnam Pro" pitchFamily="34" charset="-120"/>
               </a:rPr>
-              <a:t> ·</a:t>
-            </a:r>
-            <a:r>
-              <a:rPr lang="en-US" sz="1800" b="1" spc="228" kern="0" dirty="0">
+              <a:t> CHỈ</a:t>
+            </a:r>
+            <a:r>
+              <a:rPr lang="en-US" sz="1800" b="1" spc="226" kern="0" dirty="0">
                 <a:solidFill>
                   <a:srgbClr val="B45309"/>
                 </a:solidFill>
@@ -11862,18 +11939,7 @@
                 <a:ea typeface="Be Vietnam Pro" pitchFamily="34" charset="-122"/>
                 <a:cs typeface="Be Vietnam Pro" pitchFamily="34" charset="-120"/>
               </a:rPr>
-              <a:t> DỮ</a:t>
-            </a:r>
-            <a:r>
-              <a:rPr lang="en-US" sz="1800" b="1" spc="224" kern="0" dirty="0">
-                <a:solidFill>
-                  <a:srgbClr val="B45309"/>
-                </a:solidFill>
-                <a:latin typeface="Be Vietnam Pro" pitchFamily="34" charset="0"/>
-                <a:ea typeface="Be Vietnam Pro" pitchFamily="34" charset="-122"/>
-                <a:cs typeface="Be Vietnam Pro" pitchFamily="34" charset="-120"/>
-              </a:rPr>
-              <a:t> LIỆU</a:t>
+              <a:t> CHẬM</a:t>
             </a:r>
             <a:endParaRPr lang="en-US" sz="1800" dirty="0"/>
           </a:p>
@@ -11904,7 +11970,7 @@
               <a:buNone/>
             </a:pPr>
             <a:r>
-              <a:rPr lang="en-US" sz="3000" dirty="0" spc="-8" kern="0">
+              <a:rPr lang="en-US" sz="3000" dirty="0" spc="-13" kern="0">
                 <a:solidFill>
                   <a:srgbClr val="14161C"/>
                 </a:solidFill>
@@ -11912,10 +11978,10 @@
                 <a:ea typeface="Bricolage Grotesque ExtraBold" pitchFamily="34" charset="-122"/>
                 <a:cs typeface="Bricolage Grotesque ExtraBold" pitchFamily="34" charset="-120"/>
               </a:rPr>
-              <a:t>Zuul,</a:t>
-            </a:r>
-            <a:r>
-              <a:rPr lang="en-US" sz="3000" dirty="0" spc="-13" kern="0">
+              <a:t>EVCache,</a:t>
+            </a:r>
+            <a:r>
+              <a:rPr lang="en-US" sz="3000" dirty="0" spc="-1" kern="0">
                 <a:solidFill>
                   <a:srgbClr val="14161C"/>
                 </a:solidFill>
@@ -11923,10 +11989,10 @@
                 <a:ea typeface="Bricolage Grotesque ExtraBold" pitchFamily="34" charset="-122"/>
                 <a:cs typeface="Bricolage Grotesque ExtraBold" pitchFamily="34" charset="-120"/>
               </a:rPr>
-              <a:t> EVCache,</a:t>
-            </a:r>
-            <a:r>
-              <a:rPr lang="en-US" sz="3000" dirty="0" spc="-1" kern="0">
+              <a:t> nếu dữ</a:t>
+            </a:r>
+            <a:r>
+              <a:rPr lang="en-US" sz="3000" dirty="0" spc="1" kern="0">
                 <a:solidFill>
                   <a:srgbClr val="14161C"/>
                 </a:solidFill>
@@ -11934,7 +12000,29 @@
                 <a:ea typeface="Bricolage Grotesque ExtraBold" pitchFamily="34" charset="-122"/>
                 <a:cs typeface="Bricolage Grotesque ExtraBold" pitchFamily="34" charset="-120"/>
               </a:rPr>
-              <a:t> Cassandra</a:t>
+              <a:t> liệu</a:t>
+            </a:r>
+            <a:r>
+              <a:rPr lang="en-US" sz="3000" dirty="0" spc="-1" kern="0">
+                <a:solidFill>
+                  <a:srgbClr val="14161C"/>
+                </a:solidFill>
+                <a:latin typeface="Bricolage Grotesque ExtraBold" pitchFamily="34" charset="0"/>
+                <a:ea typeface="Bricolage Grotesque ExtraBold" pitchFamily="34" charset="-122"/>
+                <a:cs typeface="Bricolage Grotesque ExtraBold" pitchFamily="34" charset="-120"/>
+              </a:rPr>
+              <a:t> chịu</a:t>
+            </a:r>
+            <a:r>
+              <a:rPr lang="en-US" sz="3000" dirty="0" spc="0" kern="0">
+                <a:solidFill>
+                  <a:srgbClr val="14161C"/>
+                </a:solidFill>
+                <a:latin typeface="Bricolage Grotesque ExtraBold" pitchFamily="34" charset="0"/>
+                <a:ea typeface="Bricolage Grotesque ExtraBold" pitchFamily="34" charset="-122"/>
+                <a:cs typeface="Bricolage Grotesque ExtraBold" pitchFamily="34" charset="-120"/>
+              </a:rPr>
+              <a:t> nổi</a:t>
             </a:r>
             <a:endParaRPr lang="en-US" sz="3000" dirty="0"/>
           </a:p>
@@ -12012,7 +12100,7 @@
               <a:buNone/>
             </a:pPr>
             <a:r>
-              <a:rPr lang="en-US" sz="1800" b="1" spc="255" kern="0" dirty="0">
+              <a:rPr lang="en-US" sz="1800" b="1" spc="182" kern="0" dirty="0">
                 <a:solidFill>
                   <a:srgbClr val="B45309"/>
                 </a:solidFill>
@@ -12020,10 +12108,10 @@
                 <a:ea typeface="Be Vietnam Pro" pitchFamily="34" charset="-122"/>
                 <a:cs typeface="Be Vietnam Pro" pitchFamily="34" charset="-120"/>
               </a:rPr>
-              <a:t>LƯU</a:t>
-            </a:r>
-            <a:r>
-              <a:rPr lang="en-US" sz="1800" b="1" spc="223" kern="0" dirty="0">
+              <a:t>THẤY</a:t>
+            </a:r>
+            <a:r>
+              <a:rPr lang="en-US" sz="1800" b="1" spc="225" kern="0" dirty="0">
                 <a:solidFill>
                   <a:srgbClr val="B45309"/>
                 </a:solidFill>
@@ -12031,7 +12119,29 @@
                 <a:ea typeface="Be Vietnam Pro" pitchFamily="34" charset="-122"/>
                 <a:cs typeface="Be Vietnam Pro" pitchFamily="34" charset="-120"/>
               </a:rPr>
-              <a:t> VIDEO</a:t>
+              <a:t> MUỘN,</a:t>
+            </a:r>
+            <a:r>
+              <a:rPr lang="en-US" sz="1800" b="1" spc="201" kern="0" dirty="0">
+                <a:solidFill>
+                  <a:srgbClr val="B45309"/>
+                </a:solidFill>
+                <a:latin typeface="Be Vietnam Pro" pitchFamily="34" charset="0"/>
+                <a:ea typeface="Be Vietnam Pro" pitchFamily="34" charset="-122"/>
+                <a:cs typeface="Be Vietnam Pro" pitchFamily="34" charset="-120"/>
+              </a:rPr>
+              <a:t> HOẶC</a:t>
+            </a:r>
+            <a:r>
+              <a:rPr lang="en-US" sz="1800" b="1" spc="226" kern="0" dirty="0">
+                <a:solidFill>
+                  <a:srgbClr val="B45309"/>
+                </a:solidFill>
+                <a:latin typeface="Be Vietnam Pro" pitchFamily="34" charset="0"/>
+                <a:ea typeface="Be Vietnam Pro" pitchFamily="34" charset="-122"/>
+                <a:cs typeface="Be Vietnam Pro" pitchFamily="34" charset="-120"/>
+              </a:rPr>
+              <a:t> KHÔNG</a:t>
             </a:r>
             <a:endParaRPr lang="en-US" sz="1800" dirty="0"/>
           </a:p>
@@ -12062,7 +12172,7 @@
               <a:buNone/>
             </a:pPr>
             <a:r>
-              <a:rPr lang="en-US" sz="3000" dirty="0" spc="14" kern="0">
+              <a:rPr lang="en-US" sz="3000" dirty="0" spc="-9" kern="0">
                 <a:solidFill>
                   <a:srgbClr val="14161C"/>
                 </a:solidFill>
@@ -12070,10 +12180,10 @@
                 <a:ea typeface="Bricolage Grotesque ExtraBold" pitchFamily="34" charset="-122"/>
                 <a:cs typeface="Bricolage Grotesque ExtraBold" pitchFamily="34" charset="-120"/>
               </a:rPr>
-              <a:t>S3,</a:t>
-            </a:r>
-            <a:r>
-              <a:rPr lang="en-US" sz="3000" dirty="0" spc="0" kern="0">
+              <a:t>Kafka,</a:t>
+            </a:r>
+            <a:r>
+              <a:rPr lang="en-US" sz="3000" dirty="0" spc="3" kern="0">
                 <a:solidFill>
                   <a:srgbClr val="14161C"/>
                 </a:solidFill>
@@ -12081,10 +12191,10 @@
                 <a:ea typeface="Bricolage Grotesque ExtraBold" pitchFamily="34" charset="-122"/>
                 <a:cs typeface="Bricolage Grotesque ExtraBold" pitchFamily="34" charset="-120"/>
               </a:rPr>
-              <a:t> Open</a:t>
-            </a:r>
-            <a:r>
-              <a:rPr lang="en-US" sz="3000" dirty="0" spc="1" kern="0">
+              <a:t> Spark,</a:t>
+            </a:r>
+            <a:r>
+              <a:rPr lang="en-US" sz="3000" dirty="0" spc="-1" kern="0">
                 <a:solidFill>
                   <a:srgbClr val="14161C"/>
                 </a:solidFill>
@@ -12092,7 +12202,7 @@
                 <a:ea typeface="Bricolage Grotesque ExtraBold" pitchFamily="34" charset="-122"/>
                 <a:cs typeface="Bricolage Grotesque ExtraBold" pitchFamily="34" charset="-120"/>
               </a:rPr>
-              <a:t> Connect</a:t>
+              <a:t> Jenkins</a:t>
             </a:r>
             <a:endParaRPr lang="en-US" sz="3000" dirty="0"/>
           </a:p>
@@ -12148,6 +12258,39 @@
               <a:buNone/>
             </a:pPr>
             <a:r>
+              <a:rPr lang="en-US" sz="2100" dirty="0" spc="-32" kern="0">
+                <a:solidFill>
+                  <a:srgbClr val="6B6A66"/>
+                </a:solidFill>
+                <a:latin typeface="Be Vietnam Pro" pitchFamily="34" charset="0"/>
+                <a:ea typeface="Be Vietnam Pro" pitchFamily="34" charset="-122"/>
+                <a:cs typeface="Be Vietnam Pro" pitchFamily="34" charset="-120"/>
+              </a:rPr>
+              <a:t>Lập</a:t>
+            </a:r>
+            <a:r>
+              <a:rPr lang="en-US" sz="2100" dirty="0" spc="-1" kern="0">
+                <a:solidFill>
+                  <a:srgbClr val="6B6A66"/>
+                </a:solidFill>
+                <a:latin typeface="Be Vietnam Pro" pitchFamily="34" charset="0"/>
+                <a:ea typeface="Be Vietnam Pro" pitchFamily="34" charset="-122"/>
+                <a:cs typeface="Be Vietnam Pro" pitchFamily="34" charset="-120"/>
+              </a:rPr>
+              <a:t> luận của</a:t>
+            </a:r>
+            <a:r>
+              <a:rPr lang="en-US" sz="2100" dirty="0" spc="5" kern="0">
+                <a:solidFill>
+                  <a:srgbClr val="6B6A66"/>
+                </a:solidFill>
+                <a:latin typeface="Be Vietnam Pro" pitchFamily="34" charset="0"/>
+                <a:ea typeface="Be Vietnam Pro" pitchFamily="34" charset="-122"/>
+                <a:cs typeface="Be Vietnam Pro" pitchFamily="34" charset="-120"/>
+              </a:rPr>
+              <a:t> người</a:t>
+            </a:r>
+            <a:r>
               <a:rPr lang="en-US" sz="2100" dirty="0" spc="0" kern="0">
                 <a:solidFill>
                   <a:srgbClr val="6B6A66"/>
@@ -12156,7 +12299,18 @@
                 <a:ea typeface="Be Vietnam Pro" pitchFamily="34" charset="-122"/>
                 <a:cs typeface="Be Vietnam Pro" pitchFamily="34" charset="-120"/>
               </a:rPr>
-              <a:t>Nguồn</a:t>
+              <a:t> biên</a:t>
+            </a:r>
+            <a:r>
+              <a:rPr lang="en-US" sz="2100" dirty="0" spc="-6" kern="0">
+                <a:solidFill>
+                  <a:srgbClr val="6B6A66"/>
+                </a:solidFill>
+                <a:latin typeface="Be Vietnam Pro" pitchFamily="34" charset="0"/>
+                <a:ea typeface="Be Vietnam Pro" pitchFamily="34" charset="-122"/>
+                <a:cs typeface="Be Vietnam Pro" pitchFamily="34" charset="-120"/>
+              </a:rPr>
+              <a:t> soạn,</a:t>
             </a:r>
             <a:r>
               <a:rPr lang="en-US" sz="2100" dirty="0" spc="-1" kern="0">
@@ -12167,10 +12321,10 @@
                 <a:ea typeface="Be Vietnam Pro" pitchFamily="34" charset="-122"/>
                 <a:cs typeface="Be Vietnam Pro" pitchFamily="34" charset="-120"/>
               </a:rPr>
-              <a:t> không nói mảng nào</a:t>
-            </a:r>
-            <a:r>
-              <a:rPr lang="en-US" sz="2100" dirty="0" spc="-2" kern="0">
+              <a:t> không</a:t>
+            </a:r>
+            <a:r>
+              <a:rPr lang="en-US" sz="2100" dirty="0" spc="0" kern="0">
                 <a:solidFill>
                   <a:srgbClr val="6B6A66"/>
                 </a:solidFill>
@@ -12178,10 +12332,10 @@
                 <a:ea typeface="Be Vietnam Pro" pitchFamily="34" charset="-122"/>
                 <a:cs typeface="Be Vietnam Pro" pitchFamily="34" charset="-120"/>
               </a:rPr>
-              <a:t> phục</a:t>
-            </a:r>
-            <a:r>
-              <a:rPr lang="en-US" sz="2100" dirty="0" spc="-1" kern="0">
+              <a:t> từ</a:t>
+            </a:r>
+            <a:r>
+              <a:rPr lang="en-US" sz="2100" dirty="0" spc="-5" kern="0">
                 <a:solidFill>
                   <a:srgbClr val="6B6A66"/>
                 </a:solidFill>
@@ -12189,10 +12343,10 @@
                 <a:ea typeface="Be Vietnam Pro" pitchFamily="34" charset="-122"/>
                 <a:cs typeface="Be Vietnam Pro" pitchFamily="34" charset="-120"/>
               </a:rPr>
-              <a:t> vụ</a:t>
-            </a:r>
-            <a:r>
-              <a:rPr lang="en-US" sz="2100" dirty="0" spc="-8" kern="0">
+              <a:t> bài</a:t>
+            </a:r>
+            <a:r>
+              <a:rPr lang="en-US" sz="2100" dirty="0" spc="0" kern="0">
                 <a:solidFill>
                   <a:srgbClr val="6B6A66"/>
                 </a:solidFill>
@@ -12200,73 +12354,7 @@
                 <a:ea typeface="Be Vietnam Pro" pitchFamily="34" charset="-122"/>
                 <a:cs typeface="Be Vietnam Pro" pitchFamily="34" charset="-120"/>
               </a:rPr>
-              <a:t> một</a:t>
-            </a:r>
-            <a:r>
-              <a:rPr lang="en-US" sz="2100" dirty="0" spc="-1" kern="0">
-                <a:solidFill>
-                  <a:srgbClr val="6B6A66"/>
-                </a:solidFill>
-                <a:latin typeface="Be Vietnam Pro" pitchFamily="34" charset="0"/>
-                <a:ea typeface="Be Vietnam Pro" pitchFamily="34" charset="-122"/>
-                <a:cs typeface="Be Vietnam Pro" pitchFamily="34" charset="-120"/>
-              </a:rPr>
-              <a:t> lần</a:t>
-            </a:r>
-            <a:r>
-              <a:rPr lang="en-US" sz="2100" dirty="0" spc="-15" kern="0">
-                <a:solidFill>
-                  <a:srgbClr val="6B6A66"/>
-                </a:solidFill>
-                <a:latin typeface="Be Vietnam Pro" pitchFamily="34" charset="0"/>
-                <a:ea typeface="Be Vietnam Pro" pitchFamily="34" charset="-122"/>
-                <a:cs typeface="Be Vietnam Pro" pitchFamily="34" charset="-120"/>
-              </a:rPr>
-              <a:t> xem,</a:t>
-            </a:r>
-            <a:r>
-              <a:rPr lang="en-US" sz="2100" dirty="0" spc="-10" kern="0">
-                <a:solidFill>
-                  <a:srgbClr val="6B6A66"/>
-                </a:solidFill>
-                <a:latin typeface="Be Vietnam Pro" pitchFamily="34" charset="0"/>
-                <a:ea typeface="Be Vietnam Pro" pitchFamily="34" charset="-122"/>
-                <a:cs typeface="Be Vietnam Pro" pitchFamily="34" charset="-120"/>
-              </a:rPr>
-              <a:t> hay</a:t>
-            </a:r>
-            <a:r>
-              <a:rPr lang="en-US" sz="2100" dirty="0" spc="-5" kern="0">
-                <a:solidFill>
-                  <a:srgbClr val="6B6A66"/>
-                </a:solidFill>
-                <a:latin typeface="Be Vietnam Pro" pitchFamily="34" charset="0"/>
-                <a:ea typeface="Be Vietnam Pro" pitchFamily="34" charset="-122"/>
-                <a:cs typeface="Be Vietnam Pro" pitchFamily="34" charset="-120"/>
-              </a:rPr>
-              <a:t> theo</a:t>
-            </a:r>
-            <a:r>
-              <a:rPr lang="en-US" sz="2100" dirty="0" spc="0" kern="0">
-                <a:solidFill>
-                  <a:srgbClr val="6B6A66"/>
-                </a:solidFill>
-                <a:latin typeface="Be Vietnam Pro" pitchFamily="34" charset="0"/>
-                <a:ea typeface="Be Vietnam Pro" pitchFamily="34" charset="-122"/>
-                <a:cs typeface="Be Vietnam Pro" pitchFamily="34" charset="-120"/>
-              </a:rPr>
-              <a:t> thứ</a:t>
-            </a:r>
-            <a:r>
-              <a:rPr lang="en-US" sz="2100" dirty="0" spc="-1" kern="0">
-                <a:solidFill>
-                  <a:srgbClr val="6B6A66"/>
-                </a:solidFill>
-                <a:latin typeface="Be Vietnam Pro" pitchFamily="34" charset="0"/>
-                <a:ea typeface="Be Vietnam Pro" pitchFamily="34" charset="-122"/>
-                <a:cs typeface="Be Vietnam Pro" pitchFamily="34" charset="-120"/>
-              </a:rPr>
-              <a:t> tự nào.</a:t>
+              <a:t> nguồn.</a:t>
             </a:r>
             <a:endParaRPr lang="en-US" sz="2100" dirty="0"/>
           </a:p>
@@ -12738,7 +12826,7 @@
               <a:buNone/>
             </a:pPr>
             <a:r>
-              <a:rPr lang="en-US" sz="1950" b="1" spc="299" kern="0" dirty="0">
+              <a:rPr lang="en-US" sz="1950" b="1" spc="302" kern="0" dirty="0">
                 <a:solidFill>
                   <a:srgbClr val="3DD6A0"/>
                 </a:solidFill>
@@ -12746,10 +12834,10 @@
                 <a:ea typeface="Be Vietnam Pro" pitchFamily="34" charset="-122"/>
                 <a:cs typeface="Be Vietnam Pro" pitchFamily="34" charset="-120"/>
               </a:rPr>
-              <a:t>XEM</a:t>
-            </a:r>
-            <a:r>
-              <a:rPr lang="en-US" sz="1950" b="1" spc="287" kern="0" dirty="0">
+              <a:t>THỬ</a:t>
+            </a:r>
+            <a:r>
+              <a:rPr lang="en-US" sz="1950" b="1" spc="301" kern="0" dirty="0">
                 <a:solidFill>
                   <a:srgbClr val="3DD6A0"/>
                 </a:solidFill>
@@ -12757,10 +12845,10 @@
                 <a:ea typeface="Be Vietnam Pro" pitchFamily="34" charset="-122"/>
                 <a:cs typeface="Be Vietnam Pro" pitchFamily="34" charset="-120"/>
               </a:rPr>
-              <a:t> SÂU</a:t>
-            </a:r>
-            <a:r>
-              <a:rPr lang="en-US" sz="1950" b="1" spc="300" kern="0" dirty="0">
+              <a:t> LẬP</a:t>
+            </a:r>
+            <a:r>
+              <a:rPr lang="en-US" sz="1950" b="1" spc="291" kern="0" dirty="0">
                 <a:solidFill>
                   <a:srgbClr val="3DD6A0"/>
                 </a:solidFill>
@@ -12768,7 +12856,7 @@
                 <a:ea typeface="Be Vietnam Pro" pitchFamily="34" charset="-122"/>
                 <a:cs typeface="Be Vietnam Pro" pitchFamily="34" charset="-120"/>
               </a:rPr>
-              <a:t> HƠN</a:t>
+              <a:t> LUẬN</a:t>
             </a:r>
             <a:endParaRPr lang="en-US" sz="1950" dirty="0"/>
           </a:p>
@@ -12802,7 +12890,7 @@
               <a:buNone/>
             </a:pPr>
             <a:r>
-              <a:rPr lang="en-US" sz="6900" dirty="0" spc="-2" kern="0">
+              <a:rPr lang="en-US" sz="6900" dirty="0" spc="-4" kern="0">
                 <a:solidFill>
                   <a:srgbClr val="F3EEE3"/>
                 </a:solidFill>
@@ -12810,10 +12898,10 @@
                 <a:ea typeface="Bricolage Grotesque ExtraBold" pitchFamily="34" charset="-122"/>
                 <a:cs typeface="Bricolage Grotesque ExtraBold" pitchFamily="34" charset="-120"/>
               </a:rPr>
-              <a:t>Hai</a:t>
-            </a:r>
-            <a:r>
-              <a:rPr lang="en-US" sz="6900" dirty="0" spc="0" kern="0">
+              <a:t>Ba</a:t>
+            </a:r>
+            <a:r>
+              <a:rPr lang="en-US" sz="6900" dirty="0" spc="-2" kern="0">
                 <a:solidFill>
                   <a:srgbClr val="F3EEE3"/>
                 </a:solidFill>
@@ -12821,10 +12909,10 @@
                 <a:ea typeface="Bricolage Grotesque ExtraBold" pitchFamily="34" charset="-122"/>
                 <a:cs typeface="Bricolage Grotesque ExtraBold" pitchFamily="34" charset="-120"/>
               </a:rPr>
-              <a:t> cái</a:t>
-            </a:r>
-            <a:r>
-              <a:rPr lang="en-US" sz="6900" dirty="0" spc="-18" kern="0">
+              <a:t> cơ</a:t>
+            </a:r>
+            <a:r>
+              <a:rPr lang="en-US" sz="6900" dirty="0" spc="1" kern="0">
                 <a:solidFill>
                   <a:srgbClr val="F3EEE3"/>
                 </a:solidFill>
@@ -12832,10 +12920,10 @@
                 <a:ea typeface="Bricolage Grotesque ExtraBold" pitchFamily="34" charset="-122"/>
                 <a:cs typeface="Bricolage Grotesque ExtraBold" pitchFamily="34" charset="-120"/>
               </a:rPr>
-              <a:t> tên</a:t>
-            </a:r>
-            <a:r>
-              <a:rPr lang="en-US" sz="6900" dirty="0" spc="7" kern="0">
+              <a:t> sở</a:t>
+            </a:r>
+            <a:r>
+              <a:rPr lang="en-US" sz="6900" dirty="0" spc="-1" kern="0">
                 <a:solidFill>
                   <a:srgbClr val="F3EEE3"/>
                 </a:solidFill>
@@ -12843,10 +12931,10 @@
                 <a:ea typeface="Bricolage Grotesque ExtraBold" pitchFamily="34" charset="-122"/>
                 <a:cs typeface="Bricolage Grotesque ExtraBold" pitchFamily="34" charset="-120"/>
               </a:rPr>
-              <a:t> đáng</a:t>
-            </a:r>
-            <a:r>
-              <a:rPr lang="en-US" sz="6900" dirty="0" spc="2" kern="0">
+              <a:t> dữ</a:t>
+            </a:r>
+            <a:r>
+              <a:rPr lang="en-US" sz="6900" dirty="0" spc="3" kern="0">
                 <a:solidFill>
                   <a:srgbClr val="F3EEE3"/>
                 </a:solidFill>
@@ -12854,7 +12942,40 @@
                 <a:ea typeface="Bricolage Grotesque ExtraBold" pitchFamily="34" charset="-122"/>
                 <a:cs typeface="Bricolage Grotesque ExtraBold" pitchFamily="34" charset="-120"/>
               </a:rPr>
-              <a:t> nhớ</a:t>
+              <a:t> liệu,</a:t>
+            </a:r>
+            <a:r>
+              <a:rPr lang="en-US" sz="6900" dirty="0" spc="-6" kern="0">
+                <a:solidFill>
+                  <a:srgbClr val="F3EEE3"/>
+                </a:solidFill>
+                <a:latin typeface="Bricolage Grotesque ExtraBold" pitchFamily="34" charset="0"/>
+                <a:ea typeface="Bricolage Grotesque ExtraBold" pitchFamily="34" charset="-122"/>
+                <a:cs typeface="Bricolage Grotesque ExtraBold" pitchFamily="34" charset="-120"/>
+              </a:rPr>
+              <a:t> ba</a:t>
+            </a:r>
+            <a:r>
+              <a:rPr lang="en-US" sz="6900" dirty="0" spc="1" kern="0">
+                <a:solidFill>
+                  <a:srgbClr val="F3EEE3"/>
+                </a:solidFill>
+                <a:latin typeface="Bricolage Grotesque ExtraBold" pitchFamily="34" charset="0"/>
+                <a:ea typeface="Bricolage Grotesque ExtraBold" pitchFamily="34" charset="-122"/>
+                <a:cs typeface="Bricolage Grotesque ExtraBold" pitchFamily="34" charset="-120"/>
+              </a:rPr>
+              <a:t> ưu</a:t>
+            </a:r>
+            <a:r>
+              <a:rPr lang="en-US" sz="6900" dirty="0" spc="5" kern="0">
+                <a:solidFill>
+                  <a:srgbClr val="F3EEE3"/>
+                </a:solidFill>
+                <a:latin typeface="Bricolage Grotesque ExtraBold" pitchFamily="34" charset="0"/>
+                <a:ea typeface="Bricolage Grotesque ExtraBold" pitchFamily="34" charset="-122"/>
+                <a:cs typeface="Bricolage Grotesque ExtraBold" pitchFamily="34" charset="-120"/>
+              </a:rPr>
+              <a:t> tiên</a:t>
             </a:r>
             <a:endParaRPr lang="en-US" sz="6900" dirty="0"/>
           </a:p>
@@ -12951,6 +13072,17 @@
               <a:buNone/>
             </a:pPr>
             <a:r>
+              <a:rPr lang="en-US" sz="2700" dirty="0" spc="-5" kern="0">
+                <a:solidFill>
+                  <a:srgbClr val="E4E1D8"/>
+                </a:solidFill>
+                <a:latin typeface="Be Vietnam Pro" pitchFamily="34" charset="0"/>
+                <a:ea typeface="Be Vietnam Pro" pitchFamily="34" charset="-122"/>
+                <a:cs typeface="Be Vietnam Pro" pitchFamily="34" charset="-120"/>
+              </a:rPr>
+              <a:t>EVCache:</a:t>
+            </a:r>
+            <a:r>
               <a:rPr lang="en-US" sz="2700" dirty="0" spc="-2" kern="0">
                 <a:solidFill>
                   <a:srgbClr val="E4E1D8"/>
@@ -12959,7 +13091,18 @@
                 <a:ea typeface="Be Vietnam Pro" pitchFamily="34" charset="-122"/>
                 <a:cs typeface="Be Vietnam Pro" pitchFamily="34" charset="-120"/>
               </a:rPr>
-              <a:t>Open</a:t>
+              <a:t> nhanh,</a:t>
+            </a:r>
+            <a:r>
+              <a:rPr lang="en-US" sz="2700" dirty="0" spc="-13" kern="0">
+                <a:solidFill>
+                  <a:srgbClr val="E4E1D8"/>
+                </a:solidFill>
+                <a:latin typeface="Be Vietnam Pro" pitchFamily="34" charset="0"/>
+                <a:ea typeface="Be Vietnam Pro" pitchFamily="34" charset="-122"/>
+                <a:cs typeface="Be Vietnam Pro" pitchFamily="34" charset="-120"/>
+              </a:rPr>
+              <a:t> mất</a:t>
             </a:r>
             <a:r>
               <a:rPr lang="en-US" sz="2700" dirty="0" spc="-1" kern="0">
@@ -12970,10 +13113,10 @@
                 <a:ea typeface="Be Vietnam Pro" pitchFamily="34" charset="-122"/>
                 <a:cs typeface="Be Vietnam Pro" pitchFamily="34" charset="-120"/>
               </a:rPr>
-              <a:t> Connect:</a:t>
-            </a:r>
-            <a:r>
-              <a:rPr lang="en-US" sz="2700" dirty="0" spc="-12" kern="0">
+              <a:t> thì</a:t>
+            </a:r>
+            <a:r>
+              <a:rPr lang="en-US" sz="2700" dirty="0" spc="-2" kern="0">
                 <a:solidFill>
                   <a:srgbClr val="E4E1D8"/>
                 </a:solidFill>
@@ -12981,7 +13124,7 @@
                 <a:ea typeface="Be Vietnam Pro" pitchFamily="34" charset="-122"/>
                 <a:cs typeface="Be Vietnam Pro" pitchFamily="34" charset="-120"/>
               </a:rPr>
-              <a:t> máy</a:t>
+              <a:t> nạp</a:t>
             </a:r>
             <a:r>
               <a:rPr lang="en-US" sz="2700" dirty="0" spc="-1" kern="0">
@@ -12992,40 +13135,7 @@
                 <a:ea typeface="Be Vietnam Pro" pitchFamily="34" charset="-122"/>
                 <a:cs typeface="Be Vietnam Pro" pitchFamily="34" charset="-120"/>
               </a:rPr>
-              <a:t> chủ</a:t>
-            </a:r>
-            <a:r>
-              <a:rPr lang="en-US" sz="2700" dirty="0" spc="1" kern="0">
-                <a:solidFill>
-                  <a:srgbClr val="E4E1D8"/>
-                </a:solidFill>
-                <a:latin typeface="Be Vietnam Pro" pitchFamily="34" charset="0"/>
-                <a:ea typeface="Be Vietnam Pro" pitchFamily="34" charset="-122"/>
-                <a:cs typeface="Be Vietnam Pro" pitchFamily="34" charset="-120"/>
-              </a:rPr>
-              <a:t> đặt</a:t>
-            </a:r>
-            <a:r>
-              <a:rPr lang="en-US" sz="2700" dirty="0" spc="-16" kern="0">
-                <a:solidFill>
-                  <a:srgbClr val="E4E1D8"/>
-                </a:solidFill>
-                <a:latin typeface="Be Vietnam Pro" pitchFamily="34" charset="0"/>
-                <a:ea typeface="Be Vietnam Pro" pitchFamily="34" charset="-122"/>
-                <a:cs typeface="Be Vietnam Pro" pitchFamily="34" charset="-120"/>
-              </a:rPr>
-              <a:t> gần</a:t>
-            </a:r>
-            <a:r>
-              <a:rPr lang="en-US" sz="2700" dirty="0" spc="-2" kern="0">
-                <a:solidFill>
-                  <a:srgbClr val="E4E1D8"/>
-                </a:solidFill>
-                <a:latin typeface="Be Vietnam Pro" pitchFamily="34" charset="0"/>
-                <a:ea typeface="Be Vietnam Pro" pitchFamily="34" charset="-122"/>
-                <a:cs typeface="Be Vietnam Pro" pitchFamily="34" charset="-120"/>
-              </a:rPr>
-              <a:t> nhà mạng.</a:t>
+              <a:t> lại.</a:t>
             </a:r>
             <a:endParaRPr lang="en-US" sz="2700" dirty="0"/>
           </a:p>
@@ -13122,6 +13232,17 @@
               <a:buNone/>
             </a:pPr>
             <a:r>
+              <a:rPr lang="en-US" sz="2700" dirty="0" spc="-16" kern="0">
+                <a:solidFill>
+                  <a:srgbClr val="E4E1D8"/>
+                </a:solidFill>
+                <a:latin typeface="Be Vietnam Pro" pitchFamily="34" charset="0"/>
+                <a:ea typeface="Be Vietnam Pro" pitchFamily="34" charset="-122"/>
+                <a:cs typeface="Be Vietnam Pro" pitchFamily="34" charset="-120"/>
+              </a:rPr>
+              <a:t>Cassandra:</a:t>
+            </a:r>
+            <a:r>
               <a:rPr lang="en-US" sz="2700" dirty="0" spc="-2" kern="0">
                 <a:solidFill>
                   <a:srgbClr val="E4E1D8"/>
@@ -13130,10 +13251,10 @@
                 <a:ea typeface="Be Vietnam Pro" pitchFamily="34" charset="-122"/>
                 <a:cs typeface="Be Vietnam Pro" pitchFamily="34" charset="-120"/>
               </a:rPr>
-              <a:t>Chaos</a:t>
-            </a:r>
-            <a:r>
-              <a:rPr lang="en-US" sz="2700" dirty="0" spc="-28" kern="0">
+              <a:t> ghi</a:t>
+            </a:r>
+            <a:r>
+              <a:rPr lang="en-US" sz="2700" dirty="0" spc="0" kern="0">
                 <a:solidFill>
                   <a:srgbClr val="E4E1D8"/>
                 </a:solidFill>
@@ -13141,10 +13262,10 @@
                 <a:ea typeface="Be Vietnam Pro" pitchFamily="34" charset="-122"/>
                 <a:cs typeface="Be Vietnam Pro" pitchFamily="34" charset="-120"/>
               </a:rPr>
-              <a:t> Monkey:</a:t>
-            </a:r>
-            <a:r>
-              <a:rPr lang="en-US" sz="2700" dirty="0" spc="0" kern="0">
+              <a:t> nhiều,</a:t>
+            </a:r>
+            <a:r>
+              <a:rPr lang="en-US" sz="2700" dirty="0" spc="-1" kern="0">
                 <a:solidFill>
                   <a:srgbClr val="E4E1D8"/>
                 </a:solidFill>
@@ -13152,10 +13273,10 @@
                 <a:ea typeface="Be Vietnam Pro" pitchFamily="34" charset="-122"/>
                 <a:cs typeface="Be Vietnam Pro" pitchFamily="34" charset="-120"/>
               </a:rPr>
-              <a:t> cố</a:t>
-            </a:r>
-            <a:r>
-              <a:rPr lang="en-US" sz="2700" dirty="0" spc="-2" kern="0">
+              <a:t> chịu</a:t>
+            </a:r>
+            <a:r>
+              <a:rPr lang="en-US" sz="2700" dirty="0" spc="-13" kern="0">
                 <a:solidFill>
                   <a:srgbClr val="E4E1D8"/>
                 </a:solidFill>
@@ -13163,10 +13284,10 @@
                 <a:ea typeface="Be Vietnam Pro" pitchFamily="34" charset="-122"/>
                 <a:cs typeface="Be Vietnam Pro" pitchFamily="34" charset="-120"/>
               </a:rPr>
-              <a:t> ý</a:t>
-            </a:r>
-            <a:r>
-              <a:rPr lang="en-US" sz="2700" dirty="0" spc="-25" kern="0">
+              <a:t> vài</a:t>
+            </a:r>
+            <a:r>
+              <a:rPr lang="en-US" sz="2700" dirty="0" spc="-11" kern="0">
                 <a:solidFill>
                   <a:srgbClr val="E4E1D8"/>
                 </a:solidFill>
@@ -13174,10 +13295,10 @@
                 <a:ea typeface="Be Vietnam Pro" pitchFamily="34" charset="-122"/>
                 <a:cs typeface="Be Vietnam Pro" pitchFamily="34" charset="-120"/>
               </a:rPr>
-              <a:t> tắt</a:t>
-            </a:r>
-            <a:r>
-              <a:rPr lang="en-US" sz="2700" dirty="0" spc="-12" kern="0">
+              <a:t> máy</a:t>
+            </a:r>
+            <a:r>
+              <a:rPr lang="en-US" sz="2700" dirty="0" spc="-3" kern="0">
                 <a:solidFill>
                   <a:srgbClr val="E4E1D8"/>
                 </a:solidFill>
@@ -13185,29 +13306,7 @@
                 <a:ea typeface="Be Vietnam Pro" pitchFamily="34" charset="-122"/>
                 <a:cs typeface="Be Vietnam Pro" pitchFamily="34" charset="-120"/>
               </a:rPr>
-              <a:t> máy</a:t>
-            </a:r>
-            <a:r>
-              <a:rPr lang="en-US" sz="2700" dirty="0" spc="9" kern="0">
-                <a:solidFill>
-                  <a:srgbClr val="E4E1D8"/>
-                </a:solidFill>
-                <a:latin typeface="Be Vietnam Pro" pitchFamily="34" charset="0"/>
-                <a:ea typeface="Be Vietnam Pro" pitchFamily="34" charset="-122"/>
-                <a:cs typeface="Be Vietnam Pro" pitchFamily="34" charset="-120"/>
-              </a:rPr>
-              <a:t> đang</a:t>
-            </a:r>
-            <a:r>
-              <a:rPr lang="en-US" sz="2700" dirty="0" spc="-8" kern="0">
-                <a:solidFill>
-                  <a:srgbClr val="E4E1D8"/>
-                </a:solidFill>
-                <a:latin typeface="Be Vietnam Pro" pitchFamily="34" charset="0"/>
-                <a:ea typeface="Be Vietnam Pro" pitchFamily="34" charset="-122"/>
-                <a:cs typeface="Be Vietnam Pro" pitchFamily="34" charset="-120"/>
-              </a:rPr>
-              <a:t> chạy.</a:t>
+              <a:t> hỏng.</a:t>
             </a:r>
             <a:endParaRPr lang="en-US" sz="2700" dirty="0"/>
           </a:p>
@@ -13299,7 +13398,7 @@
               <a:buNone/>
             </a:pPr>
             <a:r>
-              <a:rPr lang="en-US" sz="2700" dirty="0" spc="3" kern="0">
+              <a:rPr lang="en-US" sz="2700" dirty="0" spc="-12" kern="0">
                 <a:solidFill>
                   <a:srgbClr val="14161C"/>
                 </a:solidFill>
@@ -13307,7 +13406,29 @@
                 <a:ea typeface="Be Vietnam Pro" pitchFamily="34" charset="-122"/>
                 <a:cs typeface="Be Vietnam Pro" pitchFamily="34" charset="-120"/>
               </a:rPr>
-              <a:t>Cả</a:t>
+              <a:t>CockroachDB:</a:t>
+            </a:r>
+            <a:r>
+              <a:rPr lang="en-US" sz="2700" dirty="0" spc="-11" kern="0">
+                <a:solidFill>
+                  <a:srgbClr val="14161C"/>
+                </a:solidFill>
+                <a:latin typeface="Be Vietnam Pro" pitchFamily="34" charset="0"/>
+                <a:ea typeface="Be Vietnam Pro" pitchFamily="34" charset="-122"/>
+                <a:cs typeface="Be Vietnam Pro" pitchFamily="34" charset="-120"/>
+              </a:rPr>
+              <a:t> nhất</a:t>
+            </a:r>
+            <a:r>
+              <a:rPr lang="en-US" sz="2700" dirty="0" spc="0" kern="0">
+                <a:solidFill>
+                  <a:srgbClr val="14161C"/>
+                </a:solidFill>
+                <a:latin typeface="Be Vietnam Pro" pitchFamily="34" charset="0"/>
+                <a:ea typeface="Be Vietnam Pro" pitchFamily="34" charset="-122"/>
+                <a:cs typeface="Be Vietnam Pro" pitchFamily="34" charset="-120"/>
+              </a:rPr>
+              <a:t> quán,</a:t>
             </a:r>
             <a:r>
               <a:rPr lang="en-US" sz="2700" dirty="0" spc="-2" kern="0">
@@ -13318,10 +13439,10 @@
                 <a:ea typeface="Be Vietnam Pro" pitchFamily="34" charset="-122"/>
                 <a:cs typeface="Be Vietnam Pro" pitchFamily="34" charset="-120"/>
               </a:rPr>
-              <a:t> hai:</a:t>
-            </a:r>
-            <a:r>
-              <a:rPr lang="en-US" sz="2700" dirty="0" spc="-5" kern="0">
+              <a:t> không</a:t>
+            </a:r>
+            <a:r>
+              <a:rPr lang="en-US" sz="2700" dirty="0" spc="9" kern="0">
                 <a:solidFill>
                   <a:srgbClr val="14161C"/>
                 </a:solidFill>
@@ -13329,10 +13450,10 @@
                 <a:ea typeface="Be Vietnam Pro" pitchFamily="34" charset="-122"/>
                 <a:cs typeface="Be Vietnam Pro" pitchFamily="34" charset="-120"/>
               </a:rPr>
-              <a:t> thiết</a:t>
-            </a:r>
-            <a:r>
-              <a:rPr lang="en-US" sz="2700" dirty="0" spc="-44" kern="0">
+              <a:t> được</a:t>
+            </a:r>
+            <a:r>
+              <a:rPr lang="en-US" sz="2700" dirty="0" spc="-8" kern="0">
                 <a:solidFill>
                   <a:srgbClr val="14161C"/>
                 </a:solidFill>
@@ -13340,51 +13461,7 @@
                 <a:ea typeface="Be Vietnam Pro" pitchFamily="34" charset="-122"/>
                 <a:cs typeface="Be Vietnam Pro" pitchFamily="34" charset="-120"/>
               </a:rPr>
-              <a:t> kế</a:t>
-            </a:r>
-            <a:r>
-              <a:rPr lang="en-US" sz="2700" dirty="0" spc="-9" kern="0">
-                <a:solidFill>
-                  <a:srgbClr val="14161C"/>
-                </a:solidFill>
-                <a:latin typeface="Be Vietnam Pro" pitchFamily="34" charset="0"/>
-                <a:ea typeface="Be Vietnam Pro" pitchFamily="34" charset="-122"/>
-                <a:cs typeface="Be Vietnam Pro" pitchFamily="34" charset="-120"/>
-              </a:rPr>
-              <a:t> sẵn</a:t>
-            </a:r>
-            <a:r>
-              <a:rPr lang="en-US" sz="2700" dirty="0" spc="-1" kern="0">
-                <a:solidFill>
-                  <a:srgbClr val="14161C"/>
-                </a:solidFill>
-                <a:latin typeface="Be Vietnam Pro" pitchFamily="34" charset="0"/>
-                <a:ea typeface="Be Vietnam Pro" pitchFamily="34" charset="-122"/>
-                <a:cs typeface="Be Vietnam Pro" pitchFamily="34" charset="-120"/>
-              </a:rPr>
-              <a:t> cho</a:t>
-            </a:r>
-            <a:r>
-              <a:rPr lang="en-US" sz="2700" dirty="0" spc="-2" kern="0">
-                <a:solidFill>
-                  <a:srgbClr val="14161C"/>
-                </a:solidFill>
-                <a:latin typeface="Be Vietnam Pro" pitchFamily="34" charset="0"/>
-                <a:ea typeface="Be Vietnam Pro" pitchFamily="34" charset="-122"/>
-                <a:cs typeface="Be Vietnam Pro" pitchFamily="34" charset="-120"/>
-              </a:rPr>
-              <a:t> hỏng</a:t>
-            </a:r>
-            <a:r>
-              <a:rPr lang="en-US" sz="2700" dirty="0" spc="-4" kern="0">
-                <a:solidFill>
-                  <a:srgbClr val="14161C"/>
-                </a:solidFill>
-                <a:latin typeface="Be Vietnam Pro" pitchFamily="34" charset="0"/>
-                <a:ea typeface="Be Vietnam Pro" pitchFamily="34" charset="-122"/>
-                <a:cs typeface="Be Vietnam Pro" pitchFamily="34" charset="-120"/>
-              </a:rPr>
-              <a:t> hóc.</a:t>
+              <a:t> sai.</a:t>
             </a:r>
             <a:endParaRPr lang="en-US" sz="2700" dirty="0"/>
           </a:p>
